--- a/12_libraries/12_libraries.pptx
+++ b/12_libraries/12_libraries.pptx
@@ -5,27 +5,29 @@
     <p:sldMasterId id="2147483660" r:id="rId1"/>
   </p:sldMasterIdLst>
   <p:notesMasterIdLst>
-    <p:notesMasterId r:id="rId20"/>
+    <p:notesMasterId r:id="rId22"/>
   </p:notesMasterIdLst>
   <p:sldIdLst>
     <p:sldId id="256" r:id="rId2"/>
     <p:sldId id="352" r:id="rId3"/>
     <p:sldId id="367" r:id="rId4"/>
     <p:sldId id="368" r:id="rId5"/>
-    <p:sldId id="369" r:id="rId6"/>
-    <p:sldId id="353" r:id="rId7"/>
-    <p:sldId id="354" r:id="rId8"/>
-    <p:sldId id="370" r:id="rId9"/>
-    <p:sldId id="366" r:id="rId10"/>
-    <p:sldId id="357" r:id="rId11"/>
-    <p:sldId id="361" r:id="rId12"/>
-    <p:sldId id="358" r:id="rId13"/>
-    <p:sldId id="362" r:id="rId14"/>
-    <p:sldId id="360" r:id="rId15"/>
-    <p:sldId id="359" r:id="rId16"/>
-    <p:sldId id="363" r:id="rId17"/>
-    <p:sldId id="364" r:id="rId18"/>
-    <p:sldId id="290" r:id="rId19"/>
+    <p:sldId id="372" r:id="rId6"/>
+    <p:sldId id="371" r:id="rId7"/>
+    <p:sldId id="369" r:id="rId8"/>
+    <p:sldId id="353" r:id="rId9"/>
+    <p:sldId id="354" r:id="rId10"/>
+    <p:sldId id="370" r:id="rId11"/>
+    <p:sldId id="366" r:id="rId12"/>
+    <p:sldId id="357" r:id="rId13"/>
+    <p:sldId id="361" r:id="rId14"/>
+    <p:sldId id="358" r:id="rId15"/>
+    <p:sldId id="362" r:id="rId16"/>
+    <p:sldId id="360" r:id="rId17"/>
+    <p:sldId id="359" r:id="rId18"/>
+    <p:sldId id="363" r:id="rId19"/>
+    <p:sldId id="364" r:id="rId20"/>
+    <p:sldId id="290" r:id="rId21"/>
   </p:sldIdLst>
   <p:sldSz cx="12192000" cy="6858000"/>
   <p:notesSz cx="6858000" cy="9144000"/>
@@ -651,7 +653,7 @@
     </p:spTree>
     <p:extLst>
       <p:ext uri="{BB962C8B-B14F-4D97-AF65-F5344CB8AC3E}">
-        <p14:creationId xmlns:p14="http://schemas.microsoft.com/office/powerpoint/2010/main" val="2236959668"/>
+        <p14:creationId xmlns:p14="http://schemas.microsoft.com/office/powerpoint/2010/main" val="1380613186"/>
       </p:ext>
     </p:extLst>
   </p:cSld>
@@ -735,7 +737,7 @@
     </p:spTree>
     <p:extLst>
       <p:ext uri="{BB962C8B-B14F-4D97-AF65-F5344CB8AC3E}">
-        <p14:creationId xmlns:p14="http://schemas.microsoft.com/office/powerpoint/2010/main" val="2351175339"/>
+        <p14:creationId xmlns:p14="http://schemas.microsoft.com/office/powerpoint/2010/main" val="502112406"/>
       </p:ext>
     </p:extLst>
   </p:cSld>
@@ -819,7 +821,7 @@
     </p:spTree>
     <p:extLst>
       <p:ext uri="{BB962C8B-B14F-4D97-AF65-F5344CB8AC3E}">
-        <p14:creationId xmlns:p14="http://schemas.microsoft.com/office/powerpoint/2010/main" val="2646206206"/>
+        <p14:creationId xmlns:p14="http://schemas.microsoft.com/office/powerpoint/2010/main" val="2236959668"/>
       </p:ext>
     </p:extLst>
   </p:cSld>
@@ -903,7 +905,7 @@
     </p:spTree>
     <p:extLst>
       <p:ext uri="{BB962C8B-B14F-4D97-AF65-F5344CB8AC3E}">
-        <p14:creationId xmlns:p14="http://schemas.microsoft.com/office/powerpoint/2010/main" val="888644911"/>
+        <p14:creationId xmlns:p14="http://schemas.microsoft.com/office/powerpoint/2010/main" val="2351175339"/>
       </p:ext>
     </p:extLst>
   </p:cSld>
@@ -987,7 +989,7 @@
     </p:spTree>
     <p:extLst>
       <p:ext uri="{BB962C8B-B14F-4D97-AF65-F5344CB8AC3E}">
-        <p14:creationId xmlns:p14="http://schemas.microsoft.com/office/powerpoint/2010/main" val="2853820862"/>
+        <p14:creationId xmlns:p14="http://schemas.microsoft.com/office/powerpoint/2010/main" val="2646206206"/>
       </p:ext>
     </p:extLst>
   </p:cSld>
@@ -1071,7 +1073,7 @@
     </p:spTree>
     <p:extLst>
       <p:ext uri="{BB962C8B-B14F-4D97-AF65-F5344CB8AC3E}">
-        <p14:creationId xmlns:p14="http://schemas.microsoft.com/office/powerpoint/2010/main" val="1973922034"/>
+        <p14:creationId xmlns:p14="http://schemas.microsoft.com/office/powerpoint/2010/main" val="888644911"/>
       </p:ext>
     </p:extLst>
   </p:cSld>
@@ -1155,7 +1157,7 @@
     </p:spTree>
     <p:extLst>
       <p:ext uri="{BB962C8B-B14F-4D97-AF65-F5344CB8AC3E}">
-        <p14:creationId xmlns:p14="http://schemas.microsoft.com/office/powerpoint/2010/main" val="1910216527"/>
+        <p14:creationId xmlns:p14="http://schemas.microsoft.com/office/powerpoint/2010/main" val="2853820862"/>
       </p:ext>
     </p:extLst>
   </p:cSld>
@@ -1239,7 +1241,7 @@
     </p:spTree>
     <p:extLst>
       <p:ext uri="{BB962C8B-B14F-4D97-AF65-F5344CB8AC3E}">
-        <p14:creationId xmlns:p14="http://schemas.microsoft.com/office/powerpoint/2010/main" val="4106791889"/>
+        <p14:creationId xmlns:p14="http://schemas.microsoft.com/office/powerpoint/2010/main" val="1973922034"/>
       </p:ext>
     </p:extLst>
   </p:cSld>
@@ -1323,7 +1325,91 @@
     </p:spTree>
     <p:extLst>
       <p:ext uri="{BB962C8B-B14F-4D97-AF65-F5344CB8AC3E}">
-        <p14:creationId xmlns:p14="http://schemas.microsoft.com/office/powerpoint/2010/main" val="1218560485"/>
+        <p14:creationId xmlns:p14="http://schemas.microsoft.com/office/powerpoint/2010/main" val="1910216527"/>
+      </p:ext>
+    </p:extLst>
+  </p:cSld>
+  <p:clrMapOvr>
+    <a:masterClrMapping/>
+  </p:clrMapOvr>
+</p:notes>
+</file>
+
+<file path=ppt/notesSlides/notesSlide19.xml><?xml version="1.0" encoding="utf-8"?>
+<p:notes xmlns:a="http://schemas.openxmlformats.org/drawingml/2006/main" xmlns:r="http://schemas.openxmlformats.org/officeDocument/2006/relationships" xmlns:p="http://schemas.openxmlformats.org/presentationml/2006/main">
+  <p:cSld>
+    <p:spTree>
+      <p:nvGrpSpPr>
+        <p:cNvPr id="1" name=""/>
+        <p:cNvGrpSpPr/>
+        <p:nvPr/>
+      </p:nvGrpSpPr>
+      <p:grpSpPr>
+        <a:xfrm>
+          <a:off x="0" y="0"/>
+          <a:ext cx="0" cy="0"/>
+          <a:chOff x="0" y="0"/>
+          <a:chExt cx="0" cy="0"/>
+        </a:xfrm>
+      </p:grpSpPr>
+      <p:sp>
+        <p:nvSpPr>
+          <p:cNvPr id="2" name="Образ слайда 1"/>
+          <p:cNvSpPr>
+            <a:spLocks noGrp="1" noRot="1" noChangeAspect="1"/>
+          </p:cNvSpPr>
+          <p:nvPr>
+            <p:ph type="sldImg"/>
+          </p:nvPr>
+        </p:nvSpPr>
+        <p:spPr/>
+      </p:sp>
+      <p:sp>
+        <p:nvSpPr>
+          <p:cNvPr id="3" name="Заметки 2"/>
+          <p:cNvSpPr>
+            <a:spLocks noGrp="1"/>
+          </p:cNvSpPr>
+          <p:nvPr>
+            <p:ph type="body" idx="1"/>
+          </p:nvPr>
+        </p:nvSpPr>
+        <p:spPr/>
+        <p:txBody>
+          <a:bodyPr/>
+          <a:lstStyle/>
+          <a:p>
+            <a:endParaRPr lang="ru-RU" dirty="0"/>
+          </a:p>
+        </p:txBody>
+      </p:sp>
+      <p:sp>
+        <p:nvSpPr>
+          <p:cNvPr id="4" name="Номер слайда 3"/>
+          <p:cNvSpPr>
+            <a:spLocks noGrp="1"/>
+          </p:cNvSpPr>
+          <p:nvPr>
+            <p:ph type="sldNum" sz="quarter" idx="10"/>
+          </p:nvPr>
+        </p:nvSpPr>
+        <p:spPr/>
+        <p:txBody>
+          <a:bodyPr/>
+          <a:lstStyle/>
+          <a:p>
+            <a:fld id="{207EAB29-8E86-49C7-96F5-7C9D72076108}" type="slidenum">
+              <a:rPr lang="ru-RU" smtClean="0"/>
+              <a:t>19</a:t>
+            </a:fld>
+            <a:endParaRPr lang="ru-RU"/>
+          </a:p>
+        </p:txBody>
+      </p:sp>
+    </p:spTree>
+    <p:extLst>
+      <p:ext uri="{BB962C8B-B14F-4D97-AF65-F5344CB8AC3E}">
+        <p14:creationId xmlns:p14="http://schemas.microsoft.com/office/powerpoint/2010/main" val="4106791889"/>
       </p:ext>
     </p:extLst>
   </p:cSld>
@@ -1408,6 +1494,90 @@
     <p:extLst>
       <p:ext uri="{BB962C8B-B14F-4D97-AF65-F5344CB8AC3E}">
         <p14:creationId xmlns:p14="http://schemas.microsoft.com/office/powerpoint/2010/main" val="3460866951"/>
+      </p:ext>
+    </p:extLst>
+  </p:cSld>
+  <p:clrMapOvr>
+    <a:masterClrMapping/>
+  </p:clrMapOvr>
+</p:notes>
+</file>
+
+<file path=ppt/notesSlides/notesSlide20.xml><?xml version="1.0" encoding="utf-8"?>
+<p:notes xmlns:a="http://schemas.openxmlformats.org/drawingml/2006/main" xmlns:r="http://schemas.openxmlformats.org/officeDocument/2006/relationships" xmlns:p="http://schemas.openxmlformats.org/presentationml/2006/main">
+  <p:cSld>
+    <p:spTree>
+      <p:nvGrpSpPr>
+        <p:cNvPr id="1" name=""/>
+        <p:cNvGrpSpPr/>
+        <p:nvPr/>
+      </p:nvGrpSpPr>
+      <p:grpSpPr>
+        <a:xfrm>
+          <a:off x="0" y="0"/>
+          <a:ext cx="0" cy="0"/>
+          <a:chOff x="0" y="0"/>
+          <a:chExt cx="0" cy="0"/>
+        </a:xfrm>
+      </p:grpSpPr>
+      <p:sp>
+        <p:nvSpPr>
+          <p:cNvPr id="2" name="Образ слайда 1"/>
+          <p:cNvSpPr>
+            <a:spLocks noGrp="1" noRot="1" noChangeAspect="1"/>
+          </p:cNvSpPr>
+          <p:nvPr>
+            <p:ph type="sldImg"/>
+          </p:nvPr>
+        </p:nvSpPr>
+        <p:spPr/>
+      </p:sp>
+      <p:sp>
+        <p:nvSpPr>
+          <p:cNvPr id="3" name="Заметки 2"/>
+          <p:cNvSpPr>
+            <a:spLocks noGrp="1"/>
+          </p:cNvSpPr>
+          <p:nvPr>
+            <p:ph type="body" idx="1"/>
+          </p:nvPr>
+        </p:nvSpPr>
+        <p:spPr/>
+        <p:txBody>
+          <a:bodyPr/>
+          <a:lstStyle/>
+          <a:p>
+            <a:endParaRPr lang="ru-RU" dirty="0"/>
+          </a:p>
+        </p:txBody>
+      </p:sp>
+      <p:sp>
+        <p:nvSpPr>
+          <p:cNvPr id="4" name="Номер слайда 3"/>
+          <p:cNvSpPr>
+            <a:spLocks noGrp="1"/>
+          </p:cNvSpPr>
+          <p:nvPr>
+            <p:ph type="sldNum" sz="quarter" idx="10"/>
+          </p:nvPr>
+        </p:nvSpPr>
+        <p:spPr/>
+        <p:txBody>
+          <a:bodyPr/>
+          <a:lstStyle/>
+          <a:p>
+            <a:fld id="{207EAB29-8E86-49C7-96F5-7C9D72076108}" type="slidenum">
+              <a:rPr lang="ru-RU" smtClean="0"/>
+              <a:t>20</a:t>
+            </a:fld>
+            <a:endParaRPr lang="ru-RU"/>
+          </a:p>
+        </p:txBody>
+      </p:sp>
+    </p:spTree>
+    <p:extLst>
+      <p:ext uri="{BB962C8B-B14F-4D97-AF65-F5344CB8AC3E}">
+        <p14:creationId xmlns:p14="http://schemas.microsoft.com/office/powerpoint/2010/main" val="1218560485"/>
       </p:ext>
     </p:extLst>
   </p:cSld>
@@ -1659,7 +1829,7 @@
     </p:spTree>
     <p:extLst>
       <p:ext uri="{BB962C8B-B14F-4D97-AF65-F5344CB8AC3E}">
-        <p14:creationId xmlns:p14="http://schemas.microsoft.com/office/powerpoint/2010/main" val="1877780653"/>
+        <p14:creationId xmlns:p14="http://schemas.microsoft.com/office/powerpoint/2010/main" val="1241614784"/>
       </p:ext>
     </p:extLst>
   </p:cSld>
@@ -1743,7 +1913,7 @@
     </p:spTree>
     <p:extLst>
       <p:ext uri="{BB962C8B-B14F-4D97-AF65-F5344CB8AC3E}">
-        <p14:creationId xmlns:p14="http://schemas.microsoft.com/office/powerpoint/2010/main" val="798799650"/>
+        <p14:creationId xmlns:p14="http://schemas.microsoft.com/office/powerpoint/2010/main" val="434519077"/>
       </p:ext>
     </p:extLst>
   </p:cSld>
@@ -1827,7 +1997,7 @@
     </p:spTree>
     <p:extLst>
       <p:ext uri="{BB962C8B-B14F-4D97-AF65-F5344CB8AC3E}">
-        <p14:creationId xmlns:p14="http://schemas.microsoft.com/office/powerpoint/2010/main" val="4141605999"/>
+        <p14:creationId xmlns:p14="http://schemas.microsoft.com/office/powerpoint/2010/main" val="1877780653"/>
       </p:ext>
     </p:extLst>
   </p:cSld>
@@ -1911,7 +2081,7 @@
     </p:spTree>
     <p:extLst>
       <p:ext uri="{BB962C8B-B14F-4D97-AF65-F5344CB8AC3E}">
-        <p14:creationId xmlns:p14="http://schemas.microsoft.com/office/powerpoint/2010/main" val="1380613186"/>
+        <p14:creationId xmlns:p14="http://schemas.microsoft.com/office/powerpoint/2010/main" val="798799650"/>
       </p:ext>
     </p:extLst>
   </p:cSld>
@@ -1995,7 +2165,7 @@
     </p:spTree>
     <p:extLst>
       <p:ext uri="{BB962C8B-B14F-4D97-AF65-F5344CB8AC3E}">
-        <p14:creationId xmlns:p14="http://schemas.microsoft.com/office/powerpoint/2010/main" val="502112406"/>
+        <p14:creationId xmlns:p14="http://schemas.microsoft.com/office/powerpoint/2010/main" val="4141605999"/>
       </p:ext>
     </p:extLst>
   </p:cSld>
@@ -4959,6 +5129,677 @@
         </p:nvSpPr>
         <p:spPr>
           <a:xfrm>
+            <a:off x="1133141" y="228164"/>
+            <a:ext cx="9925717" cy="927688"/>
+          </a:xfrm>
+          <a:prstGeom prst="rect">
+            <a:avLst/>
+          </a:prstGeom>
+        </p:spPr>
+        <p:txBody>
+          <a:bodyPr vert="horz" lIns="91440" tIns="45720" rIns="91440" bIns="45720" rtlCol="0" anchor="b">
+            <a:normAutofit/>
+          </a:bodyPr>
+          <a:lstStyle>
+            <a:lvl1pPr algn="ctr" defTabSz="914400" rtl="0" eaLnBrk="1" latinLnBrk="0" hangingPunct="1">
+              <a:lnSpc>
+                <a:spcPct val="90000"/>
+              </a:lnSpc>
+              <a:spcBef>
+                <a:spcPct val="0"/>
+              </a:spcBef>
+              <a:buNone/>
+              <a:defRPr sz="6000" kern="1200">
+                <a:solidFill>
+                  <a:schemeClr val="tx1"/>
+                </a:solidFill>
+                <a:latin typeface="+mj-lt"/>
+                <a:ea typeface="+mj-ea"/>
+                <a:cs typeface="+mj-cs"/>
+              </a:defRPr>
+            </a:lvl1pPr>
+          </a:lstStyle>
+          <a:p>
+            <a:r>
+              <a:rPr lang="en-US" dirty="0"/>
+              <a:t>Linker errors</a:t>
+            </a:r>
+          </a:p>
+        </p:txBody>
+      </p:sp>
+      <p:sp>
+        <p:nvSpPr>
+          <p:cNvPr id="8" name="TextBox 7">
+            <a:extLst>
+              <a:ext uri="{FF2B5EF4-FFF2-40B4-BE49-F238E27FC236}">
+                <a16:creationId xmlns:a16="http://schemas.microsoft.com/office/drawing/2014/main" id="{235A5ECC-94BA-4ACD-AD3F-BF9E058F1E5D}"/>
+              </a:ext>
+            </a:extLst>
+          </p:cNvPr>
+          <p:cNvSpPr txBox="1"/>
+          <p:nvPr/>
+        </p:nvSpPr>
+        <p:spPr>
+          <a:xfrm>
+            <a:off x="541698" y="2274838"/>
+            <a:ext cx="11108602" cy="2308324"/>
+          </a:xfrm>
+          <a:prstGeom prst="rect">
+            <a:avLst/>
+          </a:prstGeom>
+          <a:noFill/>
+        </p:spPr>
+        <p:txBody>
+          <a:bodyPr wrap="square">
+            <a:spAutoFit/>
+          </a:bodyPr>
+          <a:lstStyle/>
+          <a:p>
+            <a:pPr marL="285750" indent="-285750">
+              <a:buFont typeface="Arial" panose="020B0604020202020204" pitchFamily="34" charset="0"/>
+              <a:buChar char="•"/>
+            </a:pPr>
+            <a:r>
+              <a:rPr lang="ru-RU" sz="2400" dirty="0">
+                <a:latin typeface="Times New Roman" panose="02020603050405020304" pitchFamily="18" charset="0"/>
+                <a:cs typeface="Times New Roman" panose="02020603050405020304" pitchFamily="18" charset="0"/>
+              </a:rPr>
+              <a:t>Если функции нет в </a:t>
+            </a:r>
+            <a:r>
+              <a:rPr lang="ru-RU" sz="2400" dirty="0" err="1">
+                <a:latin typeface="Times New Roman" panose="02020603050405020304" pitchFamily="18" charset="0"/>
+                <a:cs typeface="Times New Roman" panose="02020603050405020304" pitchFamily="18" charset="0"/>
+              </a:rPr>
+              <a:t>sort.c</a:t>
+            </a:r>
+            <a:r>
+              <a:rPr lang="ru-RU" sz="2400" dirty="0">
+                <a:latin typeface="Times New Roman" panose="02020603050405020304" pitchFamily="18" charset="0"/>
+                <a:cs typeface="Times New Roman" panose="02020603050405020304" pitchFamily="18" charset="0"/>
+              </a:rPr>
+              <a:t>, тогда линковщик выдаст ошибку </a:t>
+            </a:r>
+            <a:r>
+              <a:rPr lang="ru-RU" sz="2400" b="1" dirty="0" err="1">
+                <a:latin typeface="Times New Roman" panose="02020603050405020304" pitchFamily="18" charset="0"/>
+                <a:cs typeface="Times New Roman" panose="02020603050405020304" pitchFamily="18" charset="0"/>
+              </a:rPr>
+              <a:t>undefined</a:t>
+            </a:r>
+            <a:r>
+              <a:rPr lang="ru-RU" sz="2400" b="1" dirty="0">
+                <a:latin typeface="Times New Roman" panose="02020603050405020304" pitchFamily="18" charset="0"/>
+                <a:cs typeface="Times New Roman" panose="02020603050405020304" pitchFamily="18" charset="0"/>
+              </a:rPr>
+              <a:t> </a:t>
+            </a:r>
+            <a:r>
+              <a:rPr lang="ru-RU" sz="2400" b="1" dirty="0" err="1">
+                <a:latin typeface="Times New Roman" panose="02020603050405020304" pitchFamily="18" charset="0"/>
+                <a:cs typeface="Times New Roman" panose="02020603050405020304" pitchFamily="18" charset="0"/>
+              </a:rPr>
+              <a:t>reference</a:t>
+            </a:r>
+            <a:r>
+              <a:rPr lang="ru-RU" sz="2400" b="1" dirty="0">
+                <a:latin typeface="Times New Roman" panose="02020603050405020304" pitchFamily="18" charset="0"/>
+                <a:cs typeface="Times New Roman" panose="02020603050405020304" pitchFamily="18" charset="0"/>
+              </a:rPr>
+              <a:t> </a:t>
+            </a:r>
+            <a:r>
+              <a:rPr lang="ru-RU" sz="2400" b="1" dirty="0" err="1">
+                <a:latin typeface="Times New Roman" panose="02020603050405020304" pitchFamily="18" charset="0"/>
+                <a:cs typeface="Times New Roman" panose="02020603050405020304" pitchFamily="18" charset="0"/>
+              </a:rPr>
+              <a:t>to</a:t>
+            </a:r>
+            <a:r>
+              <a:rPr lang="ru-RU" sz="2400" dirty="0">
+                <a:latin typeface="Times New Roman" panose="02020603050405020304" pitchFamily="18" charset="0"/>
+                <a:cs typeface="Times New Roman" panose="02020603050405020304" pitchFamily="18" charset="0"/>
+              </a:rPr>
+              <a:t> '</a:t>
+            </a:r>
+            <a:r>
+              <a:rPr lang="ru-RU" sz="2400" dirty="0" err="1">
+                <a:latin typeface="Times New Roman" panose="02020603050405020304" pitchFamily="18" charset="0"/>
+                <a:cs typeface="Times New Roman" panose="02020603050405020304" pitchFamily="18" charset="0"/>
+              </a:rPr>
+              <a:t>sort</a:t>
+            </a:r>
+            <a:r>
+              <a:rPr lang="ru-RU" sz="2400" dirty="0">
+                <a:latin typeface="Times New Roman" panose="02020603050405020304" pitchFamily="18" charset="0"/>
+                <a:cs typeface="Times New Roman" panose="02020603050405020304" pitchFamily="18" charset="0"/>
+              </a:rPr>
+              <a:t>' и завершит свою работу, т.к. не смог найти код функции </a:t>
+            </a:r>
+            <a:r>
+              <a:rPr lang="ru-RU" sz="2400" dirty="0" err="1">
+                <a:latin typeface="Times New Roman" panose="02020603050405020304" pitchFamily="18" charset="0"/>
+                <a:cs typeface="Times New Roman" panose="02020603050405020304" pitchFamily="18" charset="0"/>
+              </a:rPr>
+              <a:t>sort</a:t>
+            </a:r>
+            <a:r>
+              <a:rPr lang="ru-RU" sz="2400" dirty="0">
+                <a:latin typeface="Times New Roman" panose="02020603050405020304" pitchFamily="18" charset="0"/>
+                <a:cs typeface="Times New Roman" panose="02020603050405020304" pitchFamily="18" charset="0"/>
+              </a:rPr>
+              <a:t>()    </a:t>
+            </a:r>
+          </a:p>
+          <a:p>
+            <a:pPr marL="285750" indent="-285750">
+              <a:buFont typeface="Arial" panose="020B0604020202020204" pitchFamily="34" charset="0"/>
+              <a:buChar char="•"/>
+            </a:pPr>
+            <a:endParaRPr lang="en-US" sz="2400" dirty="0">
+              <a:latin typeface="Times New Roman" panose="02020603050405020304" pitchFamily="18" charset="0"/>
+              <a:cs typeface="Times New Roman" panose="02020603050405020304" pitchFamily="18" charset="0"/>
+            </a:endParaRPr>
+          </a:p>
+          <a:p>
+            <a:pPr marL="285750" indent="-285750">
+              <a:buFont typeface="Arial" panose="020B0604020202020204" pitchFamily="34" charset="0"/>
+              <a:buChar char="•"/>
+            </a:pPr>
+            <a:r>
+              <a:rPr lang="ru-RU" sz="2400" dirty="0">
+                <a:latin typeface="Times New Roman" panose="02020603050405020304" pitchFamily="18" charset="0"/>
+                <a:cs typeface="Times New Roman" panose="02020603050405020304" pitchFamily="18" charset="0"/>
+              </a:rPr>
+              <a:t>Если определение функции или две глобальных переменных с одним именем встречаются в нескольких объектных файлах, то линковщик также выдаст сообщение об ошибке: </a:t>
+            </a:r>
+            <a:r>
+              <a:rPr lang="ru-RU" sz="2400" b="1" dirty="0" err="1">
+                <a:latin typeface="Times New Roman" panose="02020603050405020304" pitchFamily="18" charset="0"/>
+                <a:cs typeface="Times New Roman" panose="02020603050405020304" pitchFamily="18" charset="0"/>
+              </a:rPr>
+              <a:t>multiple</a:t>
+            </a:r>
+            <a:r>
+              <a:rPr lang="ru-RU" sz="2400" b="1" dirty="0">
+                <a:latin typeface="Times New Roman" panose="02020603050405020304" pitchFamily="18" charset="0"/>
+                <a:cs typeface="Times New Roman" panose="02020603050405020304" pitchFamily="18" charset="0"/>
+              </a:rPr>
+              <a:t> </a:t>
+            </a:r>
+            <a:r>
+              <a:rPr lang="ru-RU" sz="2400" b="1" dirty="0" err="1">
+                <a:latin typeface="Times New Roman" panose="02020603050405020304" pitchFamily="18" charset="0"/>
+                <a:cs typeface="Times New Roman" panose="02020603050405020304" pitchFamily="18" charset="0"/>
+              </a:rPr>
+              <a:t>definition</a:t>
+            </a:r>
+            <a:r>
+              <a:rPr lang="ru-RU" sz="2400" b="1" dirty="0">
+                <a:latin typeface="Times New Roman" panose="02020603050405020304" pitchFamily="18" charset="0"/>
+                <a:cs typeface="Times New Roman" panose="02020603050405020304" pitchFamily="18" charset="0"/>
+              </a:rPr>
+              <a:t> </a:t>
+            </a:r>
+            <a:r>
+              <a:rPr lang="ru-RU" sz="2400" b="1" dirty="0" err="1">
+                <a:latin typeface="Times New Roman" panose="02020603050405020304" pitchFamily="18" charset="0"/>
+                <a:cs typeface="Times New Roman" panose="02020603050405020304" pitchFamily="18" charset="0"/>
+              </a:rPr>
+              <a:t>of</a:t>
+            </a:r>
+            <a:r>
+              <a:rPr lang="ru-RU" sz="2400" dirty="0">
+                <a:latin typeface="Times New Roman" panose="02020603050405020304" pitchFamily="18" charset="0"/>
+                <a:cs typeface="Times New Roman" panose="02020603050405020304" pitchFamily="18" charset="0"/>
+              </a:rPr>
+              <a:t> '</a:t>
+            </a:r>
+            <a:r>
+              <a:rPr lang="ru-RU" sz="2400" dirty="0" err="1">
+                <a:latin typeface="Times New Roman" panose="02020603050405020304" pitchFamily="18" charset="0"/>
+                <a:cs typeface="Times New Roman" panose="02020603050405020304" pitchFamily="18" charset="0"/>
+              </a:rPr>
+              <a:t>sort</a:t>
+            </a:r>
+            <a:r>
+              <a:rPr lang="ru-RU" sz="2400" dirty="0">
+                <a:latin typeface="Times New Roman" panose="02020603050405020304" pitchFamily="18" charset="0"/>
+                <a:cs typeface="Times New Roman" panose="02020603050405020304" pitchFamily="18" charset="0"/>
+              </a:rPr>
+              <a:t>' и завершит работу с ошибкой </a:t>
+            </a:r>
+          </a:p>
+        </p:txBody>
+      </p:sp>
+    </p:spTree>
+    <p:extLst>
+      <p:ext uri="{BB962C8B-B14F-4D97-AF65-F5344CB8AC3E}">
+        <p14:creationId xmlns:p14="http://schemas.microsoft.com/office/powerpoint/2010/main" val="3832565498"/>
+      </p:ext>
+    </p:extLst>
+  </p:cSld>
+  <p:clrMapOvr>
+    <a:masterClrMapping/>
+  </p:clrMapOvr>
+</p:sld>
+</file>
+
+<file path=ppt/slides/slide11.xml><?xml version="1.0" encoding="utf-8"?>
+<p:sld xmlns:a="http://schemas.openxmlformats.org/drawingml/2006/main" xmlns:r="http://schemas.openxmlformats.org/officeDocument/2006/relationships" xmlns:p="http://schemas.openxmlformats.org/presentationml/2006/main">
+  <p:cSld>
+    <p:spTree>
+      <p:nvGrpSpPr>
+        <p:cNvPr id="1" name=""/>
+        <p:cNvGrpSpPr/>
+        <p:nvPr/>
+      </p:nvGrpSpPr>
+      <p:grpSpPr>
+        <a:xfrm>
+          <a:off x="0" y="0"/>
+          <a:ext cx="0" cy="0"/>
+          <a:chOff x="0" y="0"/>
+          <a:chExt cx="0" cy="0"/>
+        </a:xfrm>
+      </p:grpSpPr>
+      <p:sp>
+        <p:nvSpPr>
+          <p:cNvPr id="5" name="Заголовок 2">
+            <a:extLst>
+              <a:ext uri="{FF2B5EF4-FFF2-40B4-BE49-F238E27FC236}">
+                <a16:creationId xmlns:a16="http://schemas.microsoft.com/office/drawing/2014/main" id="{1E627AF0-30EB-4DDF-ADF3-6C22571D55C0}"/>
+              </a:ext>
+            </a:extLst>
+          </p:cNvPr>
+          <p:cNvSpPr txBox="1">
+            <a:spLocks/>
+          </p:cNvSpPr>
+          <p:nvPr/>
+        </p:nvSpPr>
+        <p:spPr>
+          <a:xfrm>
+            <a:off x="1133141" y="289948"/>
+            <a:ext cx="9925717" cy="927688"/>
+          </a:xfrm>
+          <a:prstGeom prst="rect">
+            <a:avLst/>
+          </a:prstGeom>
+        </p:spPr>
+        <p:txBody>
+          <a:bodyPr vert="horz" lIns="91440" tIns="45720" rIns="91440" bIns="45720" rtlCol="0" anchor="b">
+            <a:normAutofit/>
+          </a:bodyPr>
+          <a:lstStyle>
+            <a:lvl1pPr algn="ctr" defTabSz="914400" rtl="0" eaLnBrk="1" latinLnBrk="0" hangingPunct="1">
+              <a:lnSpc>
+                <a:spcPct val="90000"/>
+              </a:lnSpc>
+              <a:spcBef>
+                <a:spcPct val="0"/>
+              </a:spcBef>
+              <a:buNone/>
+              <a:defRPr sz="6000" kern="1200">
+                <a:solidFill>
+                  <a:schemeClr val="tx1"/>
+                </a:solidFill>
+                <a:latin typeface="+mj-lt"/>
+                <a:ea typeface="+mj-ea"/>
+                <a:cs typeface="+mj-cs"/>
+              </a:defRPr>
+            </a:lvl1pPr>
+          </a:lstStyle>
+          <a:p>
+            <a:r>
+              <a:rPr lang="en-US" dirty="0"/>
+              <a:t>Library (</a:t>
+            </a:r>
+            <a:r>
+              <a:rPr lang="ru-RU" dirty="0"/>
+              <a:t>Библиотека)</a:t>
+            </a:r>
+            <a:endParaRPr lang="en-US" dirty="0"/>
+          </a:p>
+        </p:txBody>
+      </p:sp>
+      <p:pic>
+        <p:nvPicPr>
+          <p:cNvPr id="3" name="Рисунок 2">
+            <a:extLst>
+              <a:ext uri="{FF2B5EF4-FFF2-40B4-BE49-F238E27FC236}">
+                <a16:creationId xmlns:a16="http://schemas.microsoft.com/office/drawing/2014/main" id="{FC4D1E33-60E3-459E-9F2F-098110480D9C}"/>
+              </a:ext>
+            </a:extLst>
+          </p:cNvPr>
+          <p:cNvPicPr>
+            <a:picLocks noChangeAspect="1"/>
+          </p:cNvPicPr>
+          <p:nvPr/>
+        </p:nvPicPr>
+        <p:blipFill>
+          <a:blip r:embed="rId3"/>
+          <a:stretch>
+            <a:fillRect/>
+          </a:stretch>
+        </p:blipFill>
+        <p:spPr>
+          <a:xfrm>
+            <a:off x="6423659" y="2978363"/>
+            <a:ext cx="5271990" cy="3505874"/>
+          </a:xfrm>
+          <a:prstGeom prst="rect">
+            <a:avLst/>
+          </a:prstGeom>
+        </p:spPr>
+      </p:pic>
+      <p:sp>
+        <p:nvSpPr>
+          <p:cNvPr id="8" name="TextBox 7">
+            <a:extLst>
+              <a:ext uri="{FF2B5EF4-FFF2-40B4-BE49-F238E27FC236}">
+                <a16:creationId xmlns:a16="http://schemas.microsoft.com/office/drawing/2014/main" id="{A98EACA5-512A-4693-A1DF-4D2D060E9510}"/>
+              </a:ext>
+            </a:extLst>
+          </p:cNvPr>
+          <p:cNvSpPr txBox="1"/>
+          <p:nvPr/>
+        </p:nvSpPr>
+        <p:spPr>
+          <a:xfrm>
+            <a:off x="751439" y="1375101"/>
+            <a:ext cx="11110536" cy="707886"/>
+          </a:xfrm>
+          <a:prstGeom prst="rect">
+            <a:avLst/>
+          </a:prstGeom>
+          <a:noFill/>
+        </p:spPr>
+        <p:txBody>
+          <a:bodyPr wrap="square">
+            <a:spAutoFit/>
+          </a:bodyPr>
+          <a:lstStyle/>
+          <a:p>
+            <a:r>
+              <a:rPr lang="ru-RU" sz="2000" dirty="0">
+                <a:latin typeface="Times New Roman" panose="02020603050405020304" pitchFamily="18" charset="0"/>
+                <a:cs typeface="Times New Roman" panose="02020603050405020304" pitchFamily="18" charset="0"/>
+              </a:rPr>
+              <a:t>Библиотека (от англ. </a:t>
+            </a:r>
+            <a:r>
+              <a:rPr lang="ru-RU" sz="2000" dirty="0" err="1">
+                <a:latin typeface="Times New Roman" panose="02020603050405020304" pitchFamily="18" charset="0"/>
+                <a:cs typeface="Times New Roman" panose="02020603050405020304" pitchFamily="18" charset="0"/>
+              </a:rPr>
+              <a:t>library</a:t>
+            </a:r>
+            <a:r>
+              <a:rPr lang="ru-RU" sz="2000" dirty="0">
+                <a:latin typeface="Times New Roman" panose="02020603050405020304" pitchFamily="18" charset="0"/>
+                <a:cs typeface="Times New Roman" panose="02020603050405020304" pitchFamily="18" charset="0"/>
+              </a:rPr>
+              <a:t>) - это сборник готового кода (функций, объектов), который мы подключаем к своей программе, чтобы не изобретать велосипед. </a:t>
+            </a:r>
+          </a:p>
+        </p:txBody>
+      </p:sp>
+      <p:sp>
+        <p:nvSpPr>
+          <p:cNvPr id="12" name="TextBox 11">
+            <a:extLst>
+              <a:ext uri="{FF2B5EF4-FFF2-40B4-BE49-F238E27FC236}">
+                <a16:creationId xmlns:a16="http://schemas.microsoft.com/office/drawing/2014/main" id="{FEC82242-ADF5-4315-A7EA-151DD95F8A12}"/>
+              </a:ext>
+            </a:extLst>
+          </p:cNvPr>
+          <p:cNvSpPr txBox="1"/>
+          <p:nvPr/>
+        </p:nvSpPr>
+        <p:spPr>
+          <a:xfrm>
+            <a:off x="688063" y="2162040"/>
+            <a:ext cx="5569272" cy="4093428"/>
+          </a:xfrm>
+          <a:prstGeom prst="rect">
+            <a:avLst/>
+          </a:prstGeom>
+          <a:noFill/>
+        </p:spPr>
+        <p:txBody>
+          <a:bodyPr wrap="square">
+            <a:spAutoFit/>
+          </a:bodyPr>
+          <a:lstStyle/>
+          <a:p>
+            <a:r>
+              <a:rPr lang="ru-RU" sz="2000" dirty="0">
+                <a:latin typeface="Times New Roman" panose="02020603050405020304" pitchFamily="18" charset="0"/>
+                <a:cs typeface="Times New Roman" panose="02020603050405020304" pitchFamily="18" charset="0"/>
+              </a:rPr>
+              <a:t>Для интерпретируемых языков (</a:t>
+            </a:r>
+            <a:r>
+              <a:rPr lang="ru-RU" sz="2000" dirty="0" err="1">
+                <a:latin typeface="Times New Roman" panose="02020603050405020304" pitchFamily="18" charset="0"/>
+                <a:cs typeface="Times New Roman" panose="02020603050405020304" pitchFamily="18" charset="0"/>
+              </a:rPr>
+              <a:t>python</a:t>
+            </a:r>
+            <a:r>
+              <a:rPr lang="ru-RU" sz="2000" dirty="0">
+                <a:latin typeface="Times New Roman" panose="02020603050405020304" pitchFamily="18" charset="0"/>
+                <a:cs typeface="Times New Roman" panose="02020603050405020304" pitchFamily="18" charset="0"/>
+              </a:rPr>
+              <a:t> например) библиотека — файл, содержащий либо код на исходном языке (.</a:t>
+            </a:r>
+            <a:r>
+              <a:rPr lang="ru-RU" sz="2000" dirty="0" err="1">
+                <a:latin typeface="Times New Roman" panose="02020603050405020304" pitchFamily="18" charset="0"/>
+                <a:cs typeface="Times New Roman" panose="02020603050405020304" pitchFamily="18" charset="0"/>
+              </a:rPr>
+              <a:t>py</a:t>
+            </a:r>
+            <a:r>
+              <a:rPr lang="ru-RU" sz="2000" dirty="0">
+                <a:latin typeface="Times New Roman" panose="02020603050405020304" pitchFamily="18" charset="0"/>
+                <a:cs typeface="Times New Roman" panose="02020603050405020304" pitchFamily="18" charset="0"/>
+              </a:rPr>
+              <a:t>), либо байт-код для виртуальной машины. Пример библиотеки для Python – </a:t>
+            </a:r>
+            <a:r>
+              <a:rPr lang="ru-RU" sz="2000" dirty="0" err="1">
+                <a:latin typeface="Times New Roman" panose="02020603050405020304" pitchFamily="18" charset="0"/>
+                <a:cs typeface="Times New Roman" panose="02020603050405020304" pitchFamily="18" charset="0"/>
+              </a:rPr>
+              <a:t>Tkinter</a:t>
+            </a:r>
+            <a:endParaRPr lang="en-US" sz="2000" dirty="0">
+              <a:latin typeface="Times New Roman" panose="02020603050405020304" pitchFamily="18" charset="0"/>
+              <a:cs typeface="Times New Roman" panose="02020603050405020304" pitchFamily="18" charset="0"/>
+            </a:endParaRPr>
+          </a:p>
+          <a:p>
+            <a:endParaRPr lang="en-US" sz="2000" dirty="0">
+              <a:latin typeface="Times New Roman" panose="02020603050405020304" pitchFamily="18" charset="0"/>
+              <a:cs typeface="Times New Roman" panose="02020603050405020304" pitchFamily="18" charset="0"/>
+            </a:endParaRPr>
+          </a:p>
+          <a:p>
+            <a:r>
+              <a:rPr lang="ru-RU" sz="2000" dirty="0">
+                <a:latin typeface="Times New Roman" panose="02020603050405020304" pitchFamily="18" charset="0"/>
+                <a:cs typeface="Times New Roman" panose="02020603050405020304" pitchFamily="18" charset="0"/>
+              </a:rPr>
+              <a:t>Пример библиотеки компилируемых языков (Си например): стандартная Си библиотека с функцией </a:t>
+            </a:r>
+            <a:r>
+              <a:rPr lang="ru-RU" sz="2000" dirty="0" err="1">
+                <a:latin typeface="Times New Roman" panose="02020603050405020304" pitchFamily="18" charset="0"/>
+                <a:cs typeface="Times New Roman" panose="02020603050405020304" pitchFamily="18" charset="0"/>
+              </a:rPr>
+              <a:t>printf</a:t>
+            </a:r>
+            <a:r>
+              <a:rPr lang="ru-RU" sz="2000" dirty="0">
+                <a:latin typeface="Times New Roman" panose="02020603050405020304" pitchFamily="18" charset="0"/>
+                <a:cs typeface="Times New Roman" panose="02020603050405020304" pitchFamily="18" charset="0"/>
+              </a:rPr>
+              <a:t>() – </a:t>
+            </a:r>
+            <a:r>
+              <a:rPr lang="en-US" sz="2000" dirty="0" err="1">
+                <a:latin typeface="Times New Roman" panose="02020603050405020304" pitchFamily="18" charset="0"/>
+                <a:cs typeface="Times New Roman" panose="02020603050405020304" pitchFamily="18" charset="0"/>
+              </a:rPr>
+              <a:t>LibC</a:t>
+            </a:r>
+            <a:r>
+              <a:rPr lang="ru-RU" sz="2000" dirty="0">
+                <a:latin typeface="Times New Roman" panose="02020603050405020304" pitchFamily="18" charset="0"/>
+                <a:cs typeface="Times New Roman" panose="02020603050405020304" pitchFamily="18" charset="0"/>
+              </a:rPr>
+              <a:t>. Реализация (логика) в библиотеке</a:t>
+            </a:r>
+            <a:r>
+              <a:rPr lang="en-US" sz="2000" dirty="0">
+                <a:latin typeface="Times New Roman" panose="02020603050405020304" pitchFamily="18" charset="0"/>
+                <a:cs typeface="Times New Roman" panose="02020603050405020304" pitchFamily="18" charset="0"/>
+              </a:rPr>
+              <a:t>, </a:t>
+            </a:r>
+            <a:r>
+              <a:rPr lang="ru-RU" sz="2000" dirty="0">
+                <a:latin typeface="Times New Roman" panose="02020603050405020304" pitchFamily="18" charset="0"/>
+                <a:cs typeface="Times New Roman" panose="02020603050405020304" pitchFamily="18" charset="0"/>
+              </a:rPr>
+              <a:t>интерфейс в заголовочном файле.</a:t>
+            </a:r>
+          </a:p>
+          <a:p>
+            <a:endParaRPr lang="en-US" sz="2000" dirty="0">
+              <a:latin typeface="Times New Roman" panose="02020603050405020304" pitchFamily="18" charset="0"/>
+              <a:cs typeface="Times New Roman" panose="02020603050405020304" pitchFamily="18" charset="0"/>
+            </a:endParaRPr>
+          </a:p>
+          <a:p>
+            <a:r>
+              <a:rPr lang="ru-RU" sz="2000" dirty="0">
+                <a:latin typeface="Times New Roman" panose="02020603050405020304" pitchFamily="18" charset="0"/>
+                <a:cs typeface="Times New Roman" panose="02020603050405020304" pitchFamily="18" charset="0"/>
+              </a:rPr>
+              <a:t>Стандартные пути в </a:t>
+            </a:r>
+            <a:r>
+              <a:rPr lang="en-US" sz="2000" dirty="0">
+                <a:latin typeface="Times New Roman" panose="02020603050405020304" pitchFamily="18" charset="0"/>
+                <a:cs typeface="Times New Roman" panose="02020603050405020304" pitchFamily="18" charset="0"/>
+              </a:rPr>
+              <a:t>Linux:</a:t>
+            </a:r>
+          </a:p>
+          <a:p>
+            <a:r>
+              <a:rPr lang="en-US" sz="2000" dirty="0">
+                <a:latin typeface="Times New Roman" panose="02020603050405020304" pitchFamily="18" charset="0"/>
+                <a:cs typeface="Times New Roman" panose="02020603050405020304" pitchFamily="18" charset="0"/>
+              </a:rPr>
+              <a:t>/</a:t>
+            </a:r>
+            <a:r>
+              <a:rPr lang="en-US" sz="2000" dirty="0" err="1">
+                <a:latin typeface="Times New Roman" panose="02020603050405020304" pitchFamily="18" charset="0"/>
+                <a:cs typeface="Times New Roman" panose="02020603050405020304" pitchFamily="18" charset="0"/>
+              </a:rPr>
+              <a:t>usr</a:t>
+            </a:r>
+            <a:r>
+              <a:rPr lang="en-US" sz="2000" dirty="0">
+                <a:latin typeface="Times New Roman" panose="02020603050405020304" pitchFamily="18" charset="0"/>
+                <a:cs typeface="Times New Roman" panose="02020603050405020304" pitchFamily="18" charset="0"/>
+              </a:rPr>
+              <a:t>/include </a:t>
+            </a:r>
+            <a:r>
+              <a:rPr lang="ru-RU" sz="2000" dirty="0">
+                <a:latin typeface="Times New Roman" panose="02020603050405020304" pitchFamily="18" charset="0"/>
+                <a:cs typeface="Times New Roman" panose="02020603050405020304" pitchFamily="18" charset="0"/>
+              </a:rPr>
+              <a:t>и </a:t>
+            </a:r>
+            <a:r>
+              <a:rPr lang="en-US" sz="2000" dirty="0">
+                <a:latin typeface="Times New Roman" panose="02020603050405020304" pitchFamily="18" charset="0"/>
+                <a:cs typeface="Times New Roman" panose="02020603050405020304" pitchFamily="18" charset="0"/>
+              </a:rPr>
+              <a:t>/</a:t>
+            </a:r>
+            <a:r>
+              <a:rPr lang="en-US" sz="2000" dirty="0" err="1">
+                <a:latin typeface="Times New Roman" panose="02020603050405020304" pitchFamily="18" charset="0"/>
+                <a:cs typeface="Times New Roman" panose="02020603050405020304" pitchFamily="18" charset="0"/>
+              </a:rPr>
+              <a:t>usr</a:t>
+            </a:r>
+            <a:r>
+              <a:rPr lang="en-US" sz="2000" dirty="0">
+                <a:latin typeface="Times New Roman" panose="02020603050405020304" pitchFamily="18" charset="0"/>
+                <a:cs typeface="Times New Roman" panose="02020603050405020304" pitchFamily="18" charset="0"/>
+              </a:rPr>
+              <a:t>/lib/</a:t>
+            </a:r>
+            <a:endParaRPr lang="ru-RU" sz="2000" dirty="0">
+              <a:latin typeface="Times New Roman" panose="02020603050405020304" pitchFamily="18" charset="0"/>
+              <a:cs typeface="Times New Roman" panose="02020603050405020304" pitchFamily="18" charset="0"/>
+            </a:endParaRPr>
+          </a:p>
+        </p:txBody>
+      </p:sp>
+    </p:spTree>
+    <p:extLst>
+      <p:ext uri="{BB962C8B-B14F-4D97-AF65-F5344CB8AC3E}">
+        <p14:creationId xmlns:p14="http://schemas.microsoft.com/office/powerpoint/2010/main" val="1664215080"/>
+      </p:ext>
+    </p:extLst>
+  </p:cSld>
+  <p:clrMapOvr>
+    <a:masterClrMapping/>
+  </p:clrMapOvr>
+</p:sld>
+</file>
+
+<file path=ppt/slides/slide12.xml><?xml version="1.0" encoding="utf-8"?>
+<p:sld xmlns:a="http://schemas.openxmlformats.org/drawingml/2006/main" xmlns:r="http://schemas.openxmlformats.org/officeDocument/2006/relationships" xmlns:p="http://schemas.openxmlformats.org/presentationml/2006/main">
+  <p:cSld>
+    <p:spTree>
+      <p:nvGrpSpPr>
+        <p:cNvPr id="1" name=""/>
+        <p:cNvGrpSpPr/>
+        <p:nvPr/>
+      </p:nvGrpSpPr>
+      <p:grpSpPr>
+        <a:xfrm>
+          <a:off x="0" y="0"/>
+          <a:ext cx="0" cy="0"/>
+          <a:chOff x="0" y="0"/>
+          <a:chExt cx="0" cy="0"/>
+        </a:xfrm>
+      </p:grpSpPr>
+      <p:sp>
+        <p:nvSpPr>
+          <p:cNvPr id="5" name="Заголовок 2">
+            <a:extLst>
+              <a:ext uri="{FF2B5EF4-FFF2-40B4-BE49-F238E27FC236}">
+                <a16:creationId xmlns:a16="http://schemas.microsoft.com/office/drawing/2014/main" id="{1E627AF0-30EB-4DDF-ADF3-6C22571D55C0}"/>
+              </a:ext>
+            </a:extLst>
+          </p:cNvPr>
+          <p:cNvSpPr txBox="1">
+            <a:spLocks/>
+          </p:cNvSpPr>
+          <p:nvPr/>
+        </p:nvSpPr>
+        <p:spPr>
+          <a:xfrm>
             <a:off x="1133141" y="182989"/>
             <a:ext cx="9925717" cy="927688"/>
           </a:xfrm>
@@ -5322,7 +6163,7 @@
 </p:sld>
 </file>
 
-<file path=ppt/slides/slide11.xml><?xml version="1.0" encoding="utf-8"?>
+<file path=ppt/slides/slide13.xml><?xml version="1.0" encoding="utf-8"?>
 <p:sld xmlns:a="http://schemas.openxmlformats.org/drawingml/2006/main" xmlns:r="http://schemas.openxmlformats.org/officeDocument/2006/relationships" xmlns:p="http://schemas.openxmlformats.org/presentationml/2006/main">
   <p:cSld>
     <p:spTree>
@@ -5759,7 +6600,7 @@
 </p:sld>
 </file>
 
-<file path=ppt/slides/slide12.xml><?xml version="1.0" encoding="utf-8"?>
+<file path=ppt/slides/slide14.xml><?xml version="1.0" encoding="utf-8"?>
 <p:sld xmlns:a="http://schemas.openxmlformats.org/drawingml/2006/main" xmlns:r="http://schemas.openxmlformats.org/officeDocument/2006/relationships" xmlns:p="http://schemas.openxmlformats.org/presentationml/2006/main">
   <p:cSld>
     <p:spTree>
@@ -6097,7 +6938,7 @@
 </p:sld>
 </file>
 
-<file path=ppt/slides/slide13.xml><?xml version="1.0" encoding="utf-8"?>
+<file path=ppt/slides/slide15.xml><?xml version="1.0" encoding="utf-8"?>
 <p:sld xmlns:a="http://schemas.openxmlformats.org/drawingml/2006/main" xmlns:r="http://schemas.openxmlformats.org/officeDocument/2006/relationships" xmlns:p="http://schemas.openxmlformats.org/presentationml/2006/main">
   <p:cSld>
     <p:spTree>
@@ -6897,7 +7738,7 @@
 </p:sld>
 </file>
 
-<file path=ppt/slides/slide14.xml><?xml version="1.0" encoding="utf-8"?>
+<file path=ppt/slides/slide16.xml><?xml version="1.0" encoding="utf-8"?>
 <p:sld xmlns:a="http://schemas.openxmlformats.org/drawingml/2006/main" xmlns:r="http://schemas.openxmlformats.org/officeDocument/2006/relationships" xmlns:p="http://schemas.openxmlformats.org/presentationml/2006/main">
   <p:cSld>
     <p:spTree>
@@ -7053,1525 +7894,6 @@
 </p:sld>
 </file>
 
-<file path=ppt/slides/slide15.xml><?xml version="1.0" encoding="utf-8"?>
-<p:sld xmlns:a="http://schemas.openxmlformats.org/drawingml/2006/main" xmlns:r="http://schemas.openxmlformats.org/officeDocument/2006/relationships" xmlns:p="http://schemas.openxmlformats.org/presentationml/2006/main">
-  <p:cSld>
-    <p:spTree>
-      <p:nvGrpSpPr>
-        <p:cNvPr id="1" name=""/>
-        <p:cNvGrpSpPr/>
-        <p:nvPr/>
-      </p:nvGrpSpPr>
-      <p:grpSpPr>
-        <a:xfrm>
-          <a:off x="0" y="0"/>
-          <a:ext cx="0" cy="0"/>
-          <a:chOff x="0" y="0"/>
-          <a:chExt cx="0" cy="0"/>
-        </a:xfrm>
-      </p:grpSpPr>
-      <p:sp>
-        <p:nvSpPr>
-          <p:cNvPr id="5" name="Заголовок 2">
-            <a:extLst>
-              <a:ext uri="{FF2B5EF4-FFF2-40B4-BE49-F238E27FC236}">
-                <a16:creationId xmlns:a16="http://schemas.microsoft.com/office/drawing/2014/main" id="{1E627AF0-30EB-4DDF-ADF3-6C22571D55C0}"/>
-              </a:ext>
-            </a:extLst>
-          </p:cNvPr>
-          <p:cNvSpPr txBox="1">
-            <a:spLocks/>
-          </p:cNvSpPr>
-          <p:nvPr/>
-        </p:nvSpPr>
-        <p:spPr>
-          <a:xfrm>
-            <a:off x="1133141" y="289948"/>
-            <a:ext cx="9925717" cy="927688"/>
-          </a:xfrm>
-          <a:prstGeom prst="rect">
-            <a:avLst/>
-          </a:prstGeom>
-        </p:spPr>
-        <p:txBody>
-          <a:bodyPr vert="horz" lIns="91440" tIns="45720" rIns="91440" bIns="45720" rtlCol="0" anchor="b">
-            <a:normAutofit/>
-          </a:bodyPr>
-          <a:lstStyle>
-            <a:lvl1pPr algn="ctr" defTabSz="914400" rtl="0" eaLnBrk="1" latinLnBrk="0" hangingPunct="1">
-              <a:lnSpc>
-                <a:spcPct val="90000"/>
-              </a:lnSpc>
-              <a:spcBef>
-                <a:spcPct val="0"/>
-              </a:spcBef>
-              <a:buNone/>
-              <a:defRPr sz="6000" kern="1200">
-                <a:solidFill>
-                  <a:schemeClr val="tx1"/>
-                </a:solidFill>
-                <a:latin typeface="+mj-lt"/>
-                <a:ea typeface="+mj-ea"/>
-                <a:cs typeface="+mj-cs"/>
-              </a:defRPr>
-            </a:lvl1pPr>
-          </a:lstStyle>
-          <a:p>
-            <a:r>
-              <a:rPr lang="en-US" dirty="0"/>
-              <a:t>Build Static Lib</a:t>
-            </a:r>
-          </a:p>
-        </p:txBody>
-      </p:sp>
-      <p:sp>
-        <p:nvSpPr>
-          <p:cNvPr id="7" name="TextBox 6">
-            <a:extLst>
-              <a:ext uri="{FF2B5EF4-FFF2-40B4-BE49-F238E27FC236}">
-                <a16:creationId xmlns:a16="http://schemas.microsoft.com/office/drawing/2014/main" id="{EA050FB2-8906-40F1-A60C-1482023095B3}"/>
-              </a:ext>
-            </a:extLst>
-          </p:cNvPr>
-          <p:cNvSpPr txBox="1"/>
-          <p:nvPr/>
-        </p:nvSpPr>
-        <p:spPr>
-          <a:xfrm>
-            <a:off x="3490971" y="2184684"/>
-            <a:ext cx="5046446" cy="3046988"/>
-          </a:xfrm>
-          <a:prstGeom prst="rect">
-            <a:avLst/>
-          </a:prstGeom>
-          <a:noFill/>
-        </p:spPr>
-        <p:txBody>
-          <a:bodyPr wrap="square">
-            <a:spAutoFit/>
-          </a:bodyPr>
-          <a:lstStyle/>
-          <a:p>
-            <a:r>
-              <a:rPr lang="en-US" sz="2400" b="0" dirty="0" err="1">
-                <a:solidFill>
-                  <a:srgbClr val="DCDCAA"/>
-                </a:solidFill>
-                <a:effectLst/>
-                <a:latin typeface="Consolas" panose="020B0609020204030204" pitchFamily="49" charset="0"/>
-              </a:rPr>
-              <a:t>gcc</a:t>
-            </a:r>
-            <a:r>
-              <a:rPr lang="en-US" sz="2400" b="0" dirty="0">
-                <a:solidFill>
-                  <a:srgbClr val="D4D4D4"/>
-                </a:solidFill>
-                <a:effectLst/>
-                <a:latin typeface="Consolas" panose="020B0609020204030204" pitchFamily="49" charset="0"/>
-              </a:rPr>
-              <a:t> </a:t>
-            </a:r>
-            <a:r>
-              <a:rPr lang="en-US" sz="2400" b="0" dirty="0" err="1">
-                <a:solidFill>
-                  <a:srgbClr val="CE9178"/>
-                </a:solidFill>
-                <a:effectLst/>
-                <a:latin typeface="Consolas" panose="020B0609020204030204" pitchFamily="49" charset="0"/>
-              </a:rPr>
-              <a:t>app.c</a:t>
-            </a:r>
-            <a:r>
-              <a:rPr lang="en-US" sz="2400" b="0" dirty="0">
-                <a:solidFill>
-                  <a:srgbClr val="D4D4D4"/>
-                </a:solidFill>
-                <a:effectLst/>
-                <a:latin typeface="Consolas" panose="020B0609020204030204" pitchFamily="49" charset="0"/>
-              </a:rPr>
-              <a:t> </a:t>
-            </a:r>
-            <a:r>
-              <a:rPr lang="en-US" sz="2400" b="0" dirty="0">
-                <a:solidFill>
-                  <a:srgbClr val="569CD6"/>
-                </a:solidFill>
-                <a:effectLst/>
-                <a:latin typeface="Consolas" panose="020B0609020204030204" pitchFamily="49" charset="0"/>
-              </a:rPr>
-              <a:t>-c</a:t>
-            </a:r>
-            <a:endParaRPr lang="en-US" sz="2400" b="0" dirty="0">
-              <a:solidFill>
-                <a:srgbClr val="CCCCCC"/>
-              </a:solidFill>
-              <a:effectLst/>
-              <a:latin typeface="Consolas" panose="020B0609020204030204" pitchFamily="49" charset="0"/>
-            </a:endParaRPr>
-          </a:p>
-          <a:p>
-            <a:r>
-              <a:rPr lang="en-US" sz="2400" b="0" dirty="0" err="1">
-                <a:solidFill>
-                  <a:srgbClr val="DCDCAA"/>
-                </a:solidFill>
-                <a:effectLst/>
-                <a:latin typeface="Consolas" panose="020B0609020204030204" pitchFamily="49" charset="0"/>
-              </a:rPr>
-              <a:t>gcc</a:t>
-            </a:r>
-            <a:r>
-              <a:rPr lang="en-US" sz="2400" b="0" dirty="0">
-                <a:solidFill>
-                  <a:srgbClr val="D4D4D4"/>
-                </a:solidFill>
-                <a:effectLst/>
-                <a:latin typeface="Consolas" panose="020B0609020204030204" pitchFamily="49" charset="0"/>
-              </a:rPr>
-              <a:t> </a:t>
-            </a:r>
-            <a:r>
-              <a:rPr lang="en-US" sz="2400" b="0" dirty="0" err="1">
-                <a:solidFill>
-                  <a:srgbClr val="CE9178"/>
-                </a:solidFill>
-                <a:effectLst/>
-                <a:latin typeface="Consolas" panose="020B0609020204030204" pitchFamily="49" charset="0"/>
-              </a:rPr>
-              <a:t>log.c</a:t>
-            </a:r>
-            <a:r>
-              <a:rPr lang="en-US" sz="2400" b="0" dirty="0">
-                <a:solidFill>
-                  <a:srgbClr val="D4D4D4"/>
-                </a:solidFill>
-                <a:effectLst/>
-                <a:latin typeface="Consolas" panose="020B0609020204030204" pitchFamily="49" charset="0"/>
-              </a:rPr>
-              <a:t> </a:t>
-            </a:r>
-            <a:r>
-              <a:rPr lang="en-US" sz="2400" b="0" dirty="0">
-                <a:solidFill>
-                  <a:srgbClr val="569CD6"/>
-                </a:solidFill>
-                <a:effectLst/>
-                <a:latin typeface="Consolas" panose="020B0609020204030204" pitchFamily="49" charset="0"/>
-              </a:rPr>
-              <a:t>-c</a:t>
-            </a:r>
-            <a:endParaRPr lang="en-US" sz="2400" b="0" dirty="0">
-              <a:solidFill>
-                <a:srgbClr val="CCCCCC"/>
-              </a:solidFill>
-              <a:effectLst/>
-              <a:latin typeface="Consolas" panose="020B0609020204030204" pitchFamily="49" charset="0"/>
-            </a:endParaRPr>
-          </a:p>
-          <a:p>
-            <a:br>
-              <a:rPr lang="en-US" sz="2400" b="0" dirty="0">
-                <a:solidFill>
-                  <a:srgbClr val="CCCCCC"/>
-                </a:solidFill>
-                <a:effectLst/>
-                <a:latin typeface="Consolas" panose="020B0609020204030204" pitchFamily="49" charset="0"/>
-              </a:rPr>
-            </a:br>
-            <a:r>
-              <a:rPr lang="en-US" sz="2400" b="0" dirty="0" err="1">
-                <a:solidFill>
-                  <a:srgbClr val="DCDCAA"/>
-                </a:solidFill>
-                <a:effectLst/>
-                <a:latin typeface="Consolas" panose="020B0609020204030204" pitchFamily="49" charset="0"/>
-              </a:rPr>
-              <a:t>ar</a:t>
-            </a:r>
-            <a:r>
-              <a:rPr lang="en-US" sz="2400" b="0" dirty="0">
-                <a:solidFill>
-                  <a:srgbClr val="D4D4D4"/>
-                </a:solidFill>
-                <a:effectLst/>
-                <a:latin typeface="Consolas" panose="020B0609020204030204" pitchFamily="49" charset="0"/>
-              </a:rPr>
-              <a:t> </a:t>
-            </a:r>
-            <a:r>
-              <a:rPr lang="en-US" sz="2400" b="0" dirty="0" err="1">
-                <a:solidFill>
-                  <a:srgbClr val="CE9178"/>
-                </a:solidFill>
-                <a:effectLst/>
-                <a:latin typeface="Consolas" panose="020B0609020204030204" pitchFamily="49" charset="0"/>
-              </a:rPr>
-              <a:t>rc</a:t>
-            </a:r>
-            <a:r>
-              <a:rPr lang="en-US" sz="2400" b="0" dirty="0">
-                <a:solidFill>
-                  <a:srgbClr val="D4D4D4"/>
-                </a:solidFill>
-                <a:effectLst/>
-                <a:latin typeface="Consolas" panose="020B0609020204030204" pitchFamily="49" charset="0"/>
-              </a:rPr>
-              <a:t> </a:t>
-            </a:r>
-            <a:r>
-              <a:rPr lang="en-US" sz="2400" b="0" dirty="0" err="1">
-                <a:solidFill>
-                  <a:srgbClr val="CE9178"/>
-                </a:solidFill>
-                <a:effectLst/>
-                <a:latin typeface="Consolas" panose="020B0609020204030204" pitchFamily="49" charset="0"/>
-              </a:rPr>
-              <a:t>libMY_LOG.a</a:t>
-            </a:r>
-            <a:r>
-              <a:rPr lang="en-US" sz="2400" b="0" dirty="0">
-                <a:solidFill>
-                  <a:srgbClr val="D4D4D4"/>
-                </a:solidFill>
-                <a:effectLst/>
-                <a:latin typeface="Consolas" panose="020B0609020204030204" pitchFamily="49" charset="0"/>
-              </a:rPr>
-              <a:t> </a:t>
-            </a:r>
-            <a:r>
-              <a:rPr lang="en-US" sz="2400" b="0" dirty="0" err="1">
-                <a:solidFill>
-                  <a:srgbClr val="CE9178"/>
-                </a:solidFill>
-                <a:effectLst/>
-                <a:latin typeface="Consolas" panose="020B0609020204030204" pitchFamily="49" charset="0"/>
-              </a:rPr>
-              <a:t>log.o</a:t>
-            </a:r>
-            <a:endParaRPr lang="en-US" sz="2400" b="0" dirty="0">
-              <a:solidFill>
-                <a:srgbClr val="CCCCCC"/>
-              </a:solidFill>
-              <a:effectLst/>
-              <a:latin typeface="Consolas" panose="020B0609020204030204" pitchFamily="49" charset="0"/>
-            </a:endParaRPr>
-          </a:p>
-          <a:p>
-            <a:br>
-              <a:rPr lang="en-US" sz="2400" b="0" dirty="0">
-                <a:solidFill>
-                  <a:srgbClr val="CCCCCC"/>
-                </a:solidFill>
-                <a:effectLst/>
-                <a:latin typeface="Consolas" panose="020B0609020204030204" pitchFamily="49" charset="0"/>
-              </a:rPr>
-            </a:br>
-            <a:r>
-              <a:rPr lang="en-US" sz="2400" b="0" dirty="0" err="1">
-                <a:solidFill>
-                  <a:srgbClr val="DCDCAA"/>
-                </a:solidFill>
-                <a:effectLst/>
-                <a:latin typeface="Consolas" panose="020B0609020204030204" pitchFamily="49" charset="0"/>
-              </a:rPr>
-              <a:t>gcc</a:t>
-            </a:r>
-            <a:r>
-              <a:rPr lang="en-US" sz="2400" b="0" dirty="0">
-                <a:solidFill>
-                  <a:srgbClr val="D4D4D4"/>
-                </a:solidFill>
-                <a:effectLst/>
-                <a:latin typeface="Consolas" panose="020B0609020204030204" pitchFamily="49" charset="0"/>
-              </a:rPr>
-              <a:t> </a:t>
-            </a:r>
-            <a:r>
-              <a:rPr lang="en-US" sz="2400" b="0" dirty="0" err="1">
-                <a:solidFill>
-                  <a:srgbClr val="CE9178"/>
-                </a:solidFill>
-                <a:effectLst/>
-                <a:latin typeface="Consolas" panose="020B0609020204030204" pitchFamily="49" charset="0"/>
-              </a:rPr>
-              <a:t>app.o</a:t>
-            </a:r>
-            <a:r>
-              <a:rPr lang="en-US" sz="2400" b="0" dirty="0">
-                <a:solidFill>
-                  <a:srgbClr val="D4D4D4"/>
-                </a:solidFill>
-                <a:effectLst/>
-                <a:latin typeface="Consolas" panose="020B0609020204030204" pitchFamily="49" charset="0"/>
-              </a:rPr>
-              <a:t> </a:t>
-            </a:r>
-            <a:r>
-              <a:rPr lang="en-US" sz="2400" b="0" dirty="0">
-                <a:solidFill>
-                  <a:srgbClr val="569CD6"/>
-                </a:solidFill>
-                <a:effectLst/>
-                <a:latin typeface="Consolas" panose="020B0609020204030204" pitchFamily="49" charset="0"/>
-              </a:rPr>
-              <a:t>-o</a:t>
-            </a:r>
-            <a:r>
-              <a:rPr lang="en-US" sz="2400" b="0" dirty="0">
-                <a:solidFill>
-                  <a:srgbClr val="D4D4D4"/>
-                </a:solidFill>
-                <a:effectLst/>
-                <a:latin typeface="Consolas" panose="020B0609020204030204" pitchFamily="49" charset="0"/>
-              </a:rPr>
-              <a:t> </a:t>
-            </a:r>
-            <a:r>
-              <a:rPr lang="en-US" sz="2400" b="0" dirty="0" err="1">
-                <a:solidFill>
-                  <a:srgbClr val="CE9178"/>
-                </a:solidFill>
-                <a:effectLst/>
-                <a:latin typeface="Consolas" panose="020B0609020204030204" pitchFamily="49" charset="0"/>
-              </a:rPr>
-              <a:t>static_exe</a:t>
-            </a:r>
-            <a:r>
-              <a:rPr lang="en-US" sz="2400" b="0" dirty="0">
-                <a:solidFill>
-                  <a:srgbClr val="D4D4D4"/>
-                </a:solidFill>
-                <a:effectLst/>
-                <a:latin typeface="Consolas" panose="020B0609020204030204" pitchFamily="49" charset="0"/>
-              </a:rPr>
-              <a:t> </a:t>
-            </a:r>
-            <a:r>
-              <a:rPr lang="en-US" sz="2400" b="0" dirty="0">
-                <a:solidFill>
-                  <a:srgbClr val="569CD6"/>
-                </a:solidFill>
-                <a:effectLst/>
-                <a:latin typeface="Consolas" panose="020B0609020204030204" pitchFamily="49" charset="0"/>
-              </a:rPr>
-              <a:t>-L.</a:t>
-            </a:r>
-            <a:r>
-              <a:rPr lang="en-US" sz="2400" b="0" dirty="0">
-                <a:solidFill>
-                  <a:srgbClr val="D4D4D4"/>
-                </a:solidFill>
-                <a:effectLst/>
-                <a:latin typeface="Consolas" panose="020B0609020204030204" pitchFamily="49" charset="0"/>
-              </a:rPr>
-              <a:t> </a:t>
-            </a:r>
-            <a:r>
-              <a:rPr lang="en-US" sz="2400" b="0" dirty="0">
-                <a:solidFill>
-                  <a:srgbClr val="569CD6"/>
-                </a:solidFill>
-                <a:effectLst/>
-                <a:latin typeface="Consolas" panose="020B0609020204030204" pitchFamily="49" charset="0"/>
-              </a:rPr>
-              <a:t>-</a:t>
-            </a:r>
-            <a:r>
-              <a:rPr lang="en-US" sz="2400" b="0" dirty="0" err="1">
-                <a:solidFill>
-                  <a:srgbClr val="569CD6"/>
-                </a:solidFill>
-                <a:effectLst/>
-                <a:latin typeface="Consolas" panose="020B0609020204030204" pitchFamily="49" charset="0"/>
-              </a:rPr>
-              <a:t>lMY_LOG</a:t>
-            </a:r>
-            <a:endParaRPr lang="en-US" sz="2400" b="0" dirty="0">
-              <a:solidFill>
-                <a:srgbClr val="CCCCCC"/>
-              </a:solidFill>
-              <a:effectLst/>
-              <a:latin typeface="Consolas" panose="020B0609020204030204" pitchFamily="49" charset="0"/>
-            </a:endParaRPr>
-          </a:p>
-          <a:p>
-            <a:r>
-              <a:rPr lang="en-US" sz="2400" b="0" dirty="0">
-                <a:solidFill>
-                  <a:srgbClr val="DCDCAA"/>
-                </a:solidFill>
-                <a:effectLst/>
-                <a:latin typeface="Consolas" panose="020B0609020204030204" pitchFamily="49" charset="0"/>
-              </a:rPr>
-              <a:t>./</a:t>
-            </a:r>
-            <a:r>
-              <a:rPr lang="en-US" sz="2400" b="0" dirty="0" err="1">
-                <a:solidFill>
-                  <a:srgbClr val="DCDCAA"/>
-                </a:solidFill>
-                <a:effectLst/>
-                <a:latin typeface="Consolas" panose="020B0609020204030204" pitchFamily="49" charset="0"/>
-              </a:rPr>
-              <a:t>static_exe</a:t>
-            </a:r>
-            <a:endParaRPr lang="en-US" sz="2400" b="0" dirty="0">
-              <a:solidFill>
-                <a:srgbClr val="CCCCCC"/>
-              </a:solidFill>
-              <a:effectLst/>
-              <a:latin typeface="Consolas" panose="020B0609020204030204" pitchFamily="49" charset="0"/>
-            </a:endParaRPr>
-          </a:p>
-        </p:txBody>
-      </p:sp>
-      <p:sp>
-        <p:nvSpPr>
-          <p:cNvPr id="17" name="TextBox 16">
-            <a:extLst>
-              <a:ext uri="{FF2B5EF4-FFF2-40B4-BE49-F238E27FC236}">
-                <a16:creationId xmlns:a16="http://schemas.microsoft.com/office/drawing/2014/main" id="{EE20546F-A1F7-4347-8F6F-45227F7E3C4E}"/>
-              </a:ext>
-            </a:extLst>
-          </p:cNvPr>
-          <p:cNvSpPr txBox="1"/>
-          <p:nvPr/>
-        </p:nvSpPr>
-        <p:spPr>
-          <a:xfrm>
-            <a:off x="182262" y="6198720"/>
-            <a:ext cx="6098058" cy="369332"/>
-          </a:xfrm>
-          <a:prstGeom prst="rect">
-            <a:avLst/>
-          </a:prstGeom>
-          <a:noFill/>
-        </p:spPr>
-        <p:txBody>
-          <a:bodyPr wrap="square">
-            <a:spAutoFit/>
-          </a:bodyPr>
-          <a:lstStyle/>
-          <a:p>
-            <a:r>
-              <a:rPr lang="en-US" dirty="0"/>
-              <a:t>*</a:t>
-            </a:r>
-            <a:r>
-              <a:rPr lang="ru-RU" dirty="0"/>
-              <a:t>Посмотреть таблицу символов</a:t>
-            </a:r>
-            <a:r>
-              <a:rPr lang="en-US" dirty="0"/>
-              <a:t> – </a:t>
-            </a:r>
-            <a:r>
-              <a:rPr lang="ru-RU" dirty="0"/>
-              <a:t>команда </a:t>
-            </a:r>
-            <a:r>
-              <a:rPr lang="en-US" dirty="0"/>
-              <a:t>nm</a:t>
-            </a:r>
-            <a:endParaRPr lang="ru-RU" dirty="0"/>
-          </a:p>
-        </p:txBody>
-      </p:sp>
-    </p:spTree>
-    <p:extLst>
-      <p:ext uri="{BB962C8B-B14F-4D97-AF65-F5344CB8AC3E}">
-        <p14:creationId xmlns:p14="http://schemas.microsoft.com/office/powerpoint/2010/main" val="818022012"/>
-      </p:ext>
-    </p:extLst>
-  </p:cSld>
-  <p:clrMapOvr>
-    <a:masterClrMapping/>
-  </p:clrMapOvr>
-</p:sld>
-</file>
-
-<file path=ppt/slides/slide16.xml><?xml version="1.0" encoding="utf-8"?>
-<p:sld xmlns:a="http://schemas.openxmlformats.org/drawingml/2006/main" xmlns:r="http://schemas.openxmlformats.org/officeDocument/2006/relationships" xmlns:p="http://schemas.openxmlformats.org/presentationml/2006/main">
-  <p:cSld>
-    <p:spTree>
-      <p:nvGrpSpPr>
-        <p:cNvPr id="1" name=""/>
-        <p:cNvGrpSpPr/>
-        <p:nvPr/>
-      </p:nvGrpSpPr>
-      <p:grpSpPr>
-        <a:xfrm>
-          <a:off x="0" y="0"/>
-          <a:ext cx="0" cy="0"/>
-          <a:chOff x="0" y="0"/>
-          <a:chExt cx="0" cy="0"/>
-        </a:xfrm>
-      </p:grpSpPr>
-      <p:sp>
-        <p:nvSpPr>
-          <p:cNvPr id="5" name="Заголовок 2">
-            <a:extLst>
-              <a:ext uri="{FF2B5EF4-FFF2-40B4-BE49-F238E27FC236}">
-                <a16:creationId xmlns:a16="http://schemas.microsoft.com/office/drawing/2014/main" id="{1E627AF0-30EB-4DDF-ADF3-6C22571D55C0}"/>
-              </a:ext>
-            </a:extLst>
-          </p:cNvPr>
-          <p:cNvSpPr txBox="1">
-            <a:spLocks/>
-          </p:cNvSpPr>
-          <p:nvPr/>
-        </p:nvSpPr>
-        <p:spPr>
-          <a:xfrm>
-            <a:off x="1133141" y="289948"/>
-            <a:ext cx="9925717" cy="927688"/>
-          </a:xfrm>
-          <a:prstGeom prst="rect">
-            <a:avLst/>
-          </a:prstGeom>
-        </p:spPr>
-        <p:txBody>
-          <a:bodyPr vert="horz" lIns="91440" tIns="45720" rIns="91440" bIns="45720" rtlCol="0" anchor="b">
-            <a:normAutofit/>
-          </a:bodyPr>
-          <a:lstStyle>
-            <a:lvl1pPr algn="ctr" defTabSz="914400" rtl="0" eaLnBrk="1" latinLnBrk="0" hangingPunct="1">
-              <a:lnSpc>
-                <a:spcPct val="90000"/>
-              </a:lnSpc>
-              <a:spcBef>
-                <a:spcPct val="0"/>
-              </a:spcBef>
-              <a:buNone/>
-              <a:defRPr sz="6000" kern="1200">
-                <a:solidFill>
-                  <a:schemeClr val="tx1"/>
-                </a:solidFill>
-                <a:latin typeface="+mj-lt"/>
-                <a:ea typeface="+mj-ea"/>
-                <a:cs typeface="+mj-cs"/>
-              </a:defRPr>
-            </a:lvl1pPr>
-          </a:lstStyle>
-          <a:p>
-            <a:r>
-              <a:rPr lang="en-US" dirty="0"/>
-              <a:t>Build Dynamic Lib</a:t>
-            </a:r>
-          </a:p>
-        </p:txBody>
-      </p:sp>
-      <p:sp>
-        <p:nvSpPr>
-          <p:cNvPr id="7" name="TextBox 6">
-            <a:extLst>
-              <a:ext uri="{FF2B5EF4-FFF2-40B4-BE49-F238E27FC236}">
-                <a16:creationId xmlns:a16="http://schemas.microsoft.com/office/drawing/2014/main" id="{549F152B-8A23-4D80-B05B-103BD5876A53}"/>
-              </a:ext>
-            </a:extLst>
-          </p:cNvPr>
-          <p:cNvSpPr txBox="1"/>
-          <p:nvPr/>
-        </p:nvSpPr>
-        <p:spPr>
-          <a:xfrm>
-            <a:off x="2575849" y="2143667"/>
-            <a:ext cx="8025614" cy="1323439"/>
-          </a:xfrm>
-          <a:prstGeom prst="rect">
-            <a:avLst/>
-          </a:prstGeom>
-          <a:noFill/>
-        </p:spPr>
-        <p:txBody>
-          <a:bodyPr wrap="square">
-            <a:spAutoFit/>
-          </a:bodyPr>
-          <a:lstStyle/>
-          <a:p>
-            <a:r>
-              <a:rPr lang="en-US" sz="2000" b="0" dirty="0" err="1">
-                <a:solidFill>
-                  <a:srgbClr val="DCDCAA"/>
-                </a:solidFill>
-                <a:effectLst/>
-                <a:latin typeface="Consolas" panose="020B0609020204030204" pitchFamily="49" charset="0"/>
-              </a:rPr>
-              <a:t>gcc</a:t>
-            </a:r>
-            <a:r>
-              <a:rPr lang="en-US" sz="2000" b="0" dirty="0">
-                <a:solidFill>
-                  <a:srgbClr val="D4D4D4"/>
-                </a:solidFill>
-                <a:effectLst/>
-                <a:latin typeface="Consolas" panose="020B0609020204030204" pitchFamily="49" charset="0"/>
-              </a:rPr>
-              <a:t> </a:t>
-            </a:r>
-            <a:r>
-              <a:rPr lang="en-US" sz="2000" b="0" dirty="0" err="1">
-                <a:solidFill>
-                  <a:srgbClr val="CE9178"/>
-                </a:solidFill>
-                <a:effectLst/>
-                <a:latin typeface="Consolas" panose="020B0609020204030204" pitchFamily="49" charset="0"/>
-              </a:rPr>
-              <a:t>app.c</a:t>
-            </a:r>
-            <a:r>
-              <a:rPr lang="en-US" sz="2000" b="0" dirty="0">
-                <a:solidFill>
-                  <a:srgbClr val="D4D4D4"/>
-                </a:solidFill>
-                <a:effectLst/>
-                <a:latin typeface="Consolas" panose="020B0609020204030204" pitchFamily="49" charset="0"/>
-              </a:rPr>
-              <a:t> </a:t>
-            </a:r>
-            <a:r>
-              <a:rPr lang="en-US" sz="2000" b="0" dirty="0">
-                <a:solidFill>
-                  <a:srgbClr val="569CD6"/>
-                </a:solidFill>
-                <a:effectLst/>
-                <a:latin typeface="Consolas" panose="020B0609020204030204" pitchFamily="49" charset="0"/>
-              </a:rPr>
-              <a:t>-c</a:t>
-            </a:r>
-            <a:endParaRPr lang="en-US" sz="2000" b="0" dirty="0">
-              <a:solidFill>
-                <a:srgbClr val="CCCCCC"/>
-              </a:solidFill>
-              <a:effectLst/>
-              <a:latin typeface="Consolas" panose="020B0609020204030204" pitchFamily="49" charset="0"/>
-            </a:endParaRPr>
-          </a:p>
-          <a:p>
-            <a:r>
-              <a:rPr lang="en-US" sz="2000" b="0" dirty="0" err="1">
-                <a:solidFill>
-                  <a:srgbClr val="DCDCAA"/>
-                </a:solidFill>
-                <a:effectLst/>
-                <a:latin typeface="Consolas" panose="020B0609020204030204" pitchFamily="49" charset="0"/>
-              </a:rPr>
-              <a:t>gcc</a:t>
-            </a:r>
-            <a:r>
-              <a:rPr lang="en-US" sz="2000" b="0" dirty="0">
-                <a:solidFill>
-                  <a:srgbClr val="D4D4D4"/>
-                </a:solidFill>
-                <a:effectLst/>
-                <a:latin typeface="Consolas" panose="020B0609020204030204" pitchFamily="49" charset="0"/>
-              </a:rPr>
-              <a:t> </a:t>
-            </a:r>
-            <a:r>
-              <a:rPr lang="en-US" sz="2000" b="0" dirty="0" err="1">
-                <a:solidFill>
-                  <a:srgbClr val="CE9178"/>
-                </a:solidFill>
-                <a:effectLst/>
-                <a:latin typeface="Consolas" panose="020B0609020204030204" pitchFamily="49" charset="0"/>
-              </a:rPr>
-              <a:t>log.c</a:t>
-            </a:r>
-            <a:r>
-              <a:rPr lang="en-US" sz="2000" b="0" dirty="0">
-                <a:solidFill>
-                  <a:srgbClr val="D4D4D4"/>
-                </a:solidFill>
-                <a:effectLst/>
-                <a:latin typeface="Consolas" panose="020B0609020204030204" pitchFamily="49" charset="0"/>
-              </a:rPr>
-              <a:t> </a:t>
-            </a:r>
-            <a:r>
-              <a:rPr lang="en-US" sz="2000" b="0" dirty="0">
-                <a:solidFill>
-                  <a:srgbClr val="569CD6"/>
-                </a:solidFill>
-                <a:effectLst/>
-                <a:latin typeface="Consolas" panose="020B0609020204030204" pitchFamily="49" charset="0"/>
-              </a:rPr>
-              <a:t>-c</a:t>
-            </a:r>
-            <a:r>
-              <a:rPr lang="en-US" sz="2000" b="0" dirty="0">
-                <a:solidFill>
-                  <a:srgbClr val="D4D4D4"/>
-                </a:solidFill>
-                <a:effectLst/>
-                <a:latin typeface="Consolas" panose="020B0609020204030204" pitchFamily="49" charset="0"/>
-              </a:rPr>
-              <a:t> </a:t>
-            </a:r>
-            <a:r>
-              <a:rPr lang="en-US" sz="2000" b="0" dirty="0">
-                <a:solidFill>
-                  <a:srgbClr val="569CD6"/>
-                </a:solidFill>
-                <a:effectLst/>
-                <a:latin typeface="Consolas" panose="020B0609020204030204" pitchFamily="49" charset="0"/>
-              </a:rPr>
-              <a:t>-</a:t>
-            </a:r>
-            <a:r>
-              <a:rPr lang="en-US" sz="2000" b="0" dirty="0" err="1">
-                <a:solidFill>
-                  <a:srgbClr val="569CD6"/>
-                </a:solidFill>
-                <a:effectLst/>
-                <a:latin typeface="Consolas" panose="020B0609020204030204" pitchFamily="49" charset="0"/>
-              </a:rPr>
-              <a:t>fPIC</a:t>
-            </a:r>
-            <a:endParaRPr lang="en-US" sz="2000" b="0" dirty="0">
-              <a:solidFill>
-                <a:srgbClr val="CCCCCC"/>
-              </a:solidFill>
-              <a:effectLst/>
-              <a:latin typeface="Consolas" panose="020B0609020204030204" pitchFamily="49" charset="0"/>
-            </a:endParaRPr>
-          </a:p>
-          <a:p>
-            <a:br>
-              <a:rPr lang="en-US" sz="2000" b="0" dirty="0">
-                <a:solidFill>
-                  <a:srgbClr val="CCCCCC"/>
-                </a:solidFill>
-                <a:effectLst/>
-                <a:latin typeface="Consolas" panose="020B0609020204030204" pitchFamily="49" charset="0"/>
-              </a:rPr>
-            </a:br>
-            <a:r>
-              <a:rPr lang="en-US" sz="2000" b="0" dirty="0" err="1">
-                <a:solidFill>
-                  <a:srgbClr val="DCDCAA"/>
-                </a:solidFill>
-                <a:effectLst/>
-                <a:latin typeface="Consolas" panose="020B0609020204030204" pitchFamily="49" charset="0"/>
-              </a:rPr>
-              <a:t>gcc</a:t>
-            </a:r>
-            <a:r>
-              <a:rPr lang="en-US" sz="2000" b="0" dirty="0">
-                <a:solidFill>
-                  <a:srgbClr val="D4D4D4"/>
-                </a:solidFill>
-                <a:effectLst/>
-                <a:latin typeface="Consolas" panose="020B0609020204030204" pitchFamily="49" charset="0"/>
-              </a:rPr>
-              <a:t> </a:t>
-            </a:r>
-            <a:r>
-              <a:rPr lang="en-US" sz="2000" b="0" dirty="0">
-                <a:solidFill>
-                  <a:srgbClr val="569CD6"/>
-                </a:solidFill>
-                <a:effectLst/>
-                <a:latin typeface="Consolas" panose="020B0609020204030204" pitchFamily="49" charset="0"/>
-              </a:rPr>
-              <a:t>--shared</a:t>
-            </a:r>
-            <a:r>
-              <a:rPr lang="en-US" sz="2000" b="0" dirty="0">
-                <a:solidFill>
-                  <a:srgbClr val="D4D4D4"/>
-                </a:solidFill>
-                <a:effectLst/>
-                <a:latin typeface="Consolas" panose="020B0609020204030204" pitchFamily="49" charset="0"/>
-              </a:rPr>
-              <a:t> </a:t>
-            </a:r>
-            <a:r>
-              <a:rPr lang="en-US" sz="2000" b="0" dirty="0" err="1">
-                <a:solidFill>
-                  <a:srgbClr val="CE9178"/>
-                </a:solidFill>
-                <a:effectLst/>
-                <a:latin typeface="Consolas" panose="020B0609020204030204" pitchFamily="49" charset="0"/>
-              </a:rPr>
-              <a:t>app.o</a:t>
-            </a:r>
-            <a:r>
-              <a:rPr lang="en-US" sz="2000" b="0" dirty="0">
-                <a:solidFill>
-                  <a:srgbClr val="D4D4D4"/>
-                </a:solidFill>
-                <a:effectLst/>
-                <a:latin typeface="Consolas" panose="020B0609020204030204" pitchFamily="49" charset="0"/>
-              </a:rPr>
-              <a:t> </a:t>
-            </a:r>
-            <a:r>
-              <a:rPr lang="en-US" sz="2000" b="0" dirty="0" err="1">
-                <a:solidFill>
-                  <a:srgbClr val="CE9178"/>
-                </a:solidFill>
-                <a:effectLst/>
-                <a:latin typeface="Consolas" panose="020B0609020204030204" pitchFamily="49" charset="0"/>
-              </a:rPr>
-              <a:t>log.o</a:t>
-            </a:r>
-            <a:r>
-              <a:rPr lang="en-US" sz="2000" b="0" dirty="0">
-                <a:solidFill>
-                  <a:srgbClr val="D4D4D4"/>
-                </a:solidFill>
-                <a:effectLst/>
-                <a:latin typeface="Consolas" panose="020B0609020204030204" pitchFamily="49" charset="0"/>
-              </a:rPr>
-              <a:t> </a:t>
-            </a:r>
-            <a:r>
-              <a:rPr lang="en-US" sz="2000" b="0" dirty="0">
-                <a:solidFill>
-                  <a:srgbClr val="569CD6"/>
-                </a:solidFill>
-                <a:effectLst/>
-                <a:latin typeface="Consolas" panose="020B0609020204030204" pitchFamily="49" charset="0"/>
-              </a:rPr>
-              <a:t>-o</a:t>
-            </a:r>
-            <a:r>
-              <a:rPr lang="en-US" sz="2000" b="0" dirty="0">
-                <a:solidFill>
-                  <a:srgbClr val="D4D4D4"/>
-                </a:solidFill>
-                <a:effectLst/>
-                <a:latin typeface="Consolas" panose="020B0609020204030204" pitchFamily="49" charset="0"/>
-              </a:rPr>
-              <a:t> </a:t>
-            </a:r>
-            <a:r>
-              <a:rPr lang="en-US" sz="2000" b="0" dirty="0">
-                <a:solidFill>
-                  <a:srgbClr val="CE9178"/>
-                </a:solidFill>
-                <a:effectLst/>
-                <a:latin typeface="Consolas" panose="020B0609020204030204" pitchFamily="49" charset="0"/>
-              </a:rPr>
-              <a:t>libMY_LOG.so</a:t>
-            </a:r>
-            <a:endParaRPr lang="en-US" sz="2000" b="0" dirty="0">
-              <a:solidFill>
-                <a:srgbClr val="CCCCCC"/>
-              </a:solidFill>
-              <a:effectLst/>
-              <a:latin typeface="Consolas" panose="020B0609020204030204" pitchFamily="49" charset="0"/>
-            </a:endParaRPr>
-          </a:p>
-        </p:txBody>
-      </p:sp>
-      <p:sp>
-        <p:nvSpPr>
-          <p:cNvPr id="13" name="TextBox 12">
-            <a:extLst>
-              <a:ext uri="{FF2B5EF4-FFF2-40B4-BE49-F238E27FC236}">
-                <a16:creationId xmlns:a16="http://schemas.microsoft.com/office/drawing/2014/main" id="{4BB4BB2B-16E7-4A9D-9DD8-9E99DC68FAF5}"/>
-              </a:ext>
-            </a:extLst>
-          </p:cNvPr>
-          <p:cNvSpPr txBox="1"/>
-          <p:nvPr/>
-        </p:nvSpPr>
-        <p:spPr>
-          <a:xfrm>
-            <a:off x="214601" y="4827200"/>
-            <a:ext cx="6505118" cy="646331"/>
-          </a:xfrm>
-          <a:prstGeom prst="rect">
-            <a:avLst/>
-          </a:prstGeom>
-          <a:noFill/>
-        </p:spPr>
-        <p:txBody>
-          <a:bodyPr wrap="square">
-            <a:spAutoFit/>
-          </a:bodyPr>
-          <a:lstStyle/>
-          <a:p>
-            <a:r>
-              <a:rPr lang="en-US" b="0" dirty="0" err="1">
-                <a:solidFill>
-                  <a:srgbClr val="DCDCAA"/>
-                </a:solidFill>
-                <a:effectLst/>
-                <a:latin typeface="Consolas" panose="020B0609020204030204" pitchFamily="49" charset="0"/>
-              </a:rPr>
-              <a:t>gcc</a:t>
-            </a:r>
-            <a:r>
-              <a:rPr lang="en-US" b="0" dirty="0">
-                <a:solidFill>
-                  <a:srgbClr val="D4D4D4"/>
-                </a:solidFill>
-                <a:effectLst/>
-                <a:latin typeface="Consolas" panose="020B0609020204030204" pitchFamily="49" charset="0"/>
-              </a:rPr>
-              <a:t> </a:t>
-            </a:r>
-            <a:r>
-              <a:rPr lang="en-US" b="0" dirty="0" err="1">
-                <a:solidFill>
-                  <a:srgbClr val="CE9178"/>
-                </a:solidFill>
-                <a:effectLst/>
-                <a:latin typeface="Consolas" panose="020B0609020204030204" pitchFamily="49" charset="0"/>
-              </a:rPr>
-              <a:t>app.o</a:t>
-            </a:r>
-            <a:r>
-              <a:rPr lang="en-US" b="0" dirty="0">
-                <a:solidFill>
-                  <a:srgbClr val="D4D4D4"/>
-                </a:solidFill>
-                <a:effectLst/>
-                <a:latin typeface="Consolas" panose="020B0609020204030204" pitchFamily="49" charset="0"/>
-              </a:rPr>
-              <a:t> </a:t>
-            </a:r>
-            <a:r>
-              <a:rPr lang="en-US" b="0" dirty="0">
-                <a:solidFill>
-                  <a:srgbClr val="569CD6"/>
-                </a:solidFill>
-                <a:effectLst/>
-                <a:latin typeface="Consolas" panose="020B0609020204030204" pitchFamily="49" charset="0"/>
-              </a:rPr>
-              <a:t>-o</a:t>
-            </a:r>
-            <a:r>
-              <a:rPr lang="en-US" b="0" dirty="0">
-                <a:solidFill>
-                  <a:srgbClr val="D4D4D4"/>
-                </a:solidFill>
-                <a:effectLst/>
-                <a:latin typeface="Consolas" panose="020B0609020204030204" pitchFamily="49" charset="0"/>
-              </a:rPr>
-              <a:t> </a:t>
-            </a:r>
-            <a:r>
-              <a:rPr lang="en-US" b="0" dirty="0" err="1">
-                <a:solidFill>
-                  <a:srgbClr val="CE9178"/>
-                </a:solidFill>
-                <a:effectLst/>
-                <a:latin typeface="Consolas" panose="020B0609020204030204" pitchFamily="49" charset="0"/>
-              </a:rPr>
-              <a:t>dynamic_exe</a:t>
-            </a:r>
-            <a:r>
-              <a:rPr lang="en-US" b="0" dirty="0">
-                <a:solidFill>
-                  <a:srgbClr val="D4D4D4"/>
-                </a:solidFill>
-                <a:effectLst/>
-                <a:latin typeface="Consolas" panose="020B0609020204030204" pitchFamily="49" charset="0"/>
-              </a:rPr>
-              <a:t> </a:t>
-            </a:r>
-            <a:r>
-              <a:rPr lang="en-US" b="0" dirty="0">
-                <a:solidFill>
-                  <a:srgbClr val="569CD6"/>
-                </a:solidFill>
-                <a:effectLst/>
-                <a:latin typeface="Consolas" panose="020B0609020204030204" pitchFamily="49" charset="0"/>
-              </a:rPr>
-              <a:t>-L.</a:t>
-            </a:r>
-            <a:r>
-              <a:rPr lang="en-US" b="0" dirty="0">
-                <a:solidFill>
-                  <a:srgbClr val="D4D4D4"/>
-                </a:solidFill>
-                <a:effectLst/>
-                <a:latin typeface="Consolas" panose="020B0609020204030204" pitchFamily="49" charset="0"/>
-              </a:rPr>
-              <a:t> </a:t>
-            </a:r>
-            <a:r>
-              <a:rPr lang="en-US" b="0" dirty="0">
-                <a:solidFill>
-                  <a:srgbClr val="569CD6"/>
-                </a:solidFill>
-                <a:effectLst/>
-                <a:latin typeface="Consolas" panose="020B0609020204030204" pitchFamily="49" charset="0"/>
-              </a:rPr>
-              <a:t>-</a:t>
-            </a:r>
-            <a:r>
-              <a:rPr lang="en-US" b="0" dirty="0" err="1">
-                <a:solidFill>
-                  <a:srgbClr val="569CD6"/>
-                </a:solidFill>
-                <a:effectLst/>
-                <a:latin typeface="Consolas" panose="020B0609020204030204" pitchFamily="49" charset="0"/>
-              </a:rPr>
-              <a:t>lMY_LOG</a:t>
-            </a:r>
-            <a:r>
-              <a:rPr lang="en-US" b="0" dirty="0">
-                <a:solidFill>
-                  <a:srgbClr val="D4D4D4"/>
-                </a:solidFill>
-                <a:effectLst/>
-                <a:latin typeface="Consolas" panose="020B0609020204030204" pitchFamily="49" charset="0"/>
-              </a:rPr>
-              <a:t> </a:t>
-            </a:r>
-            <a:r>
-              <a:rPr lang="en-US" b="0" dirty="0">
-                <a:solidFill>
-                  <a:srgbClr val="569CD6"/>
-                </a:solidFill>
-                <a:effectLst/>
-                <a:latin typeface="Consolas" panose="020B0609020204030204" pitchFamily="49" charset="0"/>
-              </a:rPr>
-              <a:t>-</a:t>
-            </a:r>
-            <a:r>
-              <a:rPr lang="en-US" b="0" dirty="0" err="1">
-                <a:solidFill>
-                  <a:srgbClr val="569CD6"/>
-                </a:solidFill>
-                <a:effectLst/>
-                <a:latin typeface="Consolas" panose="020B0609020204030204" pitchFamily="49" charset="0"/>
-              </a:rPr>
-              <a:t>Wl</a:t>
-            </a:r>
-            <a:r>
-              <a:rPr lang="en-US" b="0" dirty="0">
-                <a:solidFill>
-                  <a:srgbClr val="569CD6"/>
-                </a:solidFill>
-                <a:effectLst/>
-                <a:latin typeface="Consolas" panose="020B0609020204030204" pitchFamily="49" charset="0"/>
-              </a:rPr>
-              <a:t>,-</a:t>
-            </a:r>
-            <a:r>
-              <a:rPr lang="en-US" b="0" dirty="0" err="1">
-                <a:solidFill>
-                  <a:srgbClr val="569CD6"/>
-                </a:solidFill>
-                <a:effectLst/>
-                <a:latin typeface="Consolas" panose="020B0609020204030204" pitchFamily="49" charset="0"/>
-              </a:rPr>
-              <a:t>rpath</a:t>
-            </a:r>
-            <a:r>
-              <a:rPr lang="en-US" b="0" dirty="0">
-                <a:solidFill>
-                  <a:srgbClr val="569CD6"/>
-                </a:solidFill>
-                <a:effectLst/>
-                <a:latin typeface="Consolas" panose="020B0609020204030204" pitchFamily="49" charset="0"/>
-              </a:rPr>
-              <a:t>,.</a:t>
-            </a:r>
-            <a:endParaRPr lang="en-US" b="0" dirty="0">
-              <a:solidFill>
-                <a:srgbClr val="CCCCCC"/>
-              </a:solidFill>
-              <a:effectLst/>
-              <a:latin typeface="Consolas" panose="020B0609020204030204" pitchFamily="49" charset="0"/>
-            </a:endParaRPr>
-          </a:p>
-          <a:p>
-            <a:r>
-              <a:rPr lang="en-US" b="0" dirty="0">
-                <a:solidFill>
-                  <a:srgbClr val="DCDCAA"/>
-                </a:solidFill>
-                <a:effectLst/>
-                <a:latin typeface="Consolas" panose="020B0609020204030204" pitchFamily="49" charset="0"/>
-              </a:rPr>
-              <a:t>./</a:t>
-            </a:r>
-            <a:r>
-              <a:rPr lang="en-US" b="0" dirty="0" err="1">
-                <a:solidFill>
-                  <a:srgbClr val="DCDCAA"/>
-                </a:solidFill>
-                <a:effectLst/>
-                <a:latin typeface="Consolas" panose="020B0609020204030204" pitchFamily="49" charset="0"/>
-              </a:rPr>
-              <a:t>dynamic_exe</a:t>
-            </a:r>
-            <a:endParaRPr lang="en-US" b="0" dirty="0">
-              <a:solidFill>
-                <a:srgbClr val="CCCCCC"/>
-              </a:solidFill>
-              <a:effectLst/>
-              <a:latin typeface="Consolas" panose="020B0609020204030204" pitchFamily="49" charset="0"/>
-            </a:endParaRPr>
-          </a:p>
-        </p:txBody>
-      </p:sp>
-      <p:sp>
-        <p:nvSpPr>
-          <p:cNvPr id="17" name="TextBox 16">
-            <a:extLst>
-              <a:ext uri="{FF2B5EF4-FFF2-40B4-BE49-F238E27FC236}">
-                <a16:creationId xmlns:a16="http://schemas.microsoft.com/office/drawing/2014/main" id="{268BE07E-65D3-4B1B-A71C-F8B03C990C5F}"/>
-              </a:ext>
-            </a:extLst>
-          </p:cNvPr>
-          <p:cNvSpPr txBox="1"/>
-          <p:nvPr/>
-        </p:nvSpPr>
-        <p:spPr>
-          <a:xfrm>
-            <a:off x="7378884" y="4827200"/>
-            <a:ext cx="4407244" cy="584775"/>
-          </a:xfrm>
-          <a:prstGeom prst="rect">
-            <a:avLst/>
-          </a:prstGeom>
-          <a:noFill/>
-        </p:spPr>
-        <p:txBody>
-          <a:bodyPr wrap="square">
-            <a:spAutoFit/>
-          </a:bodyPr>
-          <a:lstStyle/>
-          <a:p>
-            <a:r>
-              <a:rPr lang="en-US" sz="1600" b="0" dirty="0" err="1">
-                <a:solidFill>
-                  <a:srgbClr val="DCDCAA"/>
-                </a:solidFill>
-                <a:effectLst/>
-                <a:latin typeface="Consolas" panose="020B0609020204030204" pitchFamily="49" charset="0"/>
-              </a:rPr>
-              <a:t>gcc</a:t>
-            </a:r>
-            <a:r>
-              <a:rPr lang="en-US" sz="1600" b="0" dirty="0">
-                <a:solidFill>
-                  <a:srgbClr val="D4D4D4"/>
-                </a:solidFill>
-                <a:effectLst/>
-                <a:latin typeface="Consolas" panose="020B0609020204030204" pitchFamily="49" charset="0"/>
-              </a:rPr>
-              <a:t> </a:t>
-            </a:r>
-            <a:r>
-              <a:rPr lang="en-US" sz="1600" b="0" dirty="0" err="1">
-                <a:solidFill>
-                  <a:srgbClr val="CE9178"/>
-                </a:solidFill>
-                <a:effectLst/>
-                <a:latin typeface="Consolas" panose="020B0609020204030204" pitchFamily="49" charset="0"/>
-              </a:rPr>
-              <a:t>app.o</a:t>
-            </a:r>
-            <a:r>
-              <a:rPr lang="en-US" sz="1600" b="0" dirty="0">
-                <a:solidFill>
-                  <a:srgbClr val="D4D4D4"/>
-                </a:solidFill>
-                <a:effectLst/>
-                <a:latin typeface="Consolas" panose="020B0609020204030204" pitchFamily="49" charset="0"/>
-              </a:rPr>
-              <a:t> </a:t>
-            </a:r>
-            <a:r>
-              <a:rPr lang="en-US" sz="1600" b="0" dirty="0">
-                <a:solidFill>
-                  <a:srgbClr val="569CD6"/>
-                </a:solidFill>
-                <a:effectLst/>
-                <a:latin typeface="Consolas" panose="020B0609020204030204" pitchFamily="49" charset="0"/>
-              </a:rPr>
-              <a:t>-o</a:t>
-            </a:r>
-            <a:r>
-              <a:rPr lang="en-US" sz="1600" b="0" dirty="0">
-                <a:solidFill>
-                  <a:srgbClr val="D4D4D4"/>
-                </a:solidFill>
-                <a:effectLst/>
-                <a:latin typeface="Consolas" panose="020B0609020204030204" pitchFamily="49" charset="0"/>
-              </a:rPr>
-              <a:t> </a:t>
-            </a:r>
-            <a:r>
-              <a:rPr lang="en-US" sz="1600" b="0" dirty="0" err="1">
-                <a:solidFill>
-                  <a:srgbClr val="CE9178"/>
-                </a:solidFill>
-                <a:effectLst/>
-                <a:latin typeface="Consolas" panose="020B0609020204030204" pitchFamily="49" charset="0"/>
-              </a:rPr>
-              <a:t>dynamic_exe</a:t>
-            </a:r>
-            <a:r>
-              <a:rPr lang="en-US" sz="1600" b="0" dirty="0">
-                <a:solidFill>
-                  <a:srgbClr val="D4D4D4"/>
-                </a:solidFill>
-                <a:effectLst/>
-                <a:latin typeface="Consolas" panose="020B0609020204030204" pitchFamily="49" charset="0"/>
-              </a:rPr>
-              <a:t> </a:t>
-            </a:r>
-            <a:r>
-              <a:rPr lang="en-US" sz="1600" b="0" dirty="0">
-                <a:solidFill>
-                  <a:srgbClr val="569CD6"/>
-                </a:solidFill>
-                <a:effectLst/>
-                <a:latin typeface="Consolas" panose="020B0609020204030204" pitchFamily="49" charset="0"/>
-              </a:rPr>
-              <a:t>-L.</a:t>
-            </a:r>
-            <a:r>
-              <a:rPr lang="en-US" sz="1600" b="0" dirty="0">
-                <a:solidFill>
-                  <a:srgbClr val="D4D4D4"/>
-                </a:solidFill>
-                <a:effectLst/>
-                <a:latin typeface="Consolas" panose="020B0609020204030204" pitchFamily="49" charset="0"/>
-              </a:rPr>
-              <a:t> </a:t>
-            </a:r>
-            <a:r>
-              <a:rPr lang="en-US" sz="1600" b="0" dirty="0">
-                <a:solidFill>
-                  <a:srgbClr val="569CD6"/>
-                </a:solidFill>
-                <a:effectLst/>
-                <a:latin typeface="Consolas" panose="020B0609020204030204" pitchFamily="49" charset="0"/>
-              </a:rPr>
-              <a:t>-</a:t>
-            </a:r>
-            <a:r>
-              <a:rPr lang="en-US" sz="1600" b="0" dirty="0" err="1">
-                <a:solidFill>
-                  <a:srgbClr val="569CD6"/>
-                </a:solidFill>
-                <a:effectLst/>
-                <a:latin typeface="Consolas" panose="020B0609020204030204" pitchFamily="49" charset="0"/>
-              </a:rPr>
-              <a:t>lMY_LOG</a:t>
-            </a:r>
-            <a:endParaRPr lang="en-US" sz="1600" b="0" dirty="0">
-              <a:solidFill>
-                <a:srgbClr val="CCCCCC"/>
-              </a:solidFill>
-              <a:effectLst/>
-              <a:latin typeface="Consolas" panose="020B0609020204030204" pitchFamily="49" charset="0"/>
-            </a:endParaRPr>
-          </a:p>
-          <a:p>
-            <a:r>
-              <a:rPr lang="en-US" sz="1600" b="0" dirty="0">
-                <a:solidFill>
-                  <a:srgbClr val="9CDCFE"/>
-                </a:solidFill>
-                <a:effectLst/>
-                <a:latin typeface="Consolas" panose="020B0609020204030204" pitchFamily="49" charset="0"/>
-              </a:rPr>
-              <a:t>LD_LIBRARY_PATH</a:t>
-            </a:r>
-            <a:r>
-              <a:rPr lang="en-US" sz="1600" b="0" dirty="0">
-                <a:solidFill>
-                  <a:srgbClr val="D4D4D4"/>
-                </a:solidFill>
-                <a:effectLst/>
-                <a:latin typeface="Consolas" panose="020B0609020204030204" pitchFamily="49" charset="0"/>
-              </a:rPr>
-              <a:t>=</a:t>
-            </a:r>
-            <a:r>
-              <a:rPr lang="en-US" sz="1600" b="0" dirty="0">
-                <a:solidFill>
-                  <a:srgbClr val="CE9178"/>
-                </a:solidFill>
-                <a:effectLst/>
-                <a:latin typeface="Consolas" panose="020B0609020204030204" pitchFamily="49" charset="0"/>
-              </a:rPr>
-              <a:t>.</a:t>
-            </a:r>
-            <a:r>
-              <a:rPr lang="en-US" sz="1600" b="0" dirty="0">
-                <a:solidFill>
-                  <a:srgbClr val="D4D4D4"/>
-                </a:solidFill>
-                <a:effectLst/>
-                <a:latin typeface="Consolas" panose="020B0609020204030204" pitchFamily="49" charset="0"/>
-              </a:rPr>
-              <a:t> </a:t>
-            </a:r>
-            <a:r>
-              <a:rPr lang="en-US" sz="1600" b="0" dirty="0">
-                <a:solidFill>
-                  <a:srgbClr val="DCDCAA"/>
-                </a:solidFill>
-                <a:effectLst/>
-                <a:latin typeface="Consolas" panose="020B0609020204030204" pitchFamily="49" charset="0"/>
-              </a:rPr>
-              <a:t>./</a:t>
-            </a:r>
-            <a:r>
-              <a:rPr lang="en-US" sz="1600" b="0" dirty="0" err="1">
-                <a:solidFill>
-                  <a:srgbClr val="DCDCAA"/>
-                </a:solidFill>
-                <a:effectLst/>
-                <a:latin typeface="Consolas" panose="020B0609020204030204" pitchFamily="49" charset="0"/>
-              </a:rPr>
-              <a:t>dynamic_exe</a:t>
-            </a:r>
-            <a:endParaRPr lang="en-US" sz="1600" b="0" dirty="0">
-              <a:solidFill>
-                <a:srgbClr val="CCCCCC"/>
-              </a:solidFill>
-              <a:effectLst/>
-              <a:latin typeface="Consolas" panose="020B0609020204030204" pitchFamily="49" charset="0"/>
-            </a:endParaRPr>
-          </a:p>
-        </p:txBody>
-      </p:sp>
-      <p:sp>
-        <p:nvSpPr>
-          <p:cNvPr id="19" name="TextBox 18">
-            <a:extLst>
-              <a:ext uri="{FF2B5EF4-FFF2-40B4-BE49-F238E27FC236}">
-                <a16:creationId xmlns:a16="http://schemas.microsoft.com/office/drawing/2014/main" id="{6B2BF426-223E-4CF7-98A5-E4B66530B940}"/>
-              </a:ext>
-            </a:extLst>
-          </p:cNvPr>
-          <p:cNvSpPr txBox="1"/>
-          <p:nvPr/>
-        </p:nvSpPr>
-        <p:spPr>
-          <a:xfrm>
-            <a:off x="6201352" y="4312280"/>
-            <a:ext cx="774608" cy="400110"/>
-          </a:xfrm>
-          <a:prstGeom prst="rect">
-            <a:avLst/>
-          </a:prstGeom>
-          <a:noFill/>
-        </p:spPr>
-        <p:txBody>
-          <a:bodyPr wrap="square">
-            <a:spAutoFit/>
-          </a:bodyPr>
-          <a:lstStyle/>
-          <a:p>
-            <a:r>
-              <a:rPr lang="ru-RU" sz="2000" dirty="0"/>
-              <a:t>ИЛИ</a:t>
-            </a:r>
-          </a:p>
-        </p:txBody>
-      </p:sp>
-      <p:sp>
-        <p:nvSpPr>
-          <p:cNvPr id="8" name="TextBox 7">
-            <a:extLst>
-              <a:ext uri="{FF2B5EF4-FFF2-40B4-BE49-F238E27FC236}">
-                <a16:creationId xmlns:a16="http://schemas.microsoft.com/office/drawing/2014/main" id="{D961F25E-C8F7-40F8-8027-30B36EB9834A}"/>
-              </a:ext>
-            </a:extLst>
-          </p:cNvPr>
-          <p:cNvSpPr txBox="1"/>
-          <p:nvPr/>
-        </p:nvSpPr>
-        <p:spPr>
-          <a:xfrm>
-            <a:off x="214601" y="5988451"/>
-            <a:ext cx="6098058" cy="646331"/>
-          </a:xfrm>
-          <a:prstGeom prst="rect">
-            <a:avLst/>
-          </a:prstGeom>
-          <a:noFill/>
-        </p:spPr>
-        <p:txBody>
-          <a:bodyPr wrap="square">
-            <a:spAutoFit/>
-          </a:bodyPr>
-          <a:lstStyle/>
-          <a:p>
-            <a:r>
-              <a:rPr lang="en-US" dirty="0"/>
-              <a:t>*</a:t>
-            </a:r>
-            <a:r>
-              <a:rPr lang="ru-RU" dirty="0"/>
-              <a:t>Посмотреть список дин. </a:t>
-            </a:r>
-            <a:r>
-              <a:rPr lang="ru-RU" dirty="0" err="1"/>
-              <a:t>либ</a:t>
-            </a:r>
-            <a:r>
-              <a:rPr lang="ru-RU" dirty="0"/>
-              <a:t> </a:t>
-            </a:r>
-            <a:r>
-              <a:rPr lang="en-US" dirty="0"/>
-              <a:t>– </a:t>
-            </a:r>
-            <a:r>
-              <a:rPr lang="ru-RU" dirty="0"/>
-              <a:t>команда </a:t>
-            </a:r>
-            <a:r>
-              <a:rPr lang="en-US" dirty="0" err="1"/>
-              <a:t>ldd</a:t>
-            </a:r>
-            <a:endParaRPr lang="ru-RU" dirty="0"/>
-          </a:p>
-          <a:p>
-            <a:r>
-              <a:rPr lang="ru-RU" dirty="0"/>
-              <a:t>*</a:t>
-            </a:r>
-            <a:r>
-              <a:rPr lang="ru-RU" dirty="0" err="1"/>
-              <a:t>Предзагрузить</a:t>
-            </a:r>
-            <a:r>
-              <a:rPr lang="ru-RU" dirty="0"/>
-              <a:t> </a:t>
-            </a:r>
-            <a:r>
-              <a:rPr lang="ru-RU" dirty="0" err="1"/>
-              <a:t>либу</a:t>
-            </a:r>
-            <a:r>
-              <a:rPr lang="en-US" dirty="0"/>
-              <a:t>: LD_PRELOAD</a:t>
-            </a:r>
-            <a:endParaRPr lang="ru-RU" dirty="0"/>
-          </a:p>
-        </p:txBody>
-      </p:sp>
-    </p:spTree>
-    <p:extLst>
-      <p:ext uri="{BB962C8B-B14F-4D97-AF65-F5344CB8AC3E}">
-        <p14:creationId xmlns:p14="http://schemas.microsoft.com/office/powerpoint/2010/main" val="76297722"/>
-      </p:ext>
-    </p:extLst>
-  </p:cSld>
-  <p:clrMapOvr>
-    <a:masterClrMapping/>
-  </p:clrMapOvr>
-</p:sld>
-</file>
-
 <file path=ppt/slides/slide17.xml><?xml version="1.0" encoding="utf-8"?>
 <p:sld xmlns:a="http://schemas.openxmlformats.org/drawingml/2006/main" xmlns:r="http://schemas.openxmlformats.org/officeDocument/2006/relationships" xmlns:p="http://schemas.openxmlformats.org/presentationml/2006/main">
   <p:cSld>
@@ -8638,6 +7960,1525 @@
           <a:p>
             <a:r>
               <a:rPr lang="en-US" dirty="0"/>
+              <a:t>Build Static Lib</a:t>
+            </a:r>
+          </a:p>
+        </p:txBody>
+      </p:sp>
+      <p:sp>
+        <p:nvSpPr>
+          <p:cNvPr id="7" name="TextBox 6">
+            <a:extLst>
+              <a:ext uri="{FF2B5EF4-FFF2-40B4-BE49-F238E27FC236}">
+                <a16:creationId xmlns:a16="http://schemas.microsoft.com/office/drawing/2014/main" id="{EA050FB2-8906-40F1-A60C-1482023095B3}"/>
+              </a:ext>
+            </a:extLst>
+          </p:cNvPr>
+          <p:cNvSpPr txBox="1"/>
+          <p:nvPr/>
+        </p:nvSpPr>
+        <p:spPr>
+          <a:xfrm>
+            <a:off x="3490971" y="2184684"/>
+            <a:ext cx="5046446" cy="3046988"/>
+          </a:xfrm>
+          <a:prstGeom prst="rect">
+            <a:avLst/>
+          </a:prstGeom>
+          <a:noFill/>
+        </p:spPr>
+        <p:txBody>
+          <a:bodyPr wrap="square">
+            <a:spAutoFit/>
+          </a:bodyPr>
+          <a:lstStyle/>
+          <a:p>
+            <a:r>
+              <a:rPr lang="en-US" sz="2400" b="0" dirty="0" err="1">
+                <a:solidFill>
+                  <a:srgbClr val="DCDCAA"/>
+                </a:solidFill>
+                <a:effectLst/>
+                <a:latin typeface="Consolas" panose="020B0609020204030204" pitchFamily="49" charset="0"/>
+              </a:rPr>
+              <a:t>gcc</a:t>
+            </a:r>
+            <a:r>
+              <a:rPr lang="en-US" sz="2400" b="0" dirty="0">
+                <a:solidFill>
+                  <a:srgbClr val="D4D4D4"/>
+                </a:solidFill>
+                <a:effectLst/>
+                <a:latin typeface="Consolas" panose="020B0609020204030204" pitchFamily="49" charset="0"/>
+              </a:rPr>
+              <a:t> </a:t>
+            </a:r>
+            <a:r>
+              <a:rPr lang="en-US" sz="2400" b="0" dirty="0" err="1">
+                <a:solidFill>
+                  <a:srgbClr val="CE9178"/>
+                </a:solidFill>
+                <a:effectLst/>
+                <a:latin typeface="Consolas" panose="020B0609020204030204" pitchFamily="49" charset="0"/>
+              </a:rPr>
+              <a:t>app.c</a:t>
+            </a:r>
+            <a:r>
+              <a:rPr lang="en-US" sz="2400" b="0" dirty="0">
+                <a:solidFill>
+                  <a:srgbClr val="D4D4D4"/>
+                </a:solidFill>
+                <a:effectLst/>
+                <a:latin typeface="Consolas" panose="020B0609020204030204" pitchFamily="49" charset="0"/>
+              </a:rPr>
+              <a:t> </a:t>
+            </a:r>
+            <a:r>
+              <a:rPr lang="en-US" sz="2400" b="0" dirty="0">
+                <a:solidFill>
+                  <a:srgbClr val="569CD6"/>
+                </a:solidFill>
+                <a:effectLst/>
+                <a:latin typeface="Consolas" panose="020B0609020204030204" pitchFamily="49" charset="0"/>
+              </a:rPr>
+              <a:t>-c</a:t>
+            </a:r>
+            <a:endParaRPr lang="en-US" sz="2400" b="0" dirty="0">
+              <a:solidFill>
+                <a:srgbClr val="CCCCCC"/>
+              </a:solidFill>
+              <a:effectLst/>
+              <a:latin typeface="Consolas" panose="020B0609020204030204" pitchFamily="49" charset="0"/>
+            </a:endParaRPr>
+          </a:p>
+          <a:p>
+            <a:r>
+              <a:rPr lang="en-US" sz="2400" b="0" dirty="0" err="1">
+                <a:solidFill>
+                  <a:srgbClr val="DCDCAA"/>
+                </a:solidFill>
+                <a:effectLst/>
+                <a:latin typeface="Consolas" panose="020B0609020204030204" pitchFamily="49" charset="0"/>
+              </a:rPr>
+              <a:t>gcc</a:t>
+            </a:r>
+            <a:r>
+              <a:rPr lang="en-US" sz="2400" b="0" dirty="0">
+                <a:solidFill>
+                  <a:srgbClr val="D4D4D4"/>
+                </a:solidFill>
+                <a:effectLst/>
+                <a:latin typeface="Consolas" panose="020B0609020204030204" pitchFamily="49" charset="0"/>
+              </a:rPr>
+              <a:t> </a:t>
+            </a:r>
+            <a:r>
+              <a:rPr lang="en-US" sz="2400" b="0" dirty="0" err="1">
+                <a:solidFill>
+                  <a:srgbClr val="CE9178"/>
+                </a:solidFill>
+                <a:effectLst/>
+                <a:latin typeface="Consolas" panose="020B0609020204030204" pitchFamily="49" charset="0"/>
+              </a:rPr>
+              <a:t>log.c</a:t>
+            </a:r>
+            <a:r>
+              <a:rPr lang="en-US" sz="2400" b="0" dirty="0">
+                <a:solidFill>
+                  <a:srgbClr val="D4D4D4"/>
+                </a:solidFill>
+                <a:effectLst/>
+                <a:latin typeface="Consolas" panose="020B0609020204030204" pitchFamily="49" charset="0"/>
+              </a:rPr>
+              <a:t> </a:t>
+            </a:r>
+            <a:r>
+              <a:rPr lang="en-US" sz="2400" b="0" dirty="0">
+                <a:solidFill>
+                  <a:srgbClr val="569CD6"/>
+                </a:solidFill>
+                <a:effectLst/>
+                <a:latin typeface="Consolas" panose="020B0609020204030204" pitchFamily="49" charset="0"/>
+              </a:rPr>
+              <a:t>-c</a:t>
+            </a:r>
+            <a:endParaRPr lang="en-US" sz="2400" b="0" dirty="0">
+              <a:solidFill>
+                <a:srgbClr val="CCCCCC"/>
+              </a:solidFill>
+              <a:effectLst/>
+              <a:latin typeface="Consolas" panose="020B0609020204030204" pitchFamily="49" charset="0"/>
+            </a:endParaRPr>
+          </a:p>
+          <a:p>
+            <a:br>
+              <a:rPr lang="en-US" sz="2400" b="0" dirty="0">
+                <a:solidFill>
+                  <a:srgbClr val="CCCCCC"/>
+                </a:solidFill>
+                <a:effectLst/>
+                <a:latin typeface="Consolas" panose="020B0609020204030204" pitchFamily="49" charset="0"/>
+              </a:rPr>
+            </a:br>
+            <a:r>
+              <a:rPr lang="en-US" sz="2400" b="0" dirty="0" err="1">
+                <a:solidFill>
+                  <a:srgbClr val="DCDCAA"/>
+                </a:solidFill>
+                <a:effectLst/>
+                <a:latin typeface="Consolas" panose="020B0609020204030204" pitchFamily="49" charset="0"/>
+              </a:rPr>
+              <a:t>ar</a:t>
+            </a:r>
+            <a:r>
+              <a:rPr lang="en-US" sz="2400" b="0" dirty="0">
+                <a:solidFill>
+                  <a:srgbClr val="D4D4D4"/>
+                </a:solidFill>
+                <a:effectLst/>
+                <a:latin typeface="Consolas" panose="020B0609020204030204" pitchFamily="49" charset="0"/>
+              </a:rPr>
+              <a:t> </a:t>
+            </a:r>
+            <a:r>
+              <a:rPr lang="en-US" sz="2400" b="0" dirty="0" err="1">
+                <a:solidFill>
+                  <a:srgbClr val="CE9178"/>
+                </a:solidFill>
+                <a:effectLst/>
+                <a:latin typeface="Consolas" panose="020B0609020204030204" pitchFamily="49" charset="0"/>
+              </a:rPr>
+              <a:t>rc</a:t>
+            </a:r>
+            <a:r>
+              <a:rPr lang="en-US" sz="2400" b="0" dirty="0">
+                <a:solidFill>
+                  <a:srgbClr val="D4D4D4"/>
+                </a:solidFill>
+                <a:effectLst/>
+                <a:latin typeface="Consolas" panose="020B0609020204030204" pitchFamily="49" charset="0"/>
+              </a:rPr>
+              <a:t> </a:t>
+            </a:r>
+            <a:r>
+              <a:rPr lang="en-US" sz="2400" b="0" dirty="0" err="1">
+                <a:solidFill>
+                  <a:srgbClr val="CE9178"/>
+                </a:solidFill>
+                <a:effectLst/>
+                <a:latin typeface="Consolas" panose="020B0609020204030204" pitchFamily="49" charset="0"/>
+              </a:rPr>
+              <a:t>libMY_LOG.a</a:t>
+            </a:r>
+            <a:r>
+              <a:rPr lang="en-US" sz="2400" b="0" dirty="0">
+                <a:solidFill>
+                  <a:srgbClr val="D4D4D4"/>
+                </a:solidFill>
+                <a:effectLst/>
+                <a:latin typeface="Consolas" panose="020B0609020204030204" pitchFamily="49" charset="0"/>
+              </a:rPr>
+              <a:t> </a:t>
+            </a:r>
+            <a:r>
+              <a:rPr lang="en-US" sz="2400" b="0" dirty="0" err="1">
+                <a:solidFill>
+                  <a:srgbClr val="CE9178"/>
+                </a:solidFill>
+                <a:effectLst/>
+                <a:latin typeface="Consolas" panose="020B0609020204030204" pitchFamily="49" charset="0"/>
+              </a:rPr>
+              <a:t>log.o</a:t>
+            </a:r>
+            <a:endParaRPr lang="en-US" sz="2400" b="0" dirty="0">
+              <a:solidFill>
+                <a:srgbClr val="CCCCCC"/>
+              </a:solidFill>
+              <a:effectLst/>
+              <a:latin typeface="Consolas" panose="020B0609020204030204" pitchFamily="49" charset="0"/>
+            </a:endParaRPr>
+          </a:p>
+          <a:p>
+            <a:br>
+              <a:rPr lang="en-US" sz="2400" b="0" dirty="0">
+                <a:solidFill>
+                  <a:srgbClr val="CCCCCC"/>
+                </a:solidFill>
+                <a:effectLst/>
+                <a:latin typeface="Consolas" panose="020B0609020204030204" pitchFamily="49" charset="0"/>
+              </a:rPr>
+            </a:br>
+            <a:r>
+              <a:rPr lang="en-US" sz="2400" b="0" dirty="0" err="1">
+                <a:solidFill>
+                  <a:srgbClr val="DCDCAA"/>
+                </a:solidFill>
+                <a:effectLst/>
+                <a:latin typeface="Consolas" panose="020B0609020204030204" pitchFamily="49" charset="0"/>
+              </a:rPr>
+              <a:t>gcc</a:t>
+            </a:r>
+            <a:r>
+              <a:rPr lang="en-US" sz="2400" b="0" dirty="0">
+                <a:solidFill>
+                  <a:srgbClr val="D4D4D4"/>
+                </a:solidFill>
+                <a:effectLst/>
+                <a:latin typeface="Consolas" panose="020B0609020204030204" pitchFamily="49" charset="0"/>
+              </a:rPr>
+              <a:t> </a:t>
+            </a:r>
+            <a:r>
+              <a:rPr lang="en-US" sz="2400" b="0" dirty="0" err="1">
+                <a:solidFill>
+                  <a:srgbClr val="CE9178"/>
+                </a:solidFill>
+                <a:effectLst/>
+                <a:latin typeface="Consolas" panose="020B0609020204030204" pitchFamily="49" charset="0"/>
+              </a:rPr>
+              <a:t>app.o</a:t>
+            </a:r>
+            <a:r>
+              <a:rPr lang="en-US" sz="2400" b="0" dirty="0">
+                <a:solidFill>
+                  <a:srgbClr val="D4D4D4"/>
+                </a:solidFill>
+                <a:effectLst/>
+                <a:latin typeface="Consolas" panose="020B0609020204030204" pitchFamily="49" charset="0"/>
+              </a:rPr>
+              <a:t> </a:t>
+            </a:r>
+            <a:r>
+              <a:rPr lang="en-US" sz="2400" b="0" dirty="0">
+                <a:solidFill>
+                  <a:srgbClr val="569CD6"/>
+                </a:solidFill>
+                <a:effectLst/>
+                <a:latin typeface="Consolas" panose="020B0609020204030204" pitchFamily="49" charset="0"/>
+              </a:rPr>
+              <a:t>-o</a:t>
+            </a:r>
+            <a:r>
+              <a:rPr lang="en-US" sz="2400" b="0" dirty="0">
+                <a:solidFill>
+                  <a:srgbClr val="D4D4D4"/>
+                </a:solidFill>
+                <a:effectLst/>
+                <a:latin typeface="Consolas" panose="020B0609020204030204" pitchFamily="49" charset="0"/>
+              </a:rPr>
+              <a:t> </a:t>
+            </a:r>
+            <a:r>
+              <a:rPr lang="en-US" sz="2400" b="0" dirty="0" err="1">
+                <a:solidFill>
+                  <a:srgbClr val="CE9178"/>
+                </a:solidFill>
+                <a:effectLst/>
+                <a:latin typeface="Consolas" panose="020B0609020204030204" pitchFamily="49" charset="0"/>
+              </a:rPr>
+              <a:t>static_exe</a:t>
+            </a:r>
+            <a:r>
+              <a:rPr lang="en-US" sz="2400" b="0" dirty="0">
+                <a:solidFill>
+                  <a:srgbClr val="D4D4D4"/>
+                </a:solidFill>
+                <a:effectLst/>
+                <a:latin typeface="Consolas" panose="020B0609020204030204" pitchFamily="49" charset="0"/>
+              </a:rPr>
+              <a:t> </a:t>
+            </a:r>
+            <a:r>
+              <a:rPr lang="en-US" sz="2400" b="0" dirty="0">
+                <a:solidFill>
+                  <a:srgbClr val="569CD6"/>
+                </a:solidFill>
+                <a:effectLst/>
+                <a:latin typeface="Consolas" panose="020B0609020204030204" pitchFamily="49" charset="0"/>
+              </a:rPr>
+              <a:t>-L.</a:t>
+            </a:r>
+            <a:r>
+              <a:rPr lang="en-US" sz="2400" b="0" dirty="0">
+                <a:solidFill>
+                  <a:srgbClr val="D4D4D4"/>
+                </a:solidFill>
+                <a:effectLst/>
+                <a:latin typeface="Consolas" panose="020B0609020204030204" pitchFamily="49" charset="0"/>
+              </a:rPr>
+              <a:t> </a:t>
+            </a:r>
+            <a:r>
+              <a:rPr lang="en-US" sz="2400" b="0" dirty="0">
+                <a:solidFill>
+                  <a:srgbClr val="569CD6"/>
+                </a:solidFill>
+                <a:effectLst/>
+                <a:latin typeface="Consolas" panose="020B0609020204030204" pitchFamily="49" charset="0"/>
+              </a:rPr>
+              <a:t>-</a:t>
+            </a:r>
+            <a:r>
+              <a:rPr lang="en-US" sz="2400" b="0" dirty="0" err="1">
+                <a:solidFill>
+                  <a:srgbClr val="569CD6"/>
+                </a:solidFill>
+                <a:effectLst/>
+                <a:latin typeface="Consolas" panose="020B0609020204030204" pitchFamily="49" charset="0"/>
+              </a:rPr>
+              <a:t>lMY_LOG</a:t>
+            </a:r>
+            <a:endParaRPr lang="en-US" sz="2400" b="0" dirty="0">
+              <a:solidFill>
+                <a:srgbClr val="CCCCCC"/>
+              </a:solidFill>
+              <a:effectLst/>
+              <a:latin typeface="Consolas" panose="020B0609020204030204" pitchFamily="49" charset="0"/>
+            </a:endParaRPr>
+          </a:p>
+          <a:p>
+            <a:r>
+              <a:rPr lang="en-US" sz="2400" b="0" dirty="0">
+                <a:solidFill>
+                  <a:srgbClr val="DCDCAA"/>
+                </a:solidFill>
+                <a:effectLst/>
+                <a:latin typeface="Consolas" panose="020B0609020204030204" pitchFamily="49" charset="0"/>
+              </a:rPr>
+              <a:t>./</a:t>
+            </a:r>
+            <a:r>
+              <a:rPr lang="en-US" sz="2400" b="0" dirty="0" err="1">
+                <a:solidFill>
+                  <a:srgbClr val="DCDCAA"/>
+                </a:solidFill>
+                <a:effectLst/>
+                <a:latin typeface="Consolas" panose="020B0609020204030204" pitchFamily="49" charset="0"/>
+              </a:rPr>
+              <a:t>static_exe</a:t>
+            </a:r>
+            <a:endParaRPr lang="en-US" sz="2400" b="0" dirty="0">
+              <a:solidFill>
+                <a:srgbClr val="CCCCCC"/>
+              </a:solidFill>
+              <a:effectLst/>
+              <a:latin typeface="Consolas" panose="020B0609020204030204" pitchFamily="49" charset="0"/>
+            </a:endParaRPr>
+          </a:p>
+        </p:txBody>
+      </p:sp>
+      <p:sp>
+        <p:nvSpPr>
+          <p:cNvPr id="17" name="TextBox 16">
+            <a:extLst>
+              <a:ext uri="{FF2B5EF4-FFF2-40B4-BE49-F238E27FC236}">
+                <a16:creationId xmlns:a16="http://schemas.microsoft.com/office/drawing/2014/main" id="{EE20546F-A1F7-4347-8F6F-45227F7E3C4E}"/>
+              </a:ext>
+            </a:extLst>
+          </p:cNvPr>
+          <p:cNvSpPr txBox="1"/>
+          <p:nvPr/>
+        </p:nvSpPr>
+        <p:spPr>
+          <a:xfrm>
+            <a:off x="182262" y="6198720"/>
+            <a:ext cx="6098058" cy="369332"/>
+          </a:xfrm>
+          <a:prstGeom prst="rect">
+            <a:avLst/>
+          </a:prstGeom>
+          <a:noFill/>
+        </p:spPr>
+        <p:txBody>
+          <a:bodyPr wrap="square">
+            <a:spAutoFit/>
+          </a:bodyPr>
+          <a:lstStyle/>
+          <a:p>
+            <a:r>
+              <a:rPr lang="en-US" dirty="0"/>
+              <a:t>*</a:t>
+            </a:r>
+            <a:r>
+              <a:rPr lang="ru-RU" dirty="0"/>
+              <a:t>Посмотреть таблицу символов</a:t>
+            </a:r>
+            <a:r>
+              <a:rPr lang="en-US" dirty="0"/>
+              <a:t> – </a:t>
+            </a:r>
+            <a:r>
+              <a:rPr lang="ru-RU" dirty="0"/>
+              <a:t>команда </a:t>
+            </a:r>
+            <a:r>
+              <a:rPr lang="en-US" dirty="0"/>
+              <a:t>nm</a:t>
+            </a:r>
+            <a:endParaRPr lang="ru-RU" dirty="0"/>
+          </a:p>
+        </p:txBody>
+      </p:sp>
+    </p:spTree>
+    <p:extLst>
+      <p:ext uri="{BB962C8B-B14F-4D97-AF65-F5344CB8AC3E}">
+        <p14:creationId xmlns:p14="http://schemas.microsoft.com/office/powerpoint/2010/main" val="818022012"/>
+      </p:ext>
+    </p:extLst>
+  </p:cSld>
+  <p:clrMapOvr>
+    <a:masterClrMapping/>
+  </p:clrMapOvr>
+</p:sld>
+</file>
+
+<file path=ppt/slides/slide18.xml><?xml version="1.0" encoding="utf-8"?>
+<p:sld xmlns:a="http://schemas.openxmlformats.org/drawingml/2006/main" xmlns:r="http://schemas.openxmlformats.org/officeDocument/2006/relationships" xmlns:p="http://schemas.openxmlformats.org/presentationml/2006/main">
+  <p:cSld>
+    <p:spTree>
+      <p:nvGrpSpPr>
+        <p:cNvPr id="1" name=""/>
+        <p:cNvGrpSpPr/>
+        <p:nvPr/>
+      </p:nvGrpSpPr>
+      <p:grpSpPr>
+        <a:xfrm>
+          <a:off x="0" y="0"/>
+          <a:ext cx="0" cy="0"/>
+          <a:chOff x="0" y="0"/>
+          <a:chExt cx="0" cy="0"/>
+        </a:xfrm>
+      </p:grpSpPr>
+      <p:sp>
+        <p:nvSpPr>
+          <p:cNvPr id="5" name="Заголовок 2">
+            <a:extLst>
+              <a:ext uri="{FF2B5EF4-FFF2-40B4-BE49-F238E27FC236}">
+                <a16:creationId xmlns:a16="http://schemas.microsoft.com/office/drawing/2014/main" id="{1E627AF0-30EB-4DDF-ADF3-6C22571D55C0}"/>
+              </a:ext>
+            </a:extLst>
+          </p:cNvPr>
+          <p:cNvSpPr txBox="1">
+            <a:spLocks/>
+          </p:cNvSpPr>
+          <p:nvPr/>
+        </p:nvSpPr>
+        <p:spPr>
+          <a:xfrm>
+            <a:off x="1133141" y="289948"/>
+            <a:ext cx="9925717" cy="927688"/>
+          </a:xfrm>
+          <a:prstGeom prst="rect">
+            <a:avLst/>
+          </a:prstGeom>
+        </p:spPr>
+        <p:txBody>
+          <a:bodyPr vert="horz" lIns="91440" tIns="45720" rIns="91440" bIns="45720" rtlCol="0" anchor="b">
+            <a:normAutofit/>
+          </a:bodyPr>
+          <a:lstStyle>
+            <a:lvl1pPr algn="ctr" defTabSz="914400" rtl="0" eaLnBrk="1" latinLnBrk="0" hangingPunct="1">
+              <a:lnSpc>
+                <a:spcPct val="90000"/>
+              </a:lnSpc>
+              <a:spcBef>
+                <a:spcPct val="0"/>
+              </a:spcBef>
+              <a:buNone/>
+              <a:defRPr sz="6000" kern="1200">
+                <a:solidFill>
+                  <a:schemeClr val="tx1"/>
+                </a:solidFill>
+                <a:latin typeface="+mj-lt"/>
+                <a:ea typeface="+mj-ea"/>
+                <a:cs typeface="+mj-cs"/>
+              </a:defRPr>
+            </a:lvl1pPr>
+          </a:lstStyle>
+          <a:p>
+            <a:r>
+              <a:rPr lang="en-US" dirty="0"/>
+              <a:t>Build Dynamic Lib</a:t>
+            </a:r>
+          </a:p>
+        </p:txBody>
+      </p:sp>
+      <p:sp>
+        <p:nvSpPr>
+          <p:cNvPr id="7" name="TextBox 6">
+            <a:extLst>
+              <a:ext uri="{FF2B5EF4-FFF2-40B4-BE49-F238E27FC236}">
+                <a16:creationId xmlns:a16="http://schemas.microsoft.com/office/drawing/2014/main" id="{549F152B-8A23-4D80-B05B-103BD5876A53}"/>
+              </a:ext>
+            </a:extLst>
+          </p:cNvPr>
+          <p:cNvSpPr txBox="1"/>
+          <p:nvPr/>
+        </p:nvSpPr>
+        <p:spPr>
+          <a:xfrm>
+            <a:off x="2575849" y="2143667"/>
+            <a:ext cx="8025614" cy="1323439"/>
+          </a:xfrm>
+          <a:prstGeom prst="rect">
+            <a:avLst/>
+          </a:prstGeom>
+          <a:noFill/>
+        </p:spPr>
+        <p:txBody>
+          <a:bodyPr wrap="square">
+            <a:spAutoFit/>
+          </a:bodyPr>
+          <a:lstStyle/>
+          <a:p>
+            <a:r>
+              <a:rPr lang="en-US" sz="2000" b="0" dirty="0" err="1">
+                <a:solidFill>
+                  <a:srgbClr val="DCDCAA"/>
+                </a:solidFill>
+                <a:effectLst/>
+                <a:latin typeface="Consolas" panose="020B0609020204030204" pitchFamily="49" charset="0"/>
+              </a:rPr>
+              <a:t>gcc</a:t>
+            </a:r>
+            <a:r>
+              <a:rPr lang="en-US" sz="2000" b="0" dirty="0">
+                <a:solidFill>
+                  <a:srgbClr val="D4D4D4"/>
+                </a:solidFill>
+                <a:effectLst/>
+                <a:latin typeface="Consolas" panose="020B0609020204030204" pitchFamily="49" charset="0"/>
+              </a:rPr>
+              <a:t> </a:t>
+            </a:r>
+            <a:r>
+              <a:rPr lang="en-US" sz="2000" b="0" dirty="0" err="1">
+                <a:solidFill>
+                  <a:srgbClr val="CE9178"/>
+                </a:solidFill>
+                <a:effectLst/>
+                <a:latin typeface="Consolas" panose="020B0609020204030204" pitchFamily="49" charset="0"/>
+              </a:rPr>
+              <a:t>app.c</a:t>
+            </a:r>
+            <a:r>
+              <a:rPr lang="en-US" sz="2000" b="0" dirty="0">
+                <a:solidFill>
+                  <a:srgbClr val="D4D4D4"/>
+                </a:solidFill>
+                <a:effectLst/>
+                <a:latin typeface="Consolas" panose="020B0609020204030204" pitchFamily="49" charset="0"/>
+              </a:rPr>
+              <a:t> </a:t>
+            </a:r>
+            <a:r>
+              <a:rPr lang="en-US" sz="2000" b="0" dirty="0">
+                <a:solidFill>
+                  <a:srgbClr val="569CD6"/>
+                </a:solidFill>
+                <a:effectLst/>
+                <a:latin typeface="Consolas" panose="020B0609020204030204" pitchFamily="49" charset="0"/>
+              </a:rPr>
+              <a:t>-c</a:t>
+            </a:r>
+            <a:endParaRPr lang="en-US" sz="2000" b="0" dirty="0">
+              <a:solidFill>
+                <a:srgbClr val="CCCCCC"/>
+              </a:solidFill>
+              <a:effectLst/>
+              <a:latin typeface="Consolas" panose="020B0609020204030204" pitchFamily="49" charset="0"/>
+            </a:endParaRPr>
+          </a:p>
+          <a:p>
+            <a:r>
+              <a:rPr lang="en-US" sz="2000" b="0" dirty="0" err="1">
+                <a:solidFill>
+                  <a:srgbClr val="DCDCAA"/>
+                </a:solidFill>
+                <a:effectLst/>
+                <a:latin typeface="Consolas" panose="020B0609020204030204" pitchFamily="49" charset="0"/>
+              </a:rPr>
+              <a:t>gcc</a:t>
+            </a:r>
+            <a:r>
+              <a:rPr lang="en-US" sz="2000" b="0" dirty="0">
+                <a:solidFill>
+                  <a:srgbClr val="D4D4D4"/>
+                </a:solidFill>
+                <a:effectLst/>
+                <a:latin typeface="Consolas" panose="020B0609020204030204" pitchFamily="49" charset="0"/>
+              </a:rPr>
+              <a:t> </a:t>
+            </a:r>
+            <a:r>
+              <a:rPr lang="en-US" sz="2000" b="0" dirty="0" err="1">
+                <a:solidFill>
+                  <a:srgbClr val="CE9178"/>
+                </a:solidFill>
+                <a:effectLst/>
+                <a:latin typeface="Consolas" panose="020B0609020204030204" pitchFamily="49" charset="0"/>
+              </a:rPr>
+              <a:t>log.c</a:t>
+            </a:r>
+            <a:r>
+              <a:rPr lang="en-US" sz="2000" b="0" dirty="0">
+                <a:solidFill>
+                  <a:srgbClr val="D4D4D4"/>
+                </a:solidFill>
+                <a:effectLst/>
+                <a:latin typeface="Consolas" panose="020B0609020204030204" pitchFamily="49" charset="0"/>
+              </a:rPr>
+              <a:t> </a:t>
+            </a:r>
+            <a:r>
+              <a:rPr lang="en-US" sz="2000" b="0" dirty="0">
+                <a:solidFill>
+                  <a:srgbClr val="569CD6"/>
+                </a:solidFill>
+                <a:effectLst/>
+                <a:latin typeface="Consolas" panose="020B0609020204030204" pitchFamily="49" charset="0"/>
+              </a:rPr>
+              <a:t>-c</a:t>
+            </a:r>
+            <a:r>
+              <a:rPr lang="en-US" sz="2000" b="0" dirty="0">
+                <a:solidFill>
+                  <a:srgbClr val="D4D4D4"/>
+                </a:solidFill>
+                <a:effectLst/>
+                <a:latin typeface="Consolas" panose="020B0609020204030204" pitchFamily="49" charset="0"/>
+              </a:rPr>
+              <a:t> </a:t>
+            </a:r>
+            <a:r>
+              <a:rPr lang="en-US" sz="2000" b="0" dirty="0">
+                <a:solidFill>
+                  <a:srgbClr val="569CD6"/>
+                </a:solidFill>
+                <a:effectLst/>
+                <a:latin typeface="Consolas" panose="020B0609020204030204" pitchFamily="49" charset="0"/>
+              </a:rPr>
+              <a:t>-</a:t>
+            </a:r>
+            <a:r>
+              <a:rPr lang="en-US" sz="2000" b="0" dirty="0" err="1">
+                <a:solidFill>
+                  <a:srgbClr val="569CD6"/>
+                </a:solidFill>
+                <a:effectLst/>
+                <a:latin typeface="Consolas" panose="020B0609020204030204" pitchFamily="49" charset="0"/>
+              </a:rPr>
+              <a:t>fPIC</a:t>
+            </a:r>
+            <a:endParaRPr lang="en-US" sz="2000" b="0" dirty="0">
+              <a:solidFill>
+                <a:srgbClr val="CCCCCC"/>
+              </a:solidFill>
+              <a:effectLst/>
+              <a:latin typeface="Consolas" panose="020B0609020204030204" pitchFamily="49" charset="0"/>
+            </a:endParaRPr>
+          </a:p>
+          <a:p>
+            <a:br>
+              <a:rPr lang="en-US" sz="2000" b="0" dirty="0">
+                <a:solidFill>
+                  <a:srgbClr val="CCCCCC"/>
+                </a:solidFill>
+                <a:effectLst/>
+                <a:latin typeface="Consolas" panose="020B0609020204030204" pitchFamily="49" charset="0"/>
+              </a:rPr>
+            </a:br>
+            <a:r>
+              <a:rPr lang="en-US" sz="2000" b="0" dirty="0" err="1">
+                <a:solidFill>
+                  <a:srgbClr val="DCDCAA"/>
+                </a:solidFill>
+                <a:effectLst/>
+                <a:latin typeface="Consolas" panose="020B0609020204030204" pitchFamily="49" charset="0"/>
+              </a:rPr>
+              <a:t>gcc</a:t>
+            </a:r>
+            <a:r>
+              <a:rPr lang="en-US" sz="2000" b="0" dirty="0">
+                <a:solidFill>
+                  <a:srgbClr val="D4D4D4"/>
+                </a:solidFill>
+                <a:effectLst/>
+                <a:latin typeface="Consolas" panose="020B0609020204030204" pitchFamily="49" charset="0"/>
+              </a:rPr>
+              <a:t> </a:t>
+            </a:r>
+            <a:r>
+              <a:rPr lang="en-US" sz="2000" b="0" dirty="0">
+                <a:solidFill>
+                  <a:srgbClr val="569CD6"/>
+                </a:solidFill>
+                <a:effectLst/>
+                <a:latin typeface="Consolas" panose="020B0609020204030204" pitchFamily="49" charset="0"/>
+              </a:rPr>
+              <a:t>--shared</a:t>
+            </a:r>
+            <a:r>
+              <a:rPr lang="en-US" sz="2000" b="0" dirty="0">
+                <a:solidFill>
+                  <a:srgbClr val="D4D4D4"/>
+                </a:solidFill>
+                <a:effectLst/>
+                <a:latin typeface="Consolas" panose="020B0609020204030204" pitchFamily="49" charset="0"/>
+              </a:rPr>
+              <a:t> </a:t>
+            </a:r>
+            <a:r>
+              <a:rPr lang="en-US" sz="2000" b="0" dirty="0" err="1">
+                <a:solidFill>
+                  <a:srgbClr val="CE9178"/>
+                </a:solidFill>
+                <a:effectLst/>
+                <a:latin typeface="Consolas" panose="020B0609020204030204" pitchFamily="49" charset="0"/>
+              </a:rPr>
+              <a:t>app.o</a:t>
+            </a:r>
+            <a:r>
+              <a:rPr lang="en-US" sz="2000" b="0" dirty="0">
+                <a:solidFill>
+                  <a:srgbClr val="D4D4D4"/>
+                </a:solidFill>
+                <a:effectLst/>
+                <a:latin typeface="Consolas" panose="020B0609020204030204" pitchFamily="49" charset="0"/>
+              </a:rPr>
+              <a:t> </a:t>
+            </a:r>
+            <a:r>
+              <a:rPr lang="en-US" sz="2000" b="0" dirty="0" err="1">
+                <a:solidFill>
+                  <a:srgbClr val="CE9178"/>
+                </a:solidFill>
+                <a:effectLst/>
+                <a:latin typeface="Consolas" panose="020B0609020204030204" pitchFamily="49" charset="0"/>
+              </a:rPr>
+              <a:t>log.o</a:t>
+            </a:r>
+            <a:r>
+              <a:rPr lang="en-US" sz="2000" b="0" dirty="0">
+                <a:solidFill>
+                  <a:srgbClr val="D4D4D4"/>
+                </a:solidFill>
+                <a:effectLst/>
+                <a:latin typeface="Consolas" panose="020B0609020204030204" pitchFamily="49" charset="0"/>
+              </a:rPr>
+              <a:t> </a:t>
+            </a:r>
+            <a:r>
+              <a:rPr lang="en-US" sz="2000" b="0" dirty="0">
+                <a:solidFill>
+                  <a:srgbClr val="569CD6"/>
+                </a:solidFill>
+                <a:effectLst/>
+                <a:latin typeface="Consolas" panose="020B0609020204030204" pitchFamily="49" charset="0"/>
+              </a:rPr>
+              <a:t>-o</a:t>
+            </a:r>
+            <a:r>
+              <a:rPr lang="en-US" sz="2000" b="0" dirty="0">
+                <a:solidFill>
+                  <a:srgbClr val="D4D4D4"/>
+                </a:solidFill>
+                <a:effectLst/>
+                <a:latin typeface="Consolas" panose="020B0609020204030204" pitchFamily="49" charset="0"/>
+              </a:rPr>
+              <a:t> </a:t>
+            </a:r>
+            <a:r>
+              <a:rPr lang="en-US" sz="2000" b="0" dirty="0">
+                <a:solidFill>
+                  <a:srgbClr val="CE9178"/>
+                </a:solidFill>
+                <a:effectLst/>
+                <a:latin typeface="Consolas" panose="020B0609020204030204" pitchFamily="49" charset="0"/>
+              </a:rPr>
+              <a:t>libMY_LOG.so</a:t>
+            </a:r>
+            <a:endParaRPr lang="en-US" sz="2000" b="0" dirty="0">
+              <a:solidFill>
+                <a:srgbClr val="CCCCCC"/>
+              </a:solidFill>
+              <a:effectLst/>
+              <a:latin typeface="Consolas" panose="020B0609020204030204" pitchFamily="49" charset="0"/>
+            </a:endParaRPr>
+          </a:p>
+        </p:txBody>
+      </p:sp>
+      <p:sp>
+        <p:nvSpPr>
+          <p:cNvPr id="13" name="TextBox 12">
+            <a:extLst>
+              <a:ext uri="{FF2B5EF4-FFF2-40B4-BE49-F238E27FC236}">
+                <a16:creationId xmlns:a16="http://schemas.microsoft.com/office/drawing/2014/main" id="{4BB4BB2B-16E7-4A9D-9DD8-9E99DC68FAF5}"/>
+              </a:ext>
+            </a:extLst>
+          </p:cNvPr>
+          <p:cNvSpPr txBox="1"/>
+          <p:nvPr/>
+        </p:nvSpPr>
+        <p:spPr>
+          <a:xfrm>
+            <a:off x="214601" y="4827200"/>
+            <a:ext cx="6505118" cy="646331"/>
+          </a:xfrm>
+          <a:prstGeom prst="rect">
+            <a:avLst/>
+          </a:prstGeom>
+          <a:noFill/>
+        </p:spPr>
+        <p:txBody>
+          <a:bodyPr wrap="square">
+            <a:spAutoFit/>
+          </a:bodyPr>
+          <a:lstStyle/>
+          <a:p>
+            <a:r>
+              <a:rPr lang="en-US" b="0" dirty="0" err="1">
+                <a:solidFill>
+                  <a:srgbClr val="DCDCAA"/>
+                </a:solidFill>
+                <a:effectLst/>
+                <a:latin typeface="Consolas" panose="020B0609020204030204" pitchFamily="49" charset="0"/>
+              </a:rPr>
+              <a:t>gcc</a:t>
+            </a:r>
+            <a:r>
+              <a:rPr lang="en-US" b="0" dirty="0">
+                <a:solidFill>
+                  <a:srgbClr val="D4D4D4"/>
+                </a:solidFill>
+                <a:effectLst/>
+                <a:latin typeface="Consolas" panose="020B0609020204030204" pitchFamily="49" charset="0"/>
+              </a:rPr>
+              <a:t> </a:t>
+            </a:r>
+            <a:r>
+              <a:rPr lang="en-US" b="0" dirty="0" err="1">
+                <a:solidFill>
+                  <a:srgbClr val="CE9178"/>
+                </a:solidFill>
+                <a:effectLst/>
+                <a:latin typeface="Consolas" panose="020B0609020204030204" pitchFamily="49" charset="0"/>
+              </a:rPr>
+              <a:t>app.o</a:t>
+            </a:r>
+            <a:r>
+              <a:rPr lang="en-US" b="0" dirty="0">
+                <a:solidFill>
+                  <a:srgbClr val="D4D4D4"/>
+                </a:solidFill>
+                <a:effectLst/>
+                <a:latin typeface="Consolas" panose="020B0609020204030204" pitchFamily="49" charset="0"/>
+              </a:rPr>
+              <a:t> </a:t>
+            </a:r>
+            <a:r>
+              <a:rPr lang="en-US" b="0" dirty="0">
+                <a:solidFill>
+                  <a:srgbClr val="569CD6"/>
+                </a:solidFill>
+                <a:effectLst/>
+                <a:latin typeface="Consolas" panose="020B0609020204030204" pitchFamily="49" charset="0"/>
+              </a:rPr>
+              <a:t>-o</a:t>
+            </a:r>
+            <a:r>
+              <a:rPr lang="en-US" b="0" dirty="0">
+                <a:solidFill>
+                  <a:srgbClr val="D4D4D4"/>
+                </a:solidFill>
+                <a:effectLst/>
+                <a:latin typeface="Consolas" panose="020B0609020204030204" pitchFamily="49" charset="0"/>
+              </a:rPr>
+              <a:t> </a:t>
+            </a:r>
+            <a:r>
+              <a:rPr lang="en-US" b="0" dirty="0" err="1">
+                <a:solidFill>
+                  <a:srgbClr val="CE9178"/>
+                </a:solidFill>
+                <a:effectLst/>
+                <a:latin typeface="Consolas" panose="020B0609020204030204" pitchFamily="49" charset="0"/>
+              </a:rPr>
+              <a:t>dynamic_exe</a:t>
+            </a:r>
+            <a:r>
+              <a:rPr lang="en-US" b="0" dirty="0">
+                <a:solidFill>
+                  <a:srgbClr val="D4D4D4"/>
+                </a:solidFill>
+                <a:effectLst/>
+                <a:latin typeface="Consolas" panose="020B0609020204030204" pitchFamily="49" charset="0"/>
+              </a:rPr>
+              <a:t> </a:t>
+            </a:r>
+            <a:r>
+              <a:rPr lang="en-US" b="0" dirty="0">
+                <a:solidFill>
+                  <a:srgbClr val="569CD6"/>
+                </a:solidFill>
+                <a:effectLst/>
+                <a:latin typeface="Consolas" panose="020B0609020204030204" pitchFamily="49" charset="0"/>
+              </a:rPr>
+              <a:t>-L.</a:t>
+            </a:r>
+            <a:r>
+              <a:rPr lang="en-US" b="0" dirty="0">
+                <a:solidFill>
+                  <a:srgbClr val="D4D4D4"/>
+                </a:solidFill>
+                <a:effectLst/>
+                <a:latin typeface="Consolas" panose="020B0609020204030204" pitchFamily="49" charset="0"/>
+              </a:rPr>
+              <a:t> </a:t>
+            </a:r>
+            <a:r>
+              <a:rPr lang="en-US" b="0" dirty="0">
+                <a:solidFill>
+                  <a:srgbClr val="569CD6"/>
+                </a:solidFill>
+                <a:effectLst/>
+                <a:latin typeface="Consolas" panose="020B0609020204030204" pitchFamily="49" charset="0"/>
+              </a:rPr>
+              <a:t>-</a:t>
+            </a:r>
+            <a:r>
+              <a:rPr lang="en-US" b="0" dirty="0" err="1">
+                <a:solidFill>
+                  <a:srgbClr val="569CD6"/>
+                </a:solidFill>
+                <a:effectLst/>
+                <a:latin typeface="Consolas" panose="020B0609020204030204" pitchFamily="49" charset="0"/>
+              </a:rPr>
+              <a:t>lMY_LOG</a:t>
+            </a:r>
+            <a:r>
+              <a:rPr lang="en-US" b="0" dirty="0">
+                <a:solidFill>
+                  <a:srgbClr val="D4D4D4"/>
+                </a:solidFill>
+                <a:effectLst/>
+                <a:latin typeface="Consolas" panose="020B0609020204030204" pitchFamily="49" charset="0"/>
+              </a:rPr>
+              <a:t> </a:t>
+            </a:r>
+            <a:r>
+              <a:rPr lang="en-US" b="0" dirty="0">
+                <a:solidFill>
+                  <a:srgbClr val="569CD6"/>
+                </a:solidFill>
+                <a:effectLst/>
+                <a:latin typeface="Consolas" panose="020B0609020204030204" pitchFamily="49" charset="0"/>
+              </a:rPr>
+              <a:t>-</a:t>
+            </a:r>
+            <a:r>
+              <a:rPr lang="en-US" b="0" dirty="0" err="1">
+                <a:solidFill>
+                  <a:srgbClr val="569CD6"/>
+                </a:solidFill>
+                <a:effectLst/>
+                <a:latin typeface="Consolas" panose="020B0609020204030204" pitchFamily="49" charset="0"/>
+              </a:rPr>
+              <a:t>Wl</a:t>
+            </a:r>
+            <a:r>
+              <a:rPr lang="en-US" b="0" dirty="0">
+                <a:solidFill>
+                  <a:srgbClr val="569CD6"/>
+                </a:solidFill>
+                <a:effectLst/>
+                <a:latin typeface="Consolas" panose="020B0609020204030204" pitchFamily="49" charset="0"/>
+              </a:rPr>
+              <a:t>,-</a:t>
+            </a:r>
+            <a:r>
+              <a:rPr lang="en-US" b="0" dirty="0" err="1">
+                <a:solidFill>
+                  <a:srgbClr val="569CD6"/>
+                </a:solidFill>
+                <a:effectLst/>
+                <a:latin typeface="Consolas" panose="020B0609020204030204" pitchFamily="49" charset="0"/>
+              </a:rPr>
+              <a:t>rpath</a:t>
+            </a:r>
+            <a:r>
+              <a:rPr lang="en-US" b="0" dirty="0">
+                <a:solidFill>
+                  <a:srgbClr val="569CD6"/>
+                </a:solidFill>
+                <a:effectLst/>
+                <a:latin typeface="Consolas" panose="020B0609020204030204" pitchFamily="49" charset="0"/>
+              </a:rPr>
+              <a:t>,.</a:t>
+            </a:r>
+            <a:endParaRPr lang="en-US" b="0" dirty="0">
+              <a:solidFill>
+                <a:srgbClr val="CCCCCC"/>
+              </a:solidFill>
+              <a:effectLst/>
+              <a:latin typeface="Consolas" panose="020B0609020204030204" pitchFamily="49" charset="0"/>
+            </a:endParaRPr>
+          </a:p>
+          <a:p>
+            <a:r>
+              <a:rPr lang="en-US" b="0" dirty="0">
+                <a:solidFill>
+                  <a:srgbClr val="DCDCAA"/>
+                </a:solidFill>
+                <a:effectLst/>
+                <a:latin typeface="Consolas" panose="020B0609020204030204" pitchFamily="49" charset="0"/>
+              </a:rPr>
+              <a:t>./</a:t>
+            </a:r>
+            <a:r>
+              <a:rPr lang="en-US" b="0" dirty="0" err="1">
+                <a:solidFill>
+                  <a:srgbClr val="DCDCAA"/>
+                </a:solidFill>
+                <a:effectLst/>
+                <a:latin typeface="Consolas" panose="020B0609020204030204" pitchFamily="49" charset="0"/>
+              </a:rPr>
+              <a:t>dynamic_exe</a:t>
+            </a:r>
+            <a:endParaRPr lang="en-US" b="0" dirty="0">
+              <a:solidFill>
+                <a:srgbClr val="CCCCCC"/>
+              </a:solidFill>
+              <a:effectLst/>
+              <a:latin typeface="Consolas" panose="020B0609020204030204" pitchFamily="49" charset="0"/>
+            </a:endParaRPr>
+          </a:p>
+        </p:txBody>
+      </p:sp>
+      <p:sp>
+        <p:nvSpPr>
+          <p:cNvPr id="17" name="TextBox 16">
+            <a:extLst>
+              <a:ext uri="{FF2B5EF4-FFF2-40B4-BE49-F238E27FC236}">
+                <a16:creationId xmlns:a16="http://schemas.microsoft.com/office/drawing/2014/main" id="{268BE07E-65D3-4B1B-A71C-F8B03C990C5F}"/>
+              </a:ext>
+            </a:extLst>
+          </p:cNvPr>
+          <p:cNvSpPr txBox="1"/>
+          <p:nvPr/>
+        </p:nvSpPr>
+        <p:spPr>
+          <a:xfrm>
+            <a:off x="7378884" y="4827200"/>
+            <a:ext cx="4407244" cy="584775"/>
+          </a:xfrm>
+          <a:prstGeom prst="rect">
+            <a:avLst/>
+          </a:prstGeom>
+          <a:noFill/>
+        </p:spPr>
+        <p:txBody>
+          <a:bodyPr wrap="square">
+            <a:spAutoFit/>
+          </a:bodyPr>
+          <a:lstStyle/>
+          <a:p>
+            <a:r>
+              <a:rPr lang="en-US" sz="1600" b="0" dirty="0" err="1">
+                <a:solidFill>
+                  <a:srgbClr val="DCDCAA"/>
+                </a:solidFill>
+                <a:effectLst/>
+                <a:latin typeface="Consolas" panose="020B0609020204030204" pitchFamily="49" charset="0"/>
+              </a:rPr>
+              <a:t>gcc</a:t>
+            </a:r>
+            <a:r>
+              <a:rPr lang="en-US" sz="1600" b="0" dirty="0">
+                <a:solidFill>
+                  <a:srgbClr val="D4D4D4"/>
+                </a:solidFill>
+                <a:effectLst/>
+                <a:latin typeface="Consolas" panose="020B0609020204030204" pitchFamily="49" charset="0"/>
+              </a:rPr>
+              <a:t> </a:t>
+            </a:r>
+            <a:r>
+              <a:rPr lang="en-US" sz="1600" b="0" dirty="0" err="1">
+                <a:solidFill>
+                  <a:srgbClr val="CE9178"/>
+                </a:solidFill>
+                <a:effectLst/>
+                <a:latin typeface="Consolas" panose="020B0609020204030204" pitchFamily="49" charset="0"/>
+              </a:rPr>
+              <a:t>app.o</a:t>
+            </a:r>
+            <a:r>
+              <a:rPr lang="en-US" sz="1600" b="0" dirty="0">
+                <a:solidFill>
+                  <a:srgbClr val="D4D4D4"/>
+                </a:solidFill>
+                <a:effectLst/>
+                <a:latin typeface="Consolas" panose="020B0609020204030204" pitchFamily="49" charset="0"/>
+              </a:rPr>
+              <a:t> </a:t>
+            </a:r>
+            <a:r>
+              <a:rPr lang="en-US" sz="1600" b="0" dirty="0">
+                <a:solidFill>
+                  <a:srgbClr val="569CD6"/>
+                </a:solidFill>
+                <a:effectLst/>
+                <a:latin typeface="Consolas" panose="020B0609020204030204" pitchFamily="49" charset="0"/>
+              </a:rPr>
+              <a:t>-o</a:t>
+            </a:r>
+            <a:r>
+              <a:rPr lang="en-US" sz="1600" b="0" dirty="0">
+                <a:solidFill>
+                  <a:srgbClr val="D4D4D4"/>
+                </a:solidFill>
+                <a:effectLst/>
+                <a:latin typeface="Consolas" panose="020B0609020204030204" pitchFamily="49" charset="0"/>
+              </a:rPr>
+              <a:t> </a:t>
+            </a:r>
+            <a:r>
+              <a:rPr lang="en-US" sz="1600" b="0" dirty="0" err="1">
+                <a:solidFill>
+                  <a:srgbClr val="CE9178"/>
+                </a:solidFill>
+                <a:effectLst/>
+                <a:latin typeface="Consolas" panose="020B0609020204030204" pitchFamily="49" charset="0"/>
+              </a:rPr>
+              <a:t>dynamic_exe</a:t>
+            </a:r>
+            <a:r>
+              <a:rPr lang="en-US" sz="1600" b="0" dirty="0">
+                <a:solidFill>
+                  <a:srgbClr val="D4D4D4"/>
+                </a:solidFill>
+                <a:effectLst/>
+                <a:latin typeface="Consolas" panose="020B0609020204030204" pitchFamily="49" charset="0"/>
+              </a:rPr>
+              <a:t> </a:t>
+            </a:r>
+            <a:r>
+              <a:rPr lang="en-US" sz="1600" b="0" dirty="0">
+                <a:solidFill>
+                  <a:srgbClr val="569CD6"/>
+                </a:solidFill>
+                <a:effectLst/>
+                <a:latin typeface="Consolas" panose="020B0609020204030204" pitchFamily="49" charset="0"/>
+              </a:rPr>
+              <a:t>-L.</a:t>
+            </a:r>
+            <a:r>
+              <a:rPr lang="en-US" sz="1600" b="0" dirty="0">
+                <a:solidFill>
+                  <a:srgbClr val="D4D4D4"/>
+                </a:solidFill>
+                <a:effectLst/>
+                <a:latin typeface="Consolas" panose="020B0609020204030204" pitchFamily="49" charset="0"/>
+              </a:rPr>
+              <a:t> </a:t>
+            </a:r>
+            <a:r>
+              <a:rPr lang="en-US" sz="1600" b="0" dirty="0">
+                <a:solidFill>
+                  <a:srgbClr val="569CD6"/>
+                </a:solidFill>
+                <a:effectLst/>
+                <a:latin typeface="Consolas" panose="020B0609020204030204" pitchFamily="49" charset="0"/>
+              </a:rPr>
+              <a:t>-</a:t>
+            </a:r>
+            <a:r>
+              <a:rPr lang="en-US" sz="1600" b="0" dirty="0" err="1">
+                <a:solidFill>
+                  <a:srgbClr val="569CD6"/>
+                </a:solidFill>
+                <a:effectLst/>
+                <a:latin typeface="Consolas" panose="020B0609020204030204" pitchFamily="49" charset="0"/>
+              </a:rPr>
+              <a:t>lMY_LOG</a:t>
+            </a:r>
+            <a:endParaRPr lang="en-US" sz="1600" b="0" dirty="0">
+              <a:solidFill>
+                <a:srgbClr val="CCCCCC"/>
+              </a:solidFill>
+              <a:effectLst/>
+              <a:latin typeface="Consolas" panose="020B0609020204030204" pitchFamily="49" charset="0"/>
+            </a:endParaRPr>
+          </a:p>
+          <a:p>
+            <a:r>
+              <a:rPr lang="en-US" sz="1600" b="0" dirty="0">
+                <a:solidFill>
+                  <a:srgbClr val="9CDCFE"/>
+                </a:solidFill>
+                <a:effectLst/>
+                <a:latin typeface="Consolas" panose="020B0609020204030204" pitchFamily="49" charset="0"/>
+              </a:rPr>
+              <a:t>LD_LIBRARY_PATH</a:t>
+            </a:r>
+            <a:r>
+              <a:rPr lang="en-US" sz="1600" b="0" dirty="0">
+                <a:solidFill>
+                  <a:srgbClr val="D4D4D4"/>
+                </a:solidFill>
+                <a:effectLst/>
+                <a:latin typeface="Consolas" panose="020B0609020204030204" pitchFamily="49" charset="0"/>
+              </a:rPr>
+              <a:t>=</a:t>
+            </a:r>
+            <a:r>
+              <a:rPr lang="en-US" sz="1600" b="0" dirty="0">
+                <a:solidFill>
+                  <a:srgbClr val="CE9178"/>
+                </a:solidFill>
+                <a:effectLst/>
+                <a:latin typeface="Consolas" panose="020B0609020204030204" pitchFamily="49" charset="0"/>
+              </a:rPr>
+              <a:t>.</a:t>
+            </a:r>
+            <a:r>
+              <a:rPr lang="en-US" sz="1600" b="0" dirty="0">
+                <a:solidFill>
+                  <a:srgbClr val="D4D4D4"/>
+                </a:solidFill>
+                <a:effectLst/>
+                <a:latin typeface="Consolas" panose="020B0609020204030204" pitchFamily="49" charset="0"/>
+              </a:rPr>
+              <a:t> </a:t>
+            </a:r>
+            <a:r>
+              <a:rPr lang="en-US" sz="1600" b="0" dirty="0">
+                <a:solidFill>
+                  <a:srgbClr val="DCDCAA"/>
+                </a:solidFill>
+                <a:effectLst/>
+                <a:latin typeface="Consolas" panose="020B0609020204030204" pitchFamily="49" charset="0"/>
+              </a:rPr>
+              <a:t>./</a:t>
+            </a:r>
+            <a:r>
+              <a:rPr lang="en-US" sz="1600" b="0" dirty="0" err="1">
+                <a:solidFill>
+                  <a:srgbClr val="DCDCAA"/>
+                </a:solidFill>
+                <a:effectLst/>
+                <a:latin typeface="Consolas" panose="020B0609020204030204" pitchFamily="49" charset="0"/>
+              </a:rPr>
+              <a:t>dynamic_exe</a:t>
+            </a:r>
+            <a:endParaRPr lang="en-US" sz="1600" b="0" dirty="0">
+              <a:solidFill>
+                <a:srgbClr val="CCCCCC"/>
+              </a:solidFill>
+              <a:effectLst/>
+              <a:latin typeface="Consolas" panose="020B0609020204030204" pitchFamily="49" charset="0"/>
+            </a:endParaRPr>
+          </a:p>
+        </p:txBody>
+      </p:sp>
+      <p:sp>
+        <p:nvSpPr>
+          <p:cNvPr id="19" name="TextBox 18">
+            <a:extLst>
+              <a:ext uri="{FF2B5EF4-FFF2-40B4-BE49-F238E27FC236}">
+                <a16:creationId xmlns:a16="http://schemas.microsoft.com/office/drawing/2014/main" id="{6B2BF426-223E-4CF7-98A5-E4B66530B940}"/>
+              </a:ext>
+            </a:extLst>
+          </p:cNvPr>
+          <p:cNvSpPr txBox="1"/>
+          <p:nvPr/>
+        </p:nvSpPr>
+        <p:spPr>
+          <a:xfrm>
+            <a:off x="6201352" y="4312280"/>
+            <a:ext cx="774608" cy="400110"/>
+          </a:xfrm>
+          <a:prstGeom prst="rect">
+            <a:avLst/>
+          </a:prstGeom>
+          <a:noFill/>
+        </p:spPr>
+        <p:txBody>
+          <a:bodyPr wrap="square">
+            <a:spAutoFit/>
+          </a:bodyPr>
+          <a:lstStyle/>
+          <a:p>
+            <a:r>
+              <a:rPr lang="ru-RU" sz="2000" dirty="0"/>
+              <a:t>ИЛИ</a:t>
+            </a:r>
+          </a:p>
+        </p:txBody>
+      </p:sp>
+      <p:sp>
+        <p:nvSpPr>
+          <p:cNvPr id="8" name="TextBox 7">
+            <a:extLst>
+              <a:ext uri="{FF2B5EF4-FFF2-40B4-BE49-F238E27FC236}">
+                <a16:creationId xmlns:a16="http://schemas.microsoft.com/office/drawing/2014/main" id="{D961F25E-C8F7-40F8-8027-30B36EB9834A}"/>
+              </a:ext>
+            </a:extLst>
+          </p:cNvPr>
+          <p:cNvSpPr txBox="1"/>
+          <p:nvPr/>
+        </p:nvSpPr>
+        <p:spPr>
+          <a:xfrm>
+            <a:off x="214601" y="5988451"/>
+            <a:ext cx="6098058" cy="646331"/>
+          </a:xfrm>
+          <a:prstGeom prst="rect">
+            <a:avLst/>
+          </a:prstGeom>
+          <a:noFill/>
+        </p:spPr>
+        <p:txBody>
+          <a:bodyPr wrap="square">
+            <a:spAutoFit/>
+          </a:bodyPr>
+          <a:lstStyle/>
+          <a:p>
+            <a:r>
+              <a:rPr lang="en-US" dirty="0"/>
+              <a:t>*</a:t>
+            </a:r>
+            <a:r>
+              <a:rPr lang="ru-RU" dirty="0"/>
+              <a:t>Посмотреть список дин. </a:t>
+            </a:r>
+            <a:r>
+              <a:rPr lang="ru-RU" dirty="0" err="1"/>
+              <a:t>либ</a:t>
+            </a:r>
+            <a:r>
+              <a:rPr lang="ru-RU" dirty="0"/>
+              <a:t> </a:t>
+            </a:r>
+            <a:r>
+              <a:rPr lang="en-US" dirty="0"/>
+              <a:t>– </a:t>
+            </a:r>
+            <a:r>
+              <a:rPr lang="ru-RU" dirty="0"/>
+              <a:t>команда </a:t>
+            </a:r>
+            <a:r>
+              <a:rPr lang="en-US" dirty="0" err="1"/>
+              <a:t>ldd</a:t>
+            </a:r>
+            <a:endParaRPr lang="ru-RU" dirty="0"/>
+          </a:p>
+          <a:p>
+            <a:r>
+              <a:rPr lang="ru-RU" dirty="0"/>
+              <a:t>*</a:t>
+            </a:r>
+            <a:r>
+              <a:rPr lang="ru-RU" dirty="0" err="1"/>
+              <a:t>Предзагрузить</a:t>
+            </a:r>
+            <a:r>
+              <a:rPr lang="ru-RU" dirty="0"/>
+              <a:t> </a:t>
+            </a:r>
+            <a:r>
+              <a:rPr lang="ru-RU" dirty="0" err="1"/>
+              <a:t>либу</a:t>
+            </a:r>
+            <a:r>
+              <a:rPr lang="en-US" dirty="0"/>
+              <a:t>: LD_PRELOAD</a:t>
+            </a:r>
+            <a:endParaRPr lang="ru-RU" dirty="0"/>
+          </a:p>
+        </p:txBody>
+      </p:sp>
+    </p:spTree>
+    <p:extLst>
+      <p:ext uri="{BB962C8B-B14F-4D97-AF65-F5344CB8AC3E}">
+        <p14:creationId xmlns:p14="http://schemas.microsoft.com/office/powerpoint/2010/main" val="76297722"/>
+      </p:ext>
+    </p:extLst>
+  </p:cSld>
+  <p:clrMapOvr>
+    <a:masterClrMapping/>
+  </p:clrMapOvr>
+</p:sld>
+</file>
+
+<file path=ppt/slides/slide19.xml><?xml version="1.0" encoding="utf-8"?>
+<p:sld xmlns:a="http://schemas.openxmlformats.org/drawingml/2006/main" xmlns:r="http://schemas.openxmlformats.org/officeDocument/2006/relationships" xmlns:p="http://schemas.openxmlformats.org/presentationml/2006/main">
+  <p:cSld>
+    <p:spTree>
+      <p:nvGrpSpPr>
+        <p:cNvPr id="1" name=""/>
+        <p:cNvGrpSpPr/>
+        <p:nvPr/>
+      </p:nvGrpSpPr>
+      <p:grpSpPr>
+        <a:xfrm>
+          <a:off x="0" y="0"/>
+          <a:ext cx="0" cy="0"/>
+          <a:chOff x="0" y="0"/>
+          <a:chExt cx="0" cy="0"/>
+        </a:xfrm>
+      </p:grpSpPr>
+      <p:sp>
+        <p:nvSpPr>
+          <p:cNvPr id="5" name="Заголовок 2">
+            <a:extLst>
+              <a:ext uri="{FF2B5EF4-FFF2-40B4-BE49-F238E27FC236}">
+                <a16:creationId xmlns:a16="http://schemas.microsoft.com/office/drawing/2014/main" id="{1E627AF0-30EB-4DDF-ADF3-6C22571D55C0}"/>
+              </a:ext>
+            </a:extLst>
+          </p:cNvPr>
+          <p:cNvSpPr txBox="1">
+            <a:spLocks/>
+          </p:cNvSpPr>
+          <p:nvPr/>
+        </p:nvSpPr>
+        <p:spPr>
+          <a:xfrm>
+            <a:off x="1133141" y="289948"/>
+            <a:ext cx="9925717" cy="927688"/>
+          </a:xfrm>
+          <a:prstGeom prst="rect">
+            <a:avLst/>
+          </a:prstGeom>
+        </p:spPr>
+        <p:txBody>
+          <a:bodyPr vert="horz" lIns="91440" tIns="45720" rIns="91440" bIns="45720" rtlCol="0" anchor="b">
+            <a:normAutofit/>
+          </a:bodyPr>
+          <a:lstStyle>
+            <a:lvl1pPr algn="ctr" defTabSz="914400" rtl="0" eaLnBrk="1" latinLnBrk="0" hangingPunct="1">
+              <a:lnSpc>
+                <a:spcPct val="90000"/>
+              </a:lnSpc>
+              <a:spcBef>
+                <a:spcPct val="0"/>
+              </a:spcBef>
+              <a:buNone/>
+              <a:defRPr sz="6000" kern="1200">
+                <a:solidFill>
+                  <a:schemeClr val="tx1"/>
+                </a:solidFill>
+                <a:latin typeface="+mj-lt"/>
+                <a:ea typeface="+mj-ea"/>
+                <a:cs typeface="+mj-cs"/>
+              </a:defRPr>
+            </a:lvl1pPr>
+          </a:lstStyle>
+          <a:p>
+            <a:r>
+              <a:rPr lang="en-US" dirty="0"/>
               <a:t>Linux library version</a:t>
             </a:r>
           </a:p>
@@ -8906,7 +9747,386 @@
 </p:sld>
 </file>
 
-<file path=ppt/slides/slide18.xml><?xml version="1.0" encoding="utf-8"?>
+<file path=ppt/slides/slide2.xml><?xml version="1.0" encoding="utf-8"?>
+<p:sld xmlns:a="http://schemas.openxmlformats.org/drawingml/2006/main" xmlns:r="http://schemas.openxmlformats.org/officeDocument/2006/relationships" xmlns:p="http://schemas.openxmlformats.org/presentationml/2006/main">
+  <p:cSld>
+    <p:spTree>
+      <p:nvGrpSpPr>
+        <p:cNvPr id="1" name=""/>
+        <p:cNvGrpSpPr/>
+        <p:nvPr/>
+      </p:nvGrpSpPr>
+      <p:grpSpPr>
+        <a:xfrm>
+          <a:off x="0" y="0"/>
+          <a:ext cx="0" cy="0"/>
+          <a:chOff x="0" y="0"/>
+          <a:chExt cx="0" cy="0"/>
+        </a:xfrm>
+      </p:grpSpPr>
+      <p:sp>
+        <p:nvSpPr>
+          <p:cNvPr id="5" name="Заголовок 2">
+            <a:extLst>
+              <a:ext uri="{FF2B5EF4-FFF2-40B4-BE49-F238E27FC236}">
+                <a16:creationId xmlns:a16="http://schemas.microsoft.com/office/drawing/2014/main" id="{1E627AF0-30EB-4DDF-ADF3-6C22571D55C0}"/>
+              </a:ext>
+            </a:extLst>
+          </p:cNvPr>
+          <p:cNvSpPr txBox="1">
+            <a:spLocks/>
+          </p:cNvSpPr>
+          <p:nvPr/>
+        </p:nvSpPr>
+        <p:spPr>
+          <a:xfrm>
+            <a:off x="1133140" y="0"/>
+            <a:ext cx="9925717" cy="927688"/>
+          </a:xfrm>
+          <a:prstGeom prst="rect">
+            <a:avLst/>
+          </a:prstGeom>
+        </p:spPr>
+        <p:txBody>
+          <a:bodyPr vert="horz" lIns="91440" tIns="45720" rIns="91440" bIns="45720" rtlCol="0" anchor="b">
+            <a:normAutofit/>
+          </a:bodyPr>
+          <a:lstStyle>
+            <a:lvl1pPr algn="ctr" defTabSz="914400" rtl="0" eaLnBrk="1" latinLnBrk="0" hangingPunct="1">
+              <a:lnSpc>
+                <a:spcPct val="90000"/>
+              </a:lnSpc>
+              <a:spcBef>
+                <a:spcPct val="0"/>
+              </a:spcBef>
+              <a:buNone/>
+              <a:defRPr sz="6000" kern="1200">
+                <a:solidFill>
+                  <a:schemeClr val="tx1"/>
+                </a:solidFill>
+                <a:latin typeface="+mj-lt"/>
+                <a:ea typeface="+mj-ea"/>
+                <a:cs typeface="+mj-cs"/>
+              </a:defRPr>
+            </a:lvl1pPr>
+          </a:lstStyle>
+          <a:p>
+            <a:r>
+              <a:rPr lang="ru-RU" dirty="0" err="1">
+                <a:latin typeface="Times New Roman" panose="02020603050405020304" pitchFamily="18" charset="0"/>
+                <a:cs typeface="Times New Roman" panose="02020603050405020304" pitchFamily="18" charset="0"/>
+              </a:rPr>
+              <a:t>Многофайловый</a:t>
+            </a:r>
+            <a:r>
+              <a:rPr lang="ru-RU" dirty="0">
+                <a:latin typeface="Times New Roman" panose="02020603050405020304" pitchFamily="18" charset="0"/>
+                <a:cs typeface="Times New Roman" panose="02020603050405020304" pitchFamily="18" charset="0"/>
+              </a:rPr>
+              <a:t> проект</a:t>
+            </a:r>
+            <a:endParaRPr lang="en-US" dirty="0">
+              <a:latin typeface="Times New Roman" panose="02020603050405020304" pitchFamily="18" charset="0"/>
+              <a:cs typeface="Times New Roman" panose="02020603050405020304" pitchFamily="18" charset="0"/>
+            </a:endParaRPr>
+          </a:p>
+        </p:txBody>
+      </p:sp>
+      <p:sp>
+        <p:nvSpPr>
+          <p:cNvPr id="8" name="TextBox 7">
+            <a:extLst>
+              <a:ext uri="{FF2B5EF4-FFF2-40B4-BE49-F238E27FC236}">
+                <a16:creationId xmlns:a16="http://schemas.microsoft.com/office/drawing/2014/main" id="{A98EACA5-512A-4693-A1DF-4D2D060E9510}"/>
+              </a:ext>
+            </a:extLst>
+          </p:cNvPr>
+          <p:cNvSpPr txBox="1"/>
+          <p:nvPr/>
+        </p:nvSpPr>
+        <p:spPr>
+          <a:xfrm>
+            <a:off x="518096" y="1327985"/>
+            <a:ext cx="11391194" cy="4401205"/>
+          </a:xfrm>
+          <a:prstGeom prst="rect">
+            <a:avLst/>
+          </a:prstGeom>
+          <a:noFill/>
+        </p:spPr>
+        <p:txBody>
+          <a:bodyPr wrap="square">
+            <a:spAutoFit/>
+          </a:bodyPr>
+          <a:lstStyle/>
+          <a:p>
+            <a:r>
+              <a:rPr lang="ru-RU" sz="2000" b="1" dirty="0" err="1">
+                <a:latin typeface="Times New Roman" panose="02020603050405020304" pitchFamily="18" charset="0"/>
+                <a:cs typeface="Times New Roman" panose="02020603050405020304" pitchFamily="18" charset="0"/>
+              </a:rPr>
+              <a:t>Многофайловый</a:t>
+            </a:r>
+            <a:r>
+              <a:rPr lang="ru-RU" sz="2000" b="1" dirty="0">
+                <a:latin typeface="Times New Roman" panose="02020603050405020304" pitchFamily="18" charset="0"/>
+                <a:cs typeface="Times New Roman" panose="02020603050405020304" pitchFamily="18" charset="0"/>
+              </a:rPr>
+              <a:t> проект</a:t>
+            </a:r>
+            <a:r>
+              <a:rPr lang="ru-RU" sz="2000" dirty="0">
+                <a:latin typeface="Times New Roman" panose="02020603050405020304" pitchFamily="18" charset="0"/>
+                <a:cs typeface="Times New Roman" panose="02020603050405020304" pitchFamily="18" charset="0"/>
+              </a:rPr>
+              <a:t> — это подход к организации исходного кода, при котором программа разделяется на несколько отдельных файлов. С точки зрения структуры и процесса сборки, это позволяет логически изолировать компоненты, ускорить компиляцию и упростить совместную разработку. </a:t>
+            </a:r>
+          </a:p>
+          <a:p>
+            <a:endParaRPr lang="ru-RU" sz="2000" dirty="0">
+              <a:latin typeface="Times New Roman" panose="02020603050405020304" pitchFamily="18" charset="0"/>
+              <a:cs typeface="Times New Roman" panose="02020603050405020304" pitchFamily="18" charset="0"/>
+            </a:endParaRPr>
+          </a:p>
+          <a:p>
+            <a:r>
+              <a:rPr lang="ru-RU" sz="2000" dirty="0">
+                <a:latin typeface="Times New Roman" panose="02020603050405020304" pitchFamily="18" charset="0"/>
+                <a:cs typeface="Times New Roman" panose="02020603050405020304" pitchFamily="18" charset="0"/>
+              </a:rPr>
+              <a:t>В компилируемых языках (например, Си) </a:t>
+            </a:r>
+            <a:r>
+              <a:rPr lang="ru-RU" sz="2000" dirty="0" err="1">
+                <a:latin typeface="Times New Roman" panose="02020603050405020304" pitchFamily="18" charset="0"/>
+                <a:cs typeface="Times New Roman" panose="02020603050405020304" pitchFamily="18" charset="0"/>
+              </a:rPr>
+              <a:t>многофайловость</a:t>
+            </a:r>
+            <a:r>
+              <a:rPr lang="ru-RU" sz="2000" dirty="0">
+                <a:latin typeface="Times New Roman" panose="02020603050405020304" pitchFamily="18" charset="0"/>
+                <a:cs typeface="Times New Roman" panose="02020603050405020304" pitchFamily="18" charset="0"/>
+              </a:rPr>
+              <a:t> обычно реализуется через разделение на:</a:t>
+            </a:r>
+          </a:p>
+          <a:p>
+            <a:pPr marL="342900" indent="-342900">
+              <a:buFont typeface="Arial" panose="020B0604020202020204" pitchFamily="34" charset="0"/>
+              <a:buChar char="•"/>
+            </a:pPr>
+            <a:r>
+              <a:rPr lang="ru-RU" sz="2000" dirty="0">
+                <a:latin typeface="Times New Roman" panose="02020603050405020304" pitchFamily="18" charset="0"/>
+                <a:cs typeface="Times New Roman" panose="02020603050405020304" pitchFamily="18" charset="0"/>
+              </a:rPr>
+              <a:t>Заголовочные файлы (.h) — "интерфейс" модуля. Здесь мы пишем прототипы функций и объявляем структуры, чтобы другие части программы знали, как с ними взаимодействовать.             </a:t>
+            </a:r>
+          </a:p>
+          <a:p>
+            <a:pPr marL="342900" indent="-342900">
+              <a:buFont typeface="Arial" panose="020B0604020202020204" pitchFamily="34" charset="0"/>
+              <a:buChar char="•"/>
+            </a:pPr>
+            <a:r>
+              <a:rPr lang="ru-RU" sz="2000" dirty="0">
+                <a:latin typeface="Times New Roman" panose="02020603050405020304" pitchFamily="18" charset="0"/>
+                <a:cs typeface="Times New Roman" panose="02020603050405020304" pitchFamily="18" charset="0"/>
+              </a:rPr>
+              <a:t>Файлы с исходным кодом (реализации) (.c/</a:t>
+            </a:r>
+            <a:r>
+              <a:rPr lang="ru-RU" sz="2000" dirty="0" err="1">
+                <a:latin typeface="Times New Roman" panose="02020603050405020304" pitchFamily="18" charset="0"/>
+                <a:cs typeface="Times New Roman" panose="02020603050405020304" pitchFamily="18" charset="0"/>
+              </a:rPr>
+              <a:t>cpp</a:t>
+            </a:r>
+            <a:r>
+              <a:rPr lang="ru-RU" sz="2000" dirty="0">
+                <a:latin typeface="Times New Roman" panose="02020603050405020304" pitchFamily="18" charset="0"/>
+                <a:cs typeface="Times New Roman" panose="02020603050405020304" pitchFamily="18" charset="0"/>
+              </a:rPr>
+              <a:t>/</a:t>
+            </a:r>
+            <a:r>
+              <a:rPr lang="ru-RU" sz="2000" dirty="0" err="1">
+                <a:latin typeface="Times New Roman" panose="02020603050405020304" pitchFamily="18" charset="0"/>
+                <a:cs typeface="Times New Roman" panose="02020603050405020304" pitchFamily="18" charset="0"/>
+              </a:rPr>
+              <a:t>cc</a:t>
+            </a:r>
+            <a:r>
+              <a:rPr lang="ru-RU" sz="2000" dirty="0">
+                <a:latin typeface="Times New Roman" panose="02020603050405020304" pitchFamily="18" charset="0"/>
+                <a:cs typeface="Times New Roman" panose="02020603050405020304" pitchFamily="18" charset="0"/>
+              </a:rPr>
+              <a:t>) — "логика" модуля. Здесь пишется сам код функций. </a:t>
+            </a:r>
+          </a:p>
+          <a:p>
+            <a:pPr marL="342900" indent="-342900">
+              <a:buFont typeface="Arial" panose="020B0604020202020204" pitchFamily="34" charset="0"/>
+              <a:buChar char="•"/>
+            </a:pPr>
+            <a:endParaRPr lang="ru-RU" sz="2000" dirty="0">
+              <a:latin typeface="Times New Roman" panose="02020603050405020304" pitchFamily="18" charset="0"/>
+              <a:cs typeface="Times New Roman" panose="02020603050405020304" pitchFamily="18" charset="0"/>
+            </a:endParaRPr>
+          </a:p>
+          <a:p>
+            <a:r>
+              <a:rPr lang="ru-RU" sz="2000" dirty="0">
+                <a:latin typeface="Times New Roman" panose="02020603050405020304" pitchFamily="18" charset="0"/>
+                <a:cs typeface="Times New Roman" panose="02020603050405020304" pitchFamily="18" charset="0"/>
+              </a:rPr>
+              <a:t>В интерпретируемых языках (например, Python) каждый файл `.</a:t>
+            </a:r>
+            <a:r>
+              <a:rPr lang="ru-RU" sz="2000" dirty="0" err="1">
+                <a:latin typeface="Times New Roman" panose="02020603050405020304" pitchFamily="18" charset="0"/>
+                <a:cs typeface="Times New Roman" panose="02020603050405020304" pitchFamily="18" charset="0"/>
+              </a:rPr>
+              <a:t>py</a:t>
+            </a:r>
+            <a:r>
+              <a:rPr lang="ru-RU" sz="2000" dirty="0">
+                <a:latin typeface="Times New Roman" panose="02020603050405020304" pitchFamily="18" charset="0"/>
+                <a:cs typeface="Times New Roman" panose="02020603050405020304" pitchFamily="18" charset="0"/>
+              </a:rPr>
+              <a:t>` автоматически является модулем. </a:t>
+            </a:r>
+          </a:p>
+          <a:p>
+            <a:pPr marL="342900" indent="-342900">
+              <a:buFont typeface="Arial" panose="020B0604020202020204" pitchFamily="34" charset="0"/>
+              <a:buChar char="•"/>
+            </a:pPr>
+            <a:r>
+              <a:rPr lang="ru-RU" sz="2000" dirty="0">
+                <a:latin typeface="Times New Roman" panose="02020603050405020304" pitchFamily="18" charset="0"/>
+                <a:cs typeface="Times New Roman" panose="02020603050405020304" pitchFamily="18" charset="0"/>
+              </a:rPr>
+              <a:t>Чтобы использовать код из файла logic.py в файле main.py, мы пишем </a:t>
+            </a:r>
+            <a:r>
+              <a:rPr lang="ru-RU" sz="2000" dirty="0" err="1">
+                <a:latin typeface="Times New Roman" panose="02020603050405020304" pitchFamily="18" charset="0"/>
+                <a:cs typeface="Times New Roman" panose="02020603050405020304" pitchFamily="18" charset="0"/>
+              </a:rPr>
+              <a:t>import</a:t>
+            </a:r>
+            <a:r>
+              <a:rPr lang="ru-RU" sz="2000" dirty="0">
+                <a:latin typeface="Times New Roman" panose="02020603050405020304" pitchFamily="18" charset="0"/>
+                <a:cs typeface="Times New Roman" panose="02020603050405020304" pitchFamily="18" charset="0"/>
+              </a:rPr>
+              <a:t> </a:t>
+            </a:r>
+            <a:r>
+              <a:rPr lang="ru-RU" sz="2000" dirty="0" err="1">
+                <a:latin typeface="Times New Roman" panose="02020603050405020304" pitchFamily="18" charset="0"/>
+                <a:cs typeface="Times New Roman" panose="02020603050405020304" pitchFamily="18" charset="0"/>
+              </a:rPr>
+              <a:t>logic</a:t>
+            </a:r>
+            <a:r>
+              <a:rPr lang="ru-RU" sz="2000" dirty="0">
+                <a:latin typeface="Times New Roman" panose="02020603050405020304" pitchFamily="18" charset="0"/>
+                <a:cs typeface="Times New Roman" panose="02020603050405020304" pitchFamily="18" charset="0"/>
+              </a:rPr>
+              <a:t>. </a:t>
+            </a:r>
+          </a:p>
+          <a:p>
+            <a:pPr marL="342900" indent="-342900">
+              <a:buFont typeface="Arial" panose="020B0604020202020204" pitchFamily="34" charset="0"/>
+              <a:buChar char="•"/>
+            </a:pPr>
+            <a:r>
+              <a:rPr lang="ru-RU" sz="2000" dirty="0">
+                <a:latin typeface="Times New Roman" panose="02020603050405020304" pitchFamily="18" charset="0"/>
+                <a:cs typeface="Times New Roman" panose="02020603050405020304" pitchFamily="18" charset="0"/>
+              </a:rPr>
+              <a:t>Интерпретатор находит файл, исполняет его и дает доступ к его объектам через пространство имен. </a:t>
+            </a:r>
+          </a:p>
+        </p:txBody>
+      </p:sp>
+      <p:sp>
+        <p:nvSpPr>
+          <p:cNvPr id="9" name="TextBox 8">
+            <a:extLst>
+              <a:ext uri="{FF2B5EF4-FFF2-40B4-BE49-F238E27FC236}">
+                <a16:creationId xmlns:a16="http://schemas.microsoft.com/office/drawing/2014/main" id="{4DD172CE-9B46-4543-A1BC-03C0EA39A5E9}"/>
+              </a:ext>
+            </a:extLst>
+          </p:cNvPr>
+          <p:cNvSpPr txBox="1"/>
+          <p:nvPr/>
+        </p:nvSpPr>
+        <p:spPr>
+          <a:xfrm>
+            <a:off x="142593" y="6361683"/>
+            <a:ext cx="8847498" cy="369332"/>
+          </a:xfrm>
+          <a:prstGeom prst="rect">
+            <a:avLst/>
+          </a:prstGeom>
+          <a:noFill/>
+        </p:spPr>
+        <p:txBody>
+          <a:bodyPr wrap="square">
+            <a:spAutoFit/>
+          </a:bodyPr>
+          <a:lstStyle/>
+          <a:p>
+            <a:r>
+              <a:rPr lang="en-US" dirty="0">
+                <a:latin typeface="Times New Roman" panose="02020603050405020304" pitchFamily="18" charset="0"/>
+                <a:cs typeface="Times New Roman" panose="02020603050405020304" pitchFamily="18" charset="0"/>
+              </a:rPr>
+              <a:t>*</a:t>
+            </a:r>
+            <a:r>
+              <a:rPr lang="ru-RU" dirty="0">
+                <a:latin typeface="Times New Roman" panose="02020603050405020304" pitchFamily="18" charset="0"/>
+                <a:cs typeface="Times New Roman" panose="02020603050405020304" pitchFamily="18" charset="0"/>
+              </a:rPr>
+              <a:t>Код ядра </a:t>
+            </a:r>
+            <a:r>
+              <a:rPr lang="en-US" dirty="0">
+                <a:latin typeface="Times New Roman" panose="02020603050405020304" pitchFamily="18" charset="0"/>
+                <a:cs typeface="Times New Roman" panose="02020603050405020304" pitchFamily="18" charset="0"/>
+              </a:rPr>
+              <a:t>Linux </a:t>
+            </a:r>
+            <a:r>
+              <a:rPr lang="ru-RU" dirty="0">
+                <a:latin typeface="Times New Roman" panose="02020603050405020304" pitchFamily="18" charset="0"/>
+                <a:cs typeface="Times New Roman" panose="02020603050405020304" pitchFamily="18" charset="0"/>
+              </a:rPr>
+              <a:t>на 2017 год содержал около 18кк (18 373 471) строк кода </a:t>
+            </a:r>
+          </a:p>
+        </p:txBody>
+      </p:sp>
+    </p:spTree>
+    <p:extLst>
+      <p:ext uri="{BB962C8B-B14F-4D97-AF65-F5344CB8AC3E}">
+        <p14:creationId xmlns:p14="http://schemas.microsoft.com/office/powerpoint/2010/main" val="1018937428"/>
+      </p:ext>
+    </p:extLst>
+  </p:cSld>
+  <p:clrMapOvr>
+    <a:masterClrMapping/>
+  </p:clrMapOvr>
+</p:sld>
+</file>
+
+<file path=ppt/slides/slide20.xml><?xml version="1.0" encoding="utf-8"?>
 <p:sld xmlns:a="http://schemas.openxmlformats.org/drawingml/2006/main" xmlns:r="http://schemas.openxmlformats.org/officeDocument/2006/relationships" xmlns:p="http://schemas.openxmlformats.org/presentationml/2006/main">
   <p:cSld>
     <p:spTree>
@@ -8998,385 +10218,6 @@
     <p:extLst>
       <p:ext uri="{BB962C8B-B14F-4D97-AF65-F5344CB8AC3E}">
         <p14:creationId xmlns:p14="http://schemas.microsoft.com/office/powerpoint/2010/main" val="244768081"/>
-      </p:ext>
-    </p:extLst>
-  </p:cSld>
-  <p:clrMapOvr>
-    <a:masterClrMapping/>
-  </p:clrMapOvr>
-</p:sld>
-</file>
-
-<file path=ppt/slides/slide2.xml><?xml version="1.0" encoding="utf-8"?>
-<p:sld xmlns:a="http://schemas.openxmlformats.org/drawingml/2006/main" xmlns:r="http://schemas.openxmlformats.org/officeDocument/2006/relationships" xmlns:p="http://schemas.openxmlformats.org/presentationml/2006/main">
-  <p:cSld>
-    <p:spTree>
-      <p:nvGrpSpPr>
-        <p:cNvPr id="1" name=""/>
-        <p:cNvGrpSpPr/>
-        <p:nvPr/>
-      </p:nvGrpSpPr>
-      <p:grpSpPr>
-        <a:xfrm>
-          <a:off x="0" y="0"/>
-          <a:ext cx="0" cy="0"/>
-          <a:chOff x="0" y="0"/>
-          <a:chExt cx="0" cy="0"/>
-        </a:xfrm>
-      </p:grpSpPr>
-      <p:sp>
-        <p:nvSpPr>
-          <p:cNvPr id="5" name="Заголовок 2">
-            <a:extLst>
-              <a:ext uri="{FF2B5EF4-FFF2-40B4-BE49-F238E27FC236}">
-                <a16:creationId xmlns:a16="http://schemas.microsoft.com/office/drawing/2014/main" id="{1E627AF0-30EB-4DDF-ADF3-6C22571D55C0}"/>
-              </a:ext>
-            </a:extLst>
-          </p:cNvPr>
-          <p:cNvSpPr txBox="1">
-            <a:spLocks/>
-          </p:cNvSpPr>
-          <p:nvPr/>
-        </p:nvSpPr>
-        <p:spPr>
-          <a:xfrm>
-            <a:off x="1133140" y="0"/>
-            <a:ext cx="9925717" cy="927688"/>
-          </a:xfrm>
-          <a:prstGeom prst="rect">
-            <a:avLst/>
-          </a:prstGeom>
-        </p:spPr>
-        <p:txBody>
-          <a:bodyPr vert="horz" lIns="91440" tIns="45720" rIns="91440" bIns="45720" rtlCol="0" anchor="b">
-            <a:normAutofit/>
-          </a:bodyPr>
-          <a:lstStyle>
-            <a:lvl1pPr algn="ctr" defTabSz="914400" rtl="0" eaLnBrk="1" latinLnBrk="0" hangingPunct="1">
-              <a:lnSpc>
-                <a:spcPct val="90000"/>
-              </a:lnSpc>
-              <a:spcBef>
-                <a:spcPct val="0"/>
-              </a:spcBef>
-              <a:buNone/>
-              <a:defRPr sz="6000" kern="1200">
-                <a:solidFill>
-                  <a:schemeClr val="tx1"/>
-                </a:solidFill>
-                <a:latin typeface="+mj-lt"/>
-                <a:ea typeface="+mj-ea"/>
-                <a:cs typeface="+mj-cs"/>
-              </a:defRPr>
-            </a:lvl1pPr>
-          </a:lstStyle>
-          <a:p>
-            <a:r>
-              <a:rPr lang="ru-RU" dirty="0" err="1">
-                <a:latin typeface="Times New Roman" panose="02020603050405020304" pitchFamily="18" charset="0"/>
-                <a:cs typeface="Times New Roman" panose="02020603050405020304" pitchFamily="18" charset="0"/>
-              </a:rPr>
-              <a:t>Многофайловый</a:t>
-            </a:r>
-            <a:r>
-              <a:rPr lang="ru-RU" dirty="0">
-                <a:latin typeface="Times New Roman" panose="02020603050405020304" pitchFamily="18" charset="0"/>
-                <a:cs typeface="Times New Roman" panose="02020603050405020304" pitchFamily="18" charset="0"/>
-              </a:rPr>
-              <a:t> проект</a:t>
-            </a:r>
-            <a:endParaRPr lang="en-US" dirty="0">
-              <a:latin typeface="Times New Roman" panose="02020603050405020304" pitchFamily="18" charset="0"/>
-              <a:cs typeface="Times New Roman" panose="02020603050405020304" pitchFamily="18" charset="0"/>
-            </a:endParaRPr>
-          </a:p>
-        </p:txBody>
-      </p:sp>
-      <p:sp>
-        <p:nvSpPr>
-          <p:cNvPr id="8" name="TextBox 7">
-            <a:extLst>
-              <a:ext uri="{FF2B5EF4-FFF2-40B4-BE49-F238E27FC236}">
-                <a16:creationId xmlns:a16="http://schemas.microsoft.com/office/drawing/2014/main" id="{A98EACA5-512A-4693-A1DF-4D2D060E9510}"/>
-              </a:ext>
-            </a:extLst>
-          </p:cNvPr>
-          <p:cNvSpPr txBox="1"/>
-          <p:nvPr/>
-        </p:nvSpPr>
-        <p:spPr>
-          <a:xfrm>
-            <a:off x="518096" y="1327985"/>
-            <a:ext cx="11391194" cy="4401205"/>
-          </a:xfrm>
-          <a:prstGeom prst="rect">
-            <a:avLst/>
-          </a:prstGeom>
-          <a:noFill/>
-        </p:spPr>
-        <p:txBody>
-          <a:bodyPr wrap="square">
-            <a:spAutoFit/>
-          </a:bodyPr>
-          <a:lstStyle/>
-          <a:p>
-            <a:r>
-              <a:rPr lang="ru-RU" sz="2000" b="1" dirty="0" err="1">
-                <a:latin typeface="Times New Roman" panose="02020603050405020304" pitchFamily="18" charset="0"/>
-                <a:cs typeface="Times New Roman" panose="02020603050405020304" pitchFamily="18" charset="0"/>
-              </a:rPr>
-              <a:t>Многофайловый</a:t>
-            </a:r>
-            <a:r>
-              <a:rPr lang="ru-RU" sz="2000" b="1" dirty="0">
-                <a:latin typeface="Times New Roman" panose="02020603050405020304" pitchFamily="18" charset="0"/>
-                <a:cs typeface="Times New Roman" panose="02020603050405020304" pitchFamily="18" charset="0"/>
-              </a:rPr>
-              <a:t> проект</a:t>
-            </a:r>
-            <a:r>
-              <a:rPr lang="ru-RU" sz="2000" dirty="0">
-                <a:latin typeface="Times New Roman" panose="02020603050405020304" pitchFamily="18" charset="0"/>
-                <a:cs typeface="Times New Roman" panose="02020603050405020304" pitchFamily="18" charset="0"/>
-              </a:rPr>
-              <a:t> — это подход к организации исходного кода, при котором программа разделяется на несколько отдельных файлов. С точки зрения структуры и процесса сборки, это позволяет логически изолировать компоненты, ускорить компиляцию и упростить совместную разработку. </a:t>
-            </a:r>
-          </a:p>
-          <a:p>
-            <a:endParaRPr lang="ru-RU" sz="2000" dirty="0">
-              <a:latin typeface="Times New Roman" panose="02020603050405020304" pitchFamily="18" charset="0"/>
-              <a:cs typeface="Times New Roman" panose="02020603050405020304" pitchFamily="18" charset="0"/>
-            </a:endParaRPr>
-          </a:p>
-          <a:p>
-            <a:r>
-              <a:rPr lang="ru-RU" sz="2000" dirty="0">
-                <a:latin typeface="Times New Roman" panose="02020603050405020304" pitchFamily="18" charset="0"/>
-                <a:cs typeface="Times New Roman" panose="02020603050405020304" pitchFamily="18" charset="0"/>
-              </a:rPr>
-              <a:t>В компилируемых языках (например, Си) </a:t>
-            </a:r>
-            <a:r>
-              <a:rPr lang="ru-RU" sz="2000" dirty="0" err="1">
-                <a:latin typeface="Times New Roman" panose="02020603050405020304" pitchFamily="18" charset="0"/>
-                <a:cs typeface="Times New Roman" panose="02020603050405020304" pitchFamily="18" charset="0"/>
-              </a:rPr>
-              <a:t>многофайловость</a:t>
-            </a:r>
-            <a:r>
-              <a:rPr lang="ru-RU" sz="2000" dirty="0">
-                <a:latin typeface="Times New Roman" panose="02020603050405020304" pitchFamily="18" charset="0"/>
-                <a:cs typeface="Times New Roman" panose="02020603050405020304" pitchFamily="18" charset="0"/>
-              </a:rPr>
-              <a:t> обычно реализуется через разделение на:</a:t>
-            </a:r>
-          </a:p>
-          <a:p>
-            <a:pPr marL="342900" indent="-342900">
-              <a:buFont typeface="Arial" panose="020B0604020202020204" pitchFamily="34" charset="0"/>
-              <a:buChar char="•"/>
-            </a:pPr>
-            <a:r>
-              <a:rPr lang="ru-RU" sz="2000" dirty="0">
-                <a:latin typeface="Times New Roman" panose="02020603050405020304" pitchFamily="18" charset="0"/>
-                <a:cs typeface="Times New Roman" panose="02020603050405020304" pitchFamily="18" charset="0"/>
-              </a:rPr>
-              <a:t>Заголовочные файлы (.h) — "интерфейс" модуля. Здесь мы пишем прототипы функций и объявляем структуры, чтобы другие части программы знали, как с ними взаимодействовать.             </a:t>
-            </a:r>
-          </a:p>
-          <a:p>
-            <a:pPr marL="342900" indent="-342900">
-              <a:buFont typeface="Arial" panose="020B0604020202020204" pitchFamily="34" charset="0"/>
-              <a:buChar char="•"/>
-            </a:pPr>
-            <a:r>
-              <a:rPr lang="ru-RU" sz="2000" dirty="0">
-                <a:latin typeface="Times New Roman" panose="02020603050405020304" pitchFamily="18" charset="0"/>
-                <a:cs typeface="Times New Roman" panose="02020603050405020304" pitchFamily="18" charset="0"/>
-              </a:rPr>
-              <a:t>Файлы с исходным кодом (реализации) (.c/</a:t>
-            </a:r>
-            <a:r>
-              <a:rPr lang="ru-RU" sz="2000" dirty="0" err="1">
-                <a:latin typeface="Times New Roman" panose="02020603050405020304" pitchFamily="18" charset="0"/>
-                <a:cs typeface="Times New Roman" panose="02020603050405020304" pitchFamily="18" charset="0"/>
-              </a:rPr>
-              <a:t>cpp</a:t>
-            </a:r>
-            <a:r>
-              <a:rPr lang="ru-RU" sz="2000" dirty="0">
-                <a:latin typeface="Times New Roman" panose="02020603050405020304" pitchFamily="18" charset="0"/>
-                <a:cs typeface="Times New Roman" panose="02020603050405020304" pitchFamily="18" charset="0"/>
-              </a:rPr>
-              <a:t>/</a:t>
-            </a:r>
-            <a:r>
-              <a:rPr lang="ru-RU" sz="2000" dirty="0" err="1">
-                <a:latin typeface="Times New Roman" panose="02020603050405020304" pitchFamily="18" charset="0"/>
-                <a:cs typeface="Times New Roman" panose="02020603050405020304" pitchFamily="18" charset="0"/>
-              </a:rPr>
-              <a:t>cc</a:t>
-            </a:r>
-            <a:r>
-              <a:rPr lang="ru-RU" sz="2000" dirty="0">
-                <a:latin typeface="Times New Roman" panose="02020603050405020304" pitchFamily="18" charset="0"/>
-                <a:cs typeface="Times New Roman" panose="02020603050405020304" pitchFamily="18" charset="0"/>
-              </a:rPr>
-              <a:t>) — "логика" модуля. Здесь пишется сам код функций. </a:t>
-            </a:r>
-          </a:p>
-          <a:p>
-            <a:pPr marL="342900" indent="-342900">
-              <a:buFont typeface="Arial" panose="020B0604020202020204" pitchFamily="34" charset="0"/>
-              <a:buChar char="•"/>
-            </a:pPr>
-            <a:endParaRPr lang="ru-RU" sz="2000" dirty="0">
-              <a:latin typeface="Times New Roman" panose="02020603050405020304" pitchFamily="18" charset="0"/>
-              <a:cs typeface="Times New Roman" panose="02020603050405020304" pitchFamily="18" charset="0"/>
-            </a:endParaRPr>
-          </a:p>
-          <a:p>
-            <a:r>
-              <a:rPr lang="ru-RU" sz="2000" dirty="0">
-                <a:latin typeface="Times New Roman" panose="02020603050405020304" pitchFamily="18" charset="0"/>
-                <a:cs typeface="Times New Roman" panose="02020603050405020304" pitchFamily="18" charset="0"/>
-              </a:rPr>
-              <a:t>В интерпретируемых языках (например, Python) каждый файл `.</a:t>
-            </a:r>
-            <a:r>
-              <a:rPr lang="ru-RU" sz="2000" dirty="0" err="1">
-                <a:latin typeface="Times New Roman" panose="02020603050405020304" pitchFamily="18" charset="0"/>
-                <a:cs typeface="Times New Roman" panose="02020603050405020304" pitchFamily="18" charset="0"/>
-              </a:rPr>
-              <a:t>py</a:t>
-            </a:r>
-            <a:r>
-              <a:rPr lang="ru-RU" sz="2000" dirty="0">
-                <a:latin typeface="Times New Roman" panose="02020603050405020304" pitchFamily="18" charset="0"/>
-                <a:cs typeface="Times New Roman" panose="02020603050405020304" pitchFamily="18" charset="0"/>
-              </a:rPr>
-              <a:t>` автоматически является модулем. </a:t>
-            </a:r>
-          </a:p>
-          <a:p>
-            <a:pPr marL="342900" indent="-342900">
-              <a:buFont typeface="Arial" panose="020B0604020202020204" pitchFamily="34" charset="0"/>
-              <a:buChar char="•"/>
-            </a:pPr>
-            <a:r>
-              <a:rPr lang="ru-RU" sz="2000" dirty="0">
-                <a:latin typeface="Times New Roman" panose="02020603050405020304" pitchFamily="18" charset="0"/>
-                <a:cs typeface="Times New Roman" panose="02020603050405020304" pitchFamily="18" charset="0"/>
-              </a:rPr>
-              <a:t>Чтобы использовать код из файла logic.py в файле main.py, мы пишем </a:t>
-            </a:r>
-            <a:r>
-              <a:rPr lang="ru-RU" sz="2000" dirty="0" err="1">
-                <a:latin typeface="Times New Roman" panose="02020603050405020304" pitchFamily="18" charset="0"/>
-                <a:cs typeface="Times New Roman" panose="02020603050405020304" pitchFamily="18" charset="0"/>
-              </a:rPr>
-              <a:t>import</a:t>
-            </a:r>
-            <a:r>
-              <a:rPr lang="ru-RU" sz="2000" dirty="0">
-                <a:latin typeface="Times New Roman" panose="02020603050405020304" pitchFamily="18" charset="0"/>
-                <a:cs typeface="Times New Roman" panose="02020603050405020304" pitchFamily="18" charset="0"/>
-              </a:rPr>
-              <a:t> </a:t>
-            </a:r>
-            <a:r>
-              <a:rPr lang="ru-RU" sz="2000" dirty="0" err="1">
-                <a:latin typeface="Times New Roman" panose="02020603050405020304" pitchFamily="18" charset="0"/>
-                <a:cs typeface="Times New Roman" panose="02020603050405020304" pitchFamily="18" charset="0"/>
-              </a:rPr>
-              <a:t>logic</a:t>
-            </a:r>
-            <a:r>
-              <a:rPr lang="ru-RU" sz="2000" dirty="0">
-                <a:latin typeface="Times New Roman" panose="02020603050405020304" pitchFamily="18" charset="0"/>
-                <a:cs typeface="Times New Roman" panose="02020603050405020304" pitchFamily="18" charset="0"/>
-              </a:rPr>
-              <a:t>. </a:t>
-            </a:r>
-          </a:p>
-          <a:p>
-            <a:pPr marL="342900" indent="-342900">
-              <a:buFont typeface="Arial" panose="020B0604020202020204" pitchFamily="34" charset="0"/>
-              <a:buChar char="•"/>
-            </a:pPr>
-            <a:r>
-              <a:rPr lang="ru-RU" sz="2000" dirty="0">
-                <a:latin typeface="Times New Roman" panose="02020603050405020304" pitchFamily="18" charset="0"/>
-                <a:cs typeface="Times New Roman" panose="02020603050405020304" pitchFamily="18" charset="0"/>
-              </a:rPr>
-              <a:t>Интерпретатор находит файл, исполняет его и дает доступ к его объектам через пространство имен. </a:t>
-            </a:r>
-          </a:p>
-        </p:txBody>
-      </p:sp>
-      <p:sp>
-        <p:nvSpPr>
-          <p:cNvPr id="9" name="TextBox 8">
-            <a:extLst>
-              <a:ext uri="{FF2B5EF4-FFF2-40B4-BE49-F238E27FC236}">
-                <a16:creationId xmlns:a16="http://schemas.microsoft.com/office/drawing/2014/main" id="{4DD172CE-9B46-4543-A1BC-03C0EA39A5E9}"/>
-              </a:ext>
-            </a:extLst>
-          </p:cNvPr>
-          <p:cNvSpPr txBox="1"/>
-          <p:nvPr/>
-        </p:nvSpPr>
-        <p:spPr>
-          <a:xfrm>
-            <a:off x="142593" y="6361683"/>
-            <a:ext cx="8847498" cy="369332"/>
-          </a:xfrm>
-          <a:prstGeom prst="rect">
-            <a:avLst/>
-          </a:prstGeom>
-          <a:noFill/>
-        </p:spPr>
-        <p:txBody>
-          <a:bodyPr wrap="square">
-            <a:spAutoFit/>
-          </a:bodyPr>
-          <a:lstStyle/>
-          <a:p>
-            <a:r>
-              <a:rPr lang="en-US" dirty="0">
-                <a:latin typeface="Times New Roman" panose="02020603050405020304" pitchFamily="18" charset="0"/>
-                <a:cs typeface="Times New Roman" panose="02020603050405020304" pitchFamily="18" charset="0"/>
-              </a:rPr>
-              <a:t>*</a:t>
-            </a:r>
-            <a:r>
-              <a:rPr lang="ru-RU" dirty="0">
-                <a:latin typeface="Times New Roman" panose="02020603050405020304" pitchFamily="18" charset="0"/>
-                <a:cs typeface="Times New Roman" panose="02020603050405020304" pitchFamily="18" charset="0"/>
-              </a:rPr>
-              <a:t>Код ядра </a:t>
-            </a:r>
-            <a:r>
-              <a:rPr lang="en-US" dirty="0">
-                <a:latin typeface="Times New Roman" panose="02020603050405020304" pitchFamily="18" charset="0"/>
-                <a:cs typeface="Times New Roman" panose="02020603050405020304" pitchFamily="18" charset="0"/>
-              </a:rPr>
-              <a:t>Linux </a:t>
-            </a:r>
-            <a:r>
-              <a:rPr lang="ru-RU" dirty="0">
-                <a:latin typeface="Times New Roman" panose="02020603050405020304" pitchFamily="18" charset="0"/>
-                <a:cs typeface="Times New Roman" panose="02020603050405020304" pitchFamily="18" charset="0"/>
-              </a:rPr>
-              <a:t>на 2017 год содержал около 18кк (18 373 471) строк кода </a:t>
-            </a:r>
-          </a:p>
-        </p:txBody>
-      </p:sp>
-    </p:spTree>
-    <p:extLst>
-      <p:ext uri="{BB962C8B-B14F-4D97-AF65-F5344CB8AC3E}">
-        <p14:creationId xmlns:p14="http://schemas.microsoft.com/office/powerpoint/2010/main" val="1018937428"/>
       </p:ext>
     </p:extLst>
   </p:cSld>
@@ -9740,6 +10581,216 @@
       </p:grpSpPr>
       <p:sp>
         <p:nvSpPr>
+          <p:cNvPr id="19" name="AutoShape 2" descr="Mobile Banking PNG Transparent Images Free Download | Vector Files | Pngtree">
+            <a:extLst>
+              <a:ext uri="{FF2B5EF4-FFF2-40B4-BE49-F238E27FC236}">
+                <a16:creationId xmlns:a16="http://schemas.microsoft.com/office/drawing/2014/main" id="{0018DD91-8E7D-438E-A58E-8198B398DB27}"/>
+              </a:ext>
+            </a:extLst>
+          </p:cNvPr>
+          <p:cNvSpPr>
+            <a:spLocks noChangeAspect="1" noChangeArrowheads="1"/>
+          </p:cNvSpPr>
+          <p:nvPr/>
+        </p:nvSpPr>
+        <p:spPr bwMode="auto">
+          <a:xfrm>
+            <a:off x="5943600" y="3276600"/>
+            <a:ext cx="304800" cy="304800"/>
+          </a:xfrm>
+          <a:prstGeom prst="rect">
+            <a:avLst/>
+          </a:prstGeom>
+          <a:noFill/>
+          <a:extLst>
+            <a:ext uri="{909E8E84-426E-40DD-AFC4-6F175D3DCCD1}">
+              <a14:hiddenFill xmlns:a14="http://schemas.microsoft.com/office/drawing/2010/main">
+                <a:solidFill>
+                  <a:srgbClr val="FFFFFF"/>
+                </a:solidFill>
+              </a14:hiddenFill>
+            </a:ext>
+          </a:extLst>
+        </p:spPr>
+        <p:txBody>
+          <a:bodyPr vert="horz" wrap="square" lIns="91440" tIns="45720" rIns="91440" bIns="45720" numCol="1" anchor="t" anchorCtr="0" compatLnSpc="1">
+            <a:prstTxWarp prst="textNoShape">
+              <a:avLst/>
+            </a:prstTxWarp>
+          </a:bodyPr>
+          <a:lstStyle/>
+          <a:p>
+            <a:endParaRPr lang="ru-RU"/>
+          </a:p>
+        </p:txBody>
+      </p:sp>
+      <p:pic>
+        <p:nvPicPr>
+          <p:cNvPr id="3" name="Рисунок 2">
+            <a:extLst>
+              <a:ext uri="{FF2B5EF4-FFF2-40B4-BE49-F238E27FC236}">
+                <a16:creationId xmlns:a16="http://schemas.microsoft.com/office/drawing/2014/main" id="{FF8B6430-2EC1-406A-8C8F-DED38ADDE27F}"/>
+              </a:ext>
+            </a:extLst>
+          </p:cNvPr>
+          <p:cNvPicPr>
+            <a:picLocks noChangeAspect="1"/>
+          </p:cNvPicPr>
+          <p:nvPr/>
+        </p:nvPicPr>
+        <p:blipFill>
+          <a:blip r:embed="rId3"/>
+          <a:stretch>
+            <a:fillRect/>
+          </a:stretch>
+        </p:blipFill>
+        <p:spPr>
+          <a:xfrm>
+            <a:off x="934824" y="906490"/>
+            <a:ext cx="10017552" cy="5045019"/>
+          </a:xfrm>
+          <a:prstGeom prst="rect">
+            <a:avLst/>
+          </a:prstGeom>
+        </p:spPr>
+      </p:pic>
+    </p:spTree>
+    <p:extLst>
+      <p:ext uri="{BB962C8B-B14F-4D97-AF65-F5344CB8AC3E}">
+        <p14:creationId xmlns:p14="http://schemas.microsoft.com/office/powerpoint/2010/main" val="2460219239"/>
+      </p:ext>
+    </p:extLst>
+  </p:cSld>
+  <p:clrMapOvr>
+    <a:masterClrMapping/>
+  </p:clrMapOvr>
+</p:sld>
+</file>
+
+<file path=ppt/slides/slide5.xml><?xml version="1.0" encoding="utf-8"?>
+<p:sld xmlns:a="http://schemas.openxmlformats.org/drawingml/2006/main" xmlns:r="http://schemas.openxmlformats.org/officeDocument/2006/relationships" xmlns:p="http://schemas.openxmlformats.org/presentationml/2006/main">
+  <p:cSld>
+    <p:spTree>
+      <p:nvGrpSpPr>
+        <p:cNvPr id="1" name=""/>
+        <p:cNvGrpSpPr/>
+        <p:nvPr/>
+      </p:nvGrpSpPr>
+      <p:grpSpPr>
+        <a:xfrm>
+          <a:off x="0" y="0"/>
+          <a:ext cx="0" cy="0"/>
+          <a:chOff x="0" y="0"/>
+          <a:chExt cx="0" cy="0"/>
+        </a:xfrm>
+      </p:grpSpPr>
+      <p:sp>
+        <p:nvSpPr>
+          <p:cNvPr id="19" name="AutoShape 2" descr="Mobile Banking PNG Transparent Images Free Download | Vector Files | Pngtree">
+            <a:extLst>
+              <a:ext uri="{FF2B5EF4-FFF2-40B4-BE49-F238E27FC236}">
+                <a16:creationId xmlns:a16="http://schemas.microsoft.com/office/drawing/2014/main" id="{0018DD91-8E7D-438E-A58E-8198B398DB27}"/>
+              </a:ext>
+            </a:extLst>
+          </p:cNvPr>
+          <p:cNvSpPr>
+            <a:spLocks noChangeAspect="1" noChangeArrowheads="1"/>
+          </p:cNvSpPr>
+          <p:nvPr/>
+        </p:nvSpPr>
+        <p:spPr bwMode="auto">
+          <a:xfrm>
+            <a:off x="5943600" y="3276600"/>
+            <a:ext cx="304800" cy="304800"/>
+          </a:xfrm>
+          <a:prstGeom prst="rect">
+            <a:avLst/>
+          </a:prstGeom>
+          <a:noFill/>
+          <a:extLst>
+            <a:ext uri="{909E8E84-426E-40DD-AFC4-6F175D3DCCD1}">
+              <a14:hiddenFill xmlns:a14="http://schemas.microsoft.com/office/drawing/2010/main">
+                <a:solidFill>
+                  <a:srgbClr val="FFFFFF"/>
+                </a:solidFill>
+              </a14:hiddenFill>
+            </a:ext>
+          </a:extLst>
+        </p:spPr>
+        <p:txBody>
+          <a:bodyPr vert="horz" wrap="square" lIns="91440" tIns="45720" rIns="91440" bIns="45720" numCol="1" anchor="t" anchorCtr="0" compatLnSpc="1">
+            <a:prstTxWarp prst="textNoShape">
+              <a:avLst/>
+            </a:prstTxWarp>
+          </a:bodyPr>
+          <a:lstStyle/>
+          <a:p>
+            <a:endParaRPr lang="ru-RU"/>
+          </a:p>
+        </p:txBody>
+      </p:sp>
+      <p:pic>
+        <p:nvPicPr>
+          <p:cNvPr id="4" name="Рисунок 3">
+            <a:extLst>
+              <a:ext uri="{FF2B5EF4-FFF2-40B4-BE49-F238E27FC236}">
+                <a16:creationId xmlns:a16="http://schemas.microsoft.com/office/drawing/2014/main" id="{962D5B2C-AFB3-4970-9DFD-30E9CCC88A39}"/>
+              </a:ext>
+            </a:extLst>
+          </p:cNvPr>
+          <p:cNvPicPr>
+            <a:picLocks noChangeAspect="1"/>
+          </p:cNvPicPr>
+          <p:nvPr/>
+        </p:nvPicPr>
+        <p:blipFill>
+          <a:blip r:embed="rId3"/>
+          <a:stretch>
+            <a:fillRect/>
+          </a:stretch>
+        </p:blipFill>
+        <p:spPr>
+          <a:xfrm>
+            <a:off x="1849035" y="178257"/>
+            <a:ext cx="8189130" cy="6501485"/>
+          </a:xfrm>
+          <a:prstGeom prst="rect">
+            <a:avLst/>
+          </a:prstGeom>
+        </p:spPr>
+      </p:pic>
+    </p:spTree>
+    <p:extLst>
+      <p:ext uri="{BB962C8B-B14F-4D97-AF65-F5344CB8AC3E}">
+        <p14:creationId xmlns:p14="http://schemas.microsoft.com/office/powerpoint/2010/main" val="1728160130"/>
+      </p:ext>
+    </p:extLst>
+  </p:cSld>
+  <p:clrMapOvr>
+    <a:masterClrMapping/>
+  </p:clrMapOvr>
+</p:sld>
+</file>
+
+<file path=ppt/slides/slide6.xml><?xml version="1.0" encoding="utf-8"?>
+<p:sld xmlns:a="http://schemas.openxmlformats.org/drawingml/2006/main" xmlns:r="http://schemas.openxmlformats.org/officeDocument/2006/relationships" xmlns:p="http://schemas.openxmlformats.org/presentationml/2006/main">
+  <p:cSld>
+    <p:spTree>
+      <p:nvGrpSpPr>
+        <p:cNvPr id="1" name=""/>
+        <p:cNvGrpSpPr/>
+        <p:nvPr/>
+      </p:nvGrpSpPr>
+      <p:grpSpPr>
+        <a:xfrm>
+          <a:off x="0" y="0"/>
+          <a:ext cx="0" cy="0"/>
+          <a:chOff x="0" y="0"/>
+          <a:chExt cx="0" cy="0"/>
+        </a:xfrm>
+      </p:grpSpPr>
+      <p:sp>
+        <p:nvSpPr>
           <p:cNvPr id="5" name="Заголовок 2">
             <a:extLst>
               <a:ext uri="{FF2B5EF4-FFF2-40B4-BE49-F238E27FC236}">
@@ -10214,7 +11265,7 @@
     </p:spTree>
     <p:extLst>
       <p:ext uri="{BB962C8B-B14F-4D97-AF65-F5344CB8AC3E}">
-        <p14:creationId xmlns:p14="http://schemas.microsoft.com/office/powerpoint/2010/main" val="2460219239"/>
+        <p14:creationId xmlns:p14="http://schemas.microsoft.com/office/powerpoint/2010/main" val="614382259"/>
       </p:ext>
     </p:extLst>
   </p:cSld>
@@ -10224,7 +11275,7 @@
 </p:sld>
 </file>
 
-<file path=ppt/slides/slide5.xml><?xml version="1.0" encoding="utf-8"?>
+<file path=ppt/slides/slide7.xml><?xml version="1.0" encoding="utf-8"?>
 <p:sld xmlns:a="http://schemas.openxmlformats.org/drawingml/2006/main" xmlns:r="http://schemas.openxmlformats.org/officeDocument/2006/relationships" xmlns:p="http://schemas.openxmlformats.org/presentationml/2006/main">
   <p:cSld>
     <p:spTree>
@@ -10683,7 +11734,7 @@
 </p:sld>
 </file>
 
-<file path=ppt/slides/slide6.xml><?xml version="1.0" encoding="utf-8"?>
+<file path=ppt/slides/slide8.xml><?xml version="1.0" encoding="utf-8"?>
 <p:sld xmlns:a="http://schemas.openxmlformats.org/drawingml/2006/main" xmlns:r="http://schemas.openxmlformats.org/officeDocument/2006/relationships" xmlns:p="http://schemas.openxmlformats.org/presentationml/2006/main">
   <p:cSld>
     <p:spTree>
@@ -10803,7 +11854,7 @@
 </p:sld>
 </file>
 
-<file path=ppt/slides/slide7.xml><?xml version="1.0" encoding="utf-8"?>
+<file path=ppt/slides/slide9.xml><?xml version="1.0" encoding="utf-8"?>
 <p:sld xmlns:a="http://schemas.openxmlformats.org/drawingml/2006/main" xmlns:r="http://schemas.openxmlformats.org/officeDocument/2006/relationships" xmlns:p="http://schemas.openxmlformats.org/presentationml/2006/main">
   <p:cSld>
     <p:spTree>
@@ -11178,677 +12229,6 @@
     <p:extLst>
       <p:ext uri="{BB962C8B-B14F-4D97-AF65-F5344CB8AC3E}">
         <p14:creationId xmlns:p14="http://schemas.microsoft.com/office/powerpoint/2010/main" val="1209257247"/>
-      </p:ext>
-    </p:extLst>
-  </p:cSld>
-  <p:clrMapOvr>
-    <a:masterClrMapping/>
-  </p:clrMapOvr>
-</p:sld>
-</file>
-
-<file path=ppt/slides/slide8.xml><?xml version="1.0" encoding="utf-8"?>
-<p:sld xmlns:a="http://schemas.openxmlformats.org/drawingml/2006/main" xmlns:r="http://schemas.openxmlformats.org/officeDocument/2006/relationships" xmlns:p="http://schemas.openxmlformats.org/presentationml/2006/main">
-  <p:cSld>
-    <p:spTree>
-      <p:nvGrpSpPr>
-        <p:cNvPr id="1" name=""/>
-        <p:cNvGrpSpPr/>
-        <p:nvPr/>
-      </p:nvGrpSpPr>
-      <p:grpSpPr>
-        <a:xfrm>
-          <a:off x="0" y="0"/>
-          <a:ext cx="0" cy="0"/>
-          <a:chOff x="0" y="0"/>
-          <a:chExt cx="0" cy="0"/>
-        </a:xfrm>
-      </p:grpSpPr>
-      <p:sp>
-        <p:nvSpPr>
-          <p:cNvPr id="5" name="Заголовок 2">
-            <a:extLst>
-              <a:ext uri="{FF2B5EF4-FFF2-40B4-BE49-F238E27FC236}">
-                <a16:creationId xmlns:a16="http://schemas.microsoft.com/office/drawing/2014/main" id="{1E627AF0-30EB-4DDF-ADF3-6C22571D55C0}"/>
-              </a:ext>
-            </a:extLst>
-          </p:cNvPr>
-          <p:cNvSpPr txBox="1">
-            <a:spLocks/>
-          </p:cNvSpPr>
-          <p:nvPr/>
-        </p:nvSpPr>
-        <p:spPr>
-          <a:xfrm>
-            <a:off x="1133141" y="228164"/>
-            <a:ext cx="9925717" cy="927688"/>
-          </a:xfrm>
-          <a:prstGeom prst="rect">
-            <a:avLst/>
-          </a:prstGeom>
-        </p:spPr>
-        <p:txBody>
-          <a:bodyPr vert="horz" lIns="91440" tIns="45720" rIns="91440" bIns="45720" rtlCol="0" anchor="b">
-            <a:normAutofit/>
-          </a:bodyPr>
-          <a:lstStyle>
-            <a:lvl1pPr algn="ctr" defTabSz="914400" rtl="0" eaLnBrk="1" latinLnBrk="0" hangingPunct="1">
-              <a:lnSpc>
-                <a:spcPct val="90000"/>
-              </a:lnSpc>
-              <a:spcBef>
-                <a:spcPct val="0"/>
-              </a:spcBef>
-              <a:buNone/>
-              <a:defRPr sz="6000" kern="1200">
-                <a:solidFill>
-                  <a:schemeClr val="tx1"/>
-                </a:solidFill>
-                <a:latin typeface="+mj-lt"/>
-                <a:ea typeface="+mj-ea"/>
-                <a:cs typeface="+mj-cs"/>
-              </a:defRPr>
-            </a:lvl1pPr>
-          </a:lstStyle>
-          <a:p>
-            <a:r>
-              <a:rPr lang="en-US" dirty="0"/>
-              <a:t>Linker errors</a:t>
-            </a:r>
-          </a:p>
-        </p:txBody>
-      </p:sp>
-      <p:sp>
-        <p:nvSpPr>
-          <p:cNvPr id="8" name="TextBox 7">
-            <a:extLst>
-              <a:ext uri="{FF2B5EF4-FFF2-40B4-BE49-F238E27FC236}">
-                <a16:creationId xmlns:a16="http://schemas.microsoft.com/office/drawing/2014/main" id="{235A5ECC-94BA-4ACD-AD3F-BF9E058F1E5D}"/>
-              </a:ext>
-            </a:extLst>
-          </p:cNvPr>
-          <p:cNvSpPr txBox="1"/>
-          <p:nvPr/>
-        </p:nvSpPr>
-        <p:spPr>
-          <a:xfrm>
-            <a:off x="541698" y="2274838"/>
-            <a:ext cx="11108602" cy="2308324"/>
-          </a:xfrm>
-          <a:prstGeom prst="rect">
-            <a:avLst/>
-          </a:prstGeom>
-          <a:noFill/>
-        </p:spPr>
-        <p:txBody>
-          <a:bodyPr wrap="square">
-            <a:spAutoFit/>
-          </a:bodyPr>
-          <a:lstStyle/>
-          <a:p>
-            <a:pPr marL="285750" indent="-285750">
-              <a:buFont typeface="Arial" panose="020B0604020202020204" pitchFamily="34" charset="0"/>
-              <a:buChar char="•"/>
-            </a:pPr>
-            <a:r>
-              <a:rPr lang="ru-RU" sz="2400" dirty="0">
-                <a:latin typeface="Times New Roman" panose="02020603050405020304" pitchFamily="18" charset="0"/>
-                <a:cs typeface="Times New Roman" panose="02020603050405020304" pitchFamily="18" charset="0"/>
-              </a:rPr>
-              <a:t>Если функции нет в </a:t>
-            </a:r>
-            <a:r>
-              <a:rPr lang="ru-RU" sz="2400" dirty="0" err="1">
-                <a:latin typeface="Times New Roman" panose="02020603050405020304" pitchFamily="18" charset="0"/>
-                <a:cs typeface="Times New Roman" panose="02020603050405020304" pitchFamily="18" charset="0"/>
-              </a:rPr>
-              <a:t>sort.c</a:t>
-            </a:r>
-            <a:r>
-              <a:rPr lang="ru-RU" sz="2400" dirty="0">
-                <a:latin typeface="Times New Roman" panose="02020603050405020304" pitchFamily="18" charset="0"/>
-                <a:cs typeface="Times New Roman" panose="02020603050405020304" pitchFamily="18" charset="0"/>
-              </a:rPr>
-              <a:t>, тогда линковщик выдаст ошибку </a:t>
-            </a:r>
-            <a:r>
-              <a:rPr lang="ru-RU" sz="2400" b="1" dirty="0" err="1">
-                <a:latin typeface="Times New Roman" panose="02020603050405020304" pitchFamily="18" charset="0"/>
-                <a:cs typeface="Times New Roman" panose="02020603050405020304" pitchFamily="18" charset="0"/>
-              </a:rPr>
-              <a:t>undefined</a:t>
-            </a:r>
-            <a:r>
-              <a:rPr lang="ru-RU" sz="2400" b="1" dirty="0">
-                <a:latin typeface="Times New Roman" panose="02020603050405020304" pitchFamily="18" charset="0"/>
-                <a:cs typeface="Times New Roman" panose="02020603050405020304" pitchFamily="18" charset="0"/>
-              </a:rPr>
-              <a:t> </a:t>
-            </a:r>
-            <a:r>
-              <a:rPr lang="ru-RU" sz="2400" b="1" dirty="0" err="1">
-                <a:latin typeface="Times New Roman" panose="02020603050405020304" pitchFamily="18" charset="0"/>
-                <a:cs typeface="Times New Roman" panose="02020603050405020304" pitchFamily="18" charset="0"/>
-              </a:rPr>
-              <a:t>reference</a:t>
-            </a:r>
-            <a:r>
-              <a:rPr lang="ru-RU" sz="2400" b="1" dirty="0">
-                <a:latin typeface="Times New Roman" panose="02020603050405020304" pitchFamily="18" charset="0"/>
-                <a:cs typeface="Times New Roman" panose="02020603050405020304" pitchFamily="18" charset="0"/>
-              </a:rPr>
-              <a:t> </a:t>
-            </a:r>
-            <a:r>
-              <a:rPr lang="ru-RU" sz="2400" b="1" dirty="0" err="1">
-                <a:latin typeface="Times New Roman" panose="02020603050405020304" pitchFamily="18" charset="0"/>
-                <a:cs typeface="Times New Roman" panose="02020603050405020304" pitchFamily="18" charset="0"/>
-              </a:rPr>
-              <a:t>to</a:t>
-            </a:r>
-            <a:r>
-              <a:rPr lang="ru-RU" sz="2400" dirty="0">
-                <a:latin typeface="Times New Roman" panose="02020603050405020304" pitchFamily="18" charset="0"/>
-                <a:cs typeface="Times New Roman" panose="02020603050405020304" pitchFamily="18" charset="0"/>
-              </a:rPr>
-              <a:t> '</a:t>
-            </a:r>
-            <a:r>
-              <a:rPr lang="ru-RU" sz="2400" dirty="0" err="1">
-                <a:latin typeface="Times New Roman" panose="02020603050405020304" pitchFamily="18" charset="0"/>
-                <a:cs typeface="Times New Roman" panose="02020603050405020304" pitchFamily="18" charset="0"/>
-              </a:rPr>
-              <a:t>sort</a:t>
-            </a:r>
-            <a:r>
-              <a:rPr lang="ru-RU" sz="2400" dirty="0">
-                <a:latin typeface="Times New Roman" panose="02020603050405020304" pitchFamily="18" charset="0"/>
-                <a:cs typeface="Times New Roman" panose="02020603050405020304" pitchFamily="18" charset="0"/>
-              </a:rPr>
-              <a:t>' и завершит свою работу, т.к. не смог найти код функции </a:t>
-            </a:r>
-            <a:r>
-              <a:rPr lang="ru-RU" sz="2400" dirty="0" err="1">
-                <a:latin typeface="Times New Roman" panose="02020603050405020304" pitchFamily="18" charset="0"/>
-                <a:cs typeface="Times New Roman" panose="02020603050405020304" pitchFamily="18" charset="0"/>
-              </a:rPr>
-              <a:t>sort</a:t>
-            </a:r>
-            <a:r>
-              <a:rPr lang="ru-RU" sz="2400" dirty="0">
-                <a:latin typeface="Times New Roman" panose="02020603050405020304" pitchFamily="18" charset="0"/>
-                <a:cs typeface="Times New Roman" panose="02020603050405020304" pitchFamily="18" charset="0"/>
-              </a:rPr>
-              <a:t>()    </a:t>
-            </a:r>
-          </a:p>
-          <a:p>
-            <a:pPr marL="285750" indent="-285750">
-              <a:buFont typeface="Arial" panose="020B0604020202020204" pitchFamily="34" charset="0"/>
-              <a:buChar char="•"/>
-            </a:pPr>
-            <a:endParaRPr lang="en-US" sz="2400" dirty="0">
-              <a:latin typeface="Times New Roman" panose="02020603050405020304" pitchFamily="18" charset="0"/>
-              <a:cs typeface="Times New Roman" panose="02020603050405020304" pitchFamily="18" charset="0"/>
-            </a:endParaRPr>
-          </a:p>
-          <a:p>
-            <a:pPr marL="285750" indent="-285750">
-              <a:buFont typeface="Arial" panose="020B0604020202020204" pitchFamily="34" charset="0"/>
-              <a:buChar char="•"/>
-            </a:pPr>
-            <a:r>
-              <a:rPr lang="ru-RU" sz="2400" dirty="0">
-                <a:latin typeface="Times New Roman" panose="02020603050405020304" pitchFamily="18" charset="0"/>
-                <a:cs typeface="Times New Roman" panose="02020603050405020304" pitchFamily="18" charset="0"/>
-              </a:rPr>
-              <a:t>Если определение функции или две глобальных переменных с одним именем встречаются в нескольких объектных файлах, то линковщик также выдаст сообщение об ошибке: </a:t>
-            </a:r>
-            <a:r>
-              <a:rPr lang="ru-RU" sz="2400" b="1" dirty="0" err="1">
-                <a:latin typeface="Times New Roman" panose="02020603050405020304" pitchFamily="18" charset="0"/>
-                <a:cs typeface="Times New Roman" panose="02020603050405020304" pitchFamily="18" charset="0"/>
-              </a:rPr>
-              <a:t>multiple</a:t>
-            </a:r>
-            <a:r>
-              <a:rPr lang="ru-RU" sz="2400" b="1" dirty="0">
-                <a:latin typeface="Times New Roman" panose="02020603050405020304" pitchFamily="18" charset="0"/>
-                <a:cs typeface="Times New Roman" panose="02020603050405020304" pitchFamily="18" charset="0"/>
-              </a:rPr>
-              <a:t> </a:t>
-            </a:r>
-            <a:r>
-              <a:rPr lang="ru-RU" sz="2400" b="1" dirty="0" err="1">
-                <a:latin typeface="Times New Roman" panose="02020603050405020304" pitchFamily="18" charset="0"/>
-                <a:cs typeface="Times New Roman" panose="02020603050405020304" pitchFamily="18" charset="0"/>
-              </a:rPr>
-              <a:t>definition</a:t>
-            </a:r>
-            <a:r>
-              <a:rPr lang="ru-RU" sz="2400" b="1" dirty="0">
-                <a:latin typeface="Times New Roman" panose="02020603050405020304" pitchFamily="18" charset="0"/>
-                <a:cs typeface="Times New Roman" panose="02020603050405020304" pitchFamily="18" charset="0"/>
-              </a:rPr>
-              <a:t> </a:t>
-            </a:r>
-            <a:r>
-              <a:rPr lang="ru-RU" sz="2400" b="1" dirty="0" err="1">
-                <a:latin typeface="Times New Roman" panose="02020603050405020304" pitchFamily="18" charset="0"/>
-                <a:cs typeface="Times New Roman" panose="02020603050405020304" pitchFamily="18" charset="0"/>
-              </a:rPr>
-              <a:t>of</a:t>
-            </a:r>
-            <a:r>
-              <a:rPr lang="ru-RU" sz="2400" dirty="0">
-                <a:latin typeface="Times New Roman" panose="02020603050405020304" pitchFamily="18" charset="0"/>
-                <a:cs typeface="Times New Roman" panose="02020603050405020304" pitchFamily="18" charset="0"/>
-              </a:rPr>
-              <a:t> '</a:t>
-            </a:r>
-            <a:r>
-              <a:rPr lang="ru-RU" sz="2400" dirty="0" err="1">
-                <a:latin typeface="Times New Roman" panose="02020603050405020304" pitchFamily="18" charset="0"/>
-                <a:cs typeface="Times New Roman" panose="02020603050405020304" pitchFamily="18" charset="0"/>
-              </a:rPr>
-              <a:t>sort</a:t>
-            </a:r>
-            <a:r>
-              <a:rPr lang="ru-RU" sz="2400" dirty="0">
-                <a:latin typeface="Times New Roman" panose="02020603050405020304" pitchFamily="18" charset="0"/>
-                <a:cs typeface="Times New Roman" panose="02020603050405020304" pitchFamily="18" charset="0"/>
-              </a:rPr>
-              <a:t>' и завершит работу с ошибкой </a:t>
-            </a:r>
-          </a:p>
-        </p:txBody>
-      </p:sp>
-    </p:spTree>
-    <p:extLst>
-      <p:ext uri="{BB962C8B-B14F-4D97-AF65-F5344CB8AC3E}">
-        <p14:creationId xmlns:p14="http://schemas.microsoft.com/office/powerpoint/2010/main" val="3832565498"/>
-      </p:ext>
-    </p:extLst>
-  </p:cSld>
-  <p:clrMapOvr>
-    <a:masterClrMapping/>
-  </p:clrMapOvr>
-</p:sld>
-</file>
-
-<file path=ppt/slides/slide9.xml><?xml version="1.0" encoding="utf-8"?>
-<p:sld xmlns:a="http://schemas.openxmlformats.org/drawingml/2006/main" xmlns:r="http://schemas.openxmlformats.org/officeDocument/2006/relationships" xmlns:p="http://schemas.openxmlformats.org/presentationml/2006/main">
-  <p:cSld>
-    <p:spTree>
-      <p:nvGrpSpPr>
-        <p:cNvPr id="1" name=""/>
-        <p:cNvGrpSpPr/>
-        <p:nvPr/>
-      </p:nvGrpSpPr>
-      <p:grpSpPr>
-        <a:xfrm>
-          <a:off x="0" y="0"/>
-          <a:ext cx="0" cy="0"/>
-          <a:chOff x="0" y="0"/>
-          <a:chExt cx="0" cy="0"/>
-        </a:xfrm>
-      </p:grpSpPr>
-      <p:sp>
-        <p:nvSpPr>
-          <p:cNvPr id="5" name="Заголовок 2">
-            <a:extLst>
-              <a:ext uri="{FF2B5EF4-FFF2-40B4-BE49-F238E27FC236}">
-                <a16:creationId xmlns:a16="http://schemas.microsoft.com/office/drawing/2014/main" id="{1E627AF0-30EB-4DDF-ADF3-6C22571D55C0}"/>
-              </a:ext>
-            </a:extLst>
-          </p:cNvPr>
-          <p:cNvSpPr txBox="1">
-            <a:spLocks/>
-          </p:cNvSpPr>
-          <p:nvPr/>
-        </p:nvSpPr>
-        <p:spPr>
-          <a:xfrm>
-            <a:off x="1133141" y="289948"/>
-            <a:ext cx="9925717" cy="927688"/>
-          </a:xfrm>
-          <a:prstGeom prst="rect">
-            <a:avLst/>
-          </a:prstGeom>
-        </p:spPr>
-        <p:txBody>
-          <a:bodyPr vert="horz" lIns="91440" tIns="45720" rIns="91440" bIns="45720" rtlCol="0" anchor="b">
-            <a:normAutofit/>
-          </a:bodyPr>
-          <a:lstStyle>
-            <a:lvl1pPr algn="ctr" defTabSz="914400" rtl="0" eaLnBrk="1" latinLnBrk="0" hangingPunct="1">
-              <a:lnSpc>
-                <a:spcPct val="90000"/>
-              </a:lnSpc>
-              <a:spcBef>
-                <a:spcPct val="0"/>
-              </a:spcBef>
-              <a:buNone/>
-              <a:defRPr sz="6000" kern="1200">
-                <a:solidFill>
-                  <a:schemeClr val="tx1"/>
-                </a:solidFill>
-                <a:latin typeface="+mj-lt"/>
-                <a:ea typeface="+mj-ea"/>
-                <a:cs typeface="+mj-cs"/>
-              </a:defRPr>
-            </a:lvl1pPr>
-          </a:lstStyle>
-          <a:p>
-            <a:r>
-              <a:rPr lang="en-US" dirty="0"/>
-              <a:t>Library (</a:t>
-            </a:r>
-            <a:r>
-              <a:rPr lang="ru-RU" dirty="0"/>
-              <a:t>Библиотека)</a:t>
-            </a:r>
-            <a:endParaRPr lang="en-US" dirty="0"/>
-          </a:p>
-        </p:txBody>
-      </p:sp>
-      <p:pic>
-        <p:nvPicPr>
-          <p:cNvPr id="3" name="Рисунок 2">
-            <a:extLst>
-              <a:ext uri="{FF2B5EF4-FFF2-40B4-BE49-F238E27FC236}">
-                <a16:creationId xmlns:a16="http://schemas.microsoft.com/office/drawing/2014/main" id="{FC4D1E33-60E3-459E-9F2F-098110480D9C}"/>
-              </a:ext>
-            </a:extLst>
-          </p:cNvPr>
-          <p:cNvPicPr>
-            <a:picLocks noChangeAspect="1"/>
-          </p:cNvPicPr>
-          <p:nvPr/>
-        </p:nvPicPr>
-        <p:blipFill>
-          <a:blip r:embed="rId3"/>
-          <a:stretch>
-            <a:fillRect/>
-          </a:stretch>
-        </p:blipFill>
-        <p:spPr>
-          <a:xfrm>
-            <a:off x="6423659" y="2978363"/>
-            <a:ext cx="5271990" cy="3505874"/>
-          </a:xfrm>
-          <a:prstGeom prst="rect">
-            <a:avLst/>
-          </a:prstGeom>
-        </p:spPr>
-      </p:pic>
-      <p:sp>
-        <p:nvSpPr>
-          <p:cNvPr id="8" name="TextBox 7">
-            <a:extLst>
-              <a:ext uri="{FF2B5EF4-FFF2-40B4-BE49-F238E27FC236}">
-                <a16:creationId xmlns:a16="http://schemas.microsoft.com/office/drawing/2014/main" id="{A98EACA5-512A-4693-A1DF-4D2D060E9510}"/>
-              </a:ext>
-            </a:extLst>
-          </p:cNvPr>
-          <p:cNvSpPr txBox="1"/>
-          <p:nvPr/>
-        </p:nvSpPr>
-        <p:spPr>
-          <a:xfrm>
-            <a:off x="751439" y="1375101"/>
-            <a:ext cx="11110536" cy="707886"/>
-          </a:xfrm>
-          <a:prstGeom prst="rect">
-            <a:avLst/>
-          </a:prstGeom>
-          <a:noFill/>
-        </p:spPr>
-        <p:txBody>
-          <a:bodyPr wrap="square">
-            <a:spAutoFit/>
-          </a:bodyPr>
-          <a:lstStyle/>
-          <a:p>
-            <a:r>
-              <a:rPr lang="ru-RU" sz="2000" dirty="0">
-                <a:latin typeface="Times New Roman" panose="02020603050405020304" pitchFamily="18" charset="0"/>
-                <a:cs typeface="Times New Roman" panose="02020603050405020304" pitchFamily="18" charset="0"/>
-              </a:rPr>
-              <a:t>Библиотека (от англ. </a:t>
-            </a:r>
-            <a:r>
-              <a:rPr lang="ru-RU" sz="2000" dirty="0" err="1">
-                <a:latin typeface="Times New Roman" panose="02020603050405020304" pitchFamily="18" charset="0"/>
-                <a:cs typeface="Times New Roman" panose="02020603050405020304" pitchFamily="18" charset="0"/>
-              </a:rPr>
-              <a:t>library</a:t>
-            </a:r>
-            <a:r>
-              <a:rPr lang="ru-RU" sz="2000" dirty="0">
-                <a:latin typeface="Times New Roman" panose="02020603050405020304" pitchFamily="18" charset="0"/>
-                <a:cs typeface="Times New Roman" panose="02020603050405020304" pitchFamily="18" charset="0"/>
-              </a:rPr>
-              <a:t>) - это сборник готового кода (функций, объектов), который мы подключаем к своей программе, чтобы не изобретать велосипед. </a:t>
-            </a:r>
-          </a:p>
-        </p:txBody>
-      </p:sp>
-      <p:sp>
-        <p:nvSpPr>
-          <p:cNvPr id="12" name="TextBox 11">
-            <a:extLst>
-              <a:ext uri="{FF2B5EF4-FFF2-40B4-BE49-F238E27FC236}">
-                <a16:creationId xmlns:a16="http://schemas.microsoft.com/office/drawing/2014/main" id="{FEC82242-ADF5-4315-A7EA-151DD95F8A12}"/>
-              </a:ext>
-            </a:extLst>
-          </p:cNvPr>
-          <p:cNvSpPr txBox="1"/>
-          <p:nvPr/>
-        </p:nvSpPr>
-        <p:spPr>
-          <a:xfrm>
-            <a:off x="688063" y="2162040"/>
-            <a:ext cx="5569272" cy="4093428"/>
-          </a:xfrm>
-          <a:prstGeom prst="rect">
-            <a:avLst/>
-          </a:prstGeom>
-          <a:noFill/>
-        </p:spPr>
-        <p:txBody>
-          <a:bodyPr wrap="square">
-            <a:spAutoFit/>
-          </a:bodyPr>
-          <a:lstStyle/>
-          <a:p>
-            <a:r>
-              <a:rPr lang="ru-RU" sz="2000" dirty="0">
-                <a:latin typeface="Times New Roman" panose="02020603050405020304" pitchFamily="18" charset="0"/>
-                <a:cs typeface="Times New Roman" panose="02020603050405020304" pitchFamily="18" charset="0"/>
-              </a:rPr>
-              <a:t>Для интерпретируемых языков (</a:t>
-            </a:r>
-            <a:r>
-              <a:rPr lang="ru-RU" sz="2000" dirty="0" err="1">
-                <a:latin typeface="Times New Roman" panose="02020603050405020304" pitchFamily="18" charset="0"/>
-                <a:cs typeface="Times New Roman" panose="02020603050405020304" pitchFamily="18" charset="0"/>
-              </a:rPr>
-              <a:t>python</a:t>
-            </a:r>
-            <a:r>
-              <a:rPr lang="ru-RU" sz="2000" dirty="0">
-                <a:latin typeface="Times New Roman" panose="02020603050405020304" pitchFamily="18" charset="0"/>
-                <a:cs typeface="Times New Roman" panose="02020603050405020304" pitchFamily="18" charset="0"/>
-              </a:rPr>
-              <a:t> например) библиотека — файл, содержащий либо код на исходном языке (.</a:t>
-            </a:r>
-            <a:r>
-              <a:rPr lang="ru-RU" sz="2000" dirty="0" err="1">
-                <a:latin typeface="Times New Roman" panose="02020603050405020304" pitchFamily="18" charset="0"/>
-                <a:cs typeface="Times New Roman" panose="02020603050405020304" pitchFamily="18" charset="0"/>
-              </a:rPr>
-              <a:t>py</a:t>
-            </a:r>
-            <a:r>
-              <a:rPr lang="ru-RU" sz="2000" dirty="0">
-                <a:latin typeface="Times New Roman" panose="02020603050405020304" pitchFamily="18" charset="0"/>
-                <a:cs typeface="Times New Roman" panose="02020603050405020304" pitchFamily="18" charset="0"/>
-              </a:rPr>
-              <a:t>), либо байт-код для виртуальной машины. Пример библиотеки для Python – </a:t>
-            </a:r>
-            <a:r>
-              <a:rPr lang="ru-RU" sz="2000" dirty="0" err="1">
-                <a:latin typeface="Times New Roman" panose="02020603050405020304" pitchFamily="18" charset="0"/>
-                <a:cs typeface="Times New Roman" panose="02020603050405020304" pitchFamily="18" charset="0"/>
-              </a:rPr>
-              <a:t>Tkinter</a:t>
-            </a:r>
-            <a:endParaRPr lang="en-US" sz="2000" dirty="0">
-              <a:latin typeface="Times New Roman" panose="02020603050405020304" pitchFamily="18" charset="0"/>
-              <a:cs typeface="Times New Roman" panose="02020603050405020304" pitchFamily="18" charset="0"/>
-            </a:endParaRPr>
-          </a:p>
-          <a:p>
-            <a:endParaRPr lang="en-US" sz="2000" dirty="0">
-              <a:latin typeface="Times New Roman" panose="02020603050405020304" pitchFamily="18" charset="0"/>
-              <a:cs typeface="Times New Roman" panose="02020603050405020304" pitchFamily="18" charset="0"/>
-            </a:endParaRPr>
-          </a:p>
-          <a:p>
-            <a:r>
-              <a:rPr lang="ru-RU" sz="2000" dirty="0">
-                <a:latin typeface="Times New Roman" panose="02020603050405020304" pitchFamily="18" charset="0"/>
-                <a:cs typeface="Times New Roman" panose="02020603050405020304" pitchFamily="18" charset="0"/>
-              </a:rPr>
-              <a:t>Пример библиотеки компилируемых языков (Си например): стандартная Си библиотека с функцией </a:t>
-            </a:r>
-            <a:r>
-              <a:rPr lang="ru-RU" sz="2000" dirty="0" err="1">
-                <a:latin typeface="Times New Roman" panose="02020603050405020304" pitchFamily="18" charset="0"/>
-                <a:cs typeface="Times New Roman" panose="02020603050405020304" pitchFamily="18" charset="0"/>
-              </a:rPr>
-              <a:t>printf</a:t>
-            </a:r>
-            <a:r>
-              <a:rPr lang="ru-RU" sz="2000" dirty="0">
-                <a:latin typeface="Times New Roman" panose="02020603050405020304" pitchFamily="18" charset="0"/>
-                <a:cs typeface="Times New Roman" panose="02020603050405020304" pitchFamily="18" charset="0"/>
-              </a:rPr>
-              <a:t>() – </a:t>
-            </a:r>
-            <a:r>
-              <a:rPr lang="en-US" sz="2000" dirty="0" err="1">
-                <a:latin typeface="Times New Roman" panose="02020603050405020304" pitchFamily="18" charset="0"/>
-                <a:cs typeface="Times New Roman" panose="02020603050405020304" pitchFamily="18" charset="0"/>
-              </a:rPr>
-              <a:t>LibC</a:t>
-            </a:r>
-            <a:r>
-              <a:rPr lang="ru-RU" sz="2000" dirty="0">
-                <a:latin typeface="Times New Roman" panose="02020603050405020304" pitchFamily="18" charset="0"/>
-                <a:cs typeface="Times New Roman" panose="02020603050405020304" pitchFamily="18" charset="0"/>
-              </a:rPr>
-              <a:t>. Реализация (логика) в библиотеке</a:t>
-            </a:r>
-            <a:r>
-              <a:rPr lang="en-US" sz="2000" dirty="0">
-                <a:latin typeface="Times New Roman" panose="02020603050405020304" pitchFamily="18" charset="0"/>
-                <a:cs typeface="Times New Roman" panose="02020603050405020304" pitchFamily="18" charset="0"/>
-              </a:rPr>
-              <a:t>, </a:t>
-            </a:r>
-            <a:r>
-              <a:rPr lang="ru-RU" sz="2000" dirty="0">
-                <a:latin typeface="Times New Roman" panose="02020603050405020304" pitchFamily="18" charset="0"/>
-                <a:cs typeface="Times New Roman" panose="02020603050405020304" pitchFamily="18" charset="0"/>
-              </a:rPr>
-              <a:t>интерфейс в заголовочном файле.</a:t>
-            </a:r>
-          </a:p>
-          <a:p>
-            <a:endParaRPr lang="en-US" sz="2000" dirty="0">
-              <a:latin typeface="Times New Roman" panose="02020603050405020304" pitchFamily="18" charset="0"/>
-              <a:cs typeface="Times New Roman" panose="02020603050405020304" pitchFamily="18" charset="0"/>
-            </a:endParaRPr>
-          </a:p>
-          <a:p>
-            <a:r>
-              <a:rPr lang="ru-RU" sz="2000" dirty="0">
-                <a:latin typeface="Times New Roman" panose="02020603050405020304" pitchFamily="18" charset="0"/>
-                <a:cs typeface="Times New Roman" panose="02020603050405020304" pitchFamily="18" charset="0"/>
-              </a:rPr>
-              <a:t>Стандартные пути в </a:t>
-            </a:r>
-            <a:r>
-              <a:rPr lang="en-US" sz="2000" dirty="0">
-                <a:latin typeface="Times New Roman" panose="02020603050405020304" pitchFamily="18" charset="0"/>
-                <a:cs typeface="Times New Roman" panose="02020603050405020304" pitchFamily="18" charset="0"/>
-              </a:rPr>
-              <a:t>Linux:</a:t>
-            </a:r>
-          </a:p>
-          <a:p>
-            <a:r>
-              <a:rPr lang="en-US" sz="2000" dirty="0">
-                <a:latin typeface="Times New Roman" panose="02020603050405020304" pitchFamily="18" charset="0"/>
-                <a:cs typeface="Times New Roman" panose="02020603050405020304" pitchFamily="18" charset="0"/>
-              </a:rPr>
-              <a:t>/</a:t>
-            </a:r>
-            <a:r>
-              <a:rPr lang="en-US" sz="2000" dirty="0" err="1">
-                <a:latin typeface="Times New Roman" panose="02020603050405020304" pitchFamily="18" charset="0"/>
-                <a:cs typeface="Times New Roman" panose="02020603050405020304" pitchFamily="18" charset="0"/>
-              </a:rPr>
-              <a:t>usr</a:t>
-            </a:r>
-            <a:r>
-              <a:rPr lang="en-US" sz="2000" dirty="0">
-                <a:latin typeface="Times New Roman" panose="02020603050405020304" pitchFamily="18" charset="0"/>
-                <a:cs typeface="Times New Roman" panose="02020603050405020304" pitchFamily="18" charset="0"/>
-              </a:rPr>
-              <a:t>/include </a:t>
-            </a:r>
-            <a:r>
-              <a:rPr lang="ru-RU" sz="2000" dirty="0">
-                <a:latin typeface="Times New Roman" panose="02020603050405020304" pitchFamily="18" charset="0"/>
-                <a:cs typeface="Times New Roman" panose="02020603050405020304" pitchFamily="18" charset="0"/>
-              </a:rPr>
-              <a:t>и </a:t>
-            </a:r>
-            <a:r>
-              <a:rPr lang="en-US" sz="2000" dirty="0">
-                <a:latin typeface="Times New Roman" panose="02020603050405020304" pitchFamily="18" charset="0"/>
-                <a:cs typeface="Times New Roman" panose="02020603050405020304" pitchFamily="18" charset="0"/>
-              </a:rPr>
-              <a:t>/</a:t>
-            </a:r>
-            <a:r>
-              <a:rPr lang="en-US" sz="2000" dirty="0" err="1">
-                <a:latin typeface="Times New Roman" panose="02020603050405020304" pitchFamily="18" charset="0"/>
-                <a:cs typeface="Times New Roman" panose="02020603050405020304" pitchFamily="18" charset="0"/>
-              </a:rPr>
-              <a:t>usr</a:t>
-            </a:r>
-            <a:r>
-              <a:rPr lang="en-US" sz="2000" dirty="0">
-                <a:latin typeface="Times New Roman" panose="02020603050405020304" pitchFamily="18" charset="0"/>
-                <a:cs typeface="Times New Roman" panose="02020603050405020304" pitchFamily="18" charset="0"/>
-              </a:rPr>
-              <a:t>/lib/</a:t>
-            </a:r>
-            <a:endParaRPr lang="ru-RU" sz="2000" dirty="0">
-              <a:latin typeface="Times New Roman" panose="02020603050405020304" pitchFamily="18" charset="0"/>
-              <a:cs typeface="Times New Roman" panose="02020603050405020304" pitchFamily="18" charset="0"/>
-            </a:endParaRPr>
-          </a:p>
-        </p:txBody>
-      </p:sp>
-    </p:spTree>
-    <p:extLst>
-      <p:ext uri="{BB962C8B-B14F-4D97-AF65-F5344CB8AC3E}">
-        <p14:creationId xmlns:p14="http://schemas.microsoft.com/office/powerpoint/2010/main" val="1664215080"/>
       </p:ext>
     </p:extLst>
   </p:cSld>
